--- a/assets/powerpoints/module-n7-emploi/D1-la-note-de-service.pptx
+++ b/assets/powerpoints/module-n7-emploi/D1-la-note-de-service.pptx
@@ -17,6 +17,8 @@
     <p:sldId id="265" r:id="rId17"/>
     <p:sldId id="266" r:id="rId18"/>
     <p:sldId id="267" r:id="rId19"/>
+    <p:sldId id="268" r:id="rId20"/>
+    <p:sldId id="269" r:id="rId21"/>
   </p:sldIdLst>
   <p:sldSz cx="12191695" cy="6858000" type="screen4x3"/>
   <p:notesSz cx="6858000" cy="9144000"/>
@@ -583,7 +585,7 @@
           <a:lstStyle/>
           <a:p>
             <a:r>
-              <a:t>Corriger en groupe. Donner la bonne réponse, sans revenir sur qui s'est trompé.</a:t>
+              <a:t>Diapositive à photographier. C'est l'exercice `t3genres` du module, qui en compte dix. La note dit la différence de fond, et elle explique toutes les différences de forme.</a:t>
             </a:r>
           </a:p>
         </p:txBody>
@@ -653,7 +655,7 @@
           <a:lstStyle/>
           <a:p>
             <a:r>
-              <a:t>Ajouter les autres abréviations d'usage au tableau : Mme, p. j. (pièce jointe), c. c. (copie conforme), 1er, 2e. Jamais « 1ère » ni « 2ème ».</a:t>
+              <a:t>Le passage du verbe au nom - la nominalisation - est le même geste qu'au compte rendu, en B4. Le rappeler : c'est ce qui rend les écrits de travail secs et courts.</a:t>
             </a:r>
           </a:p>
         </p:txBody>
@@ -723,6 +725,146 @@
           <a:lstStyle/>
           <a:p>
             <a:r>
+              <a:t>Corriger en groupe. Donner la bonne réponse, sans revenir sur qui s'est trompé.</a:t>
+            </a:r>
+          </a:p>
+        </p:txBody>
+      </p:sp>
+      <p:sp>
+        <p:nvSpPr>
+          <p:cNvPr id="4" name="Slide Number Placeholder 3"/>
+          <p:cNvSpPr>
+            <a:spLocks noGrp="1"/>
+          </p:cNvSpPr>
+          <p:nvPr>
+            <p:ph type="sldNum" idx="5" sz="quarter"/>
+          </p:nvPr>
+        </p:nvSpPr>
+        <p:spPr/>
+      </p:sp>
+    </p:spTree>
+  </p:cSld>
+  <p:clrMapOvr>
+    <a:masterClrMapping/>
+  </p:clrMapOvr>
+</p:notes>
+</file>
+
+<file path=ppt/notesSlides/notesSlide13.xml><?xml version="1.0" encoding="utf-8"?>
+<p:notes xmlns:a="http://schemas.openxmlformats.org/drawingml/2006/main" xmlns:p="http://schemas.openxmlformats.org/presentationml/2006/main" xmlns:r="http://schemas.openxmlformats.org/officeDocument/2006/relationships">
+  <p:cSld>
+    <p:spTree>
+      <p:nvGrpSpPr>
+        <p:cNvPr id="1" name=""/>
+        <p:cNvGrpSpPr/>
+        <p:nvPr/>
+      </p:nvGrpSpPr>
+      <p:grpSpPr>
+        <a:xfrm>
+          <a:off x="0" y="0"/>
+          <a:ext cx="0" cy="0"/>
+          <a:chOff x="0" y="0"/>
+          <a:chExt cx="0" cy="0"/>
+        </a:xfrm>
+      </p:grpSpPr>
+      <p:sp>
+        <p:nvSpPr>
+          <p:cNvPr id="2" name="Slide Image Placeholder 1"/>
+          <p:cNvSpPr>
+            <a:spLocks noGrp="1"/>
+          </p:cNvSpPr>
+          <p:nvPr>
+            <p:ph type="sldImg" idx="2"/>
+          </p:nvPr>
+        </p:nvSpPr>
+        <p:spPr/>
+      </p:sp>
+      <p:sp>
+        <p:nvSpPr>
+          <p:cNvPr id="3" name="Notes Placeholder 2"/>
+          <p:cNvSpPr>
+            <a:spLocks noGrp="1"/>
+          </p:cNvSpPr>
+          <p:nvPr>
+            <p:ph type="body" idx="3" sz="quarter"/>
+          </p:nvPr>
+        </p:nvSpPr>
+        <p:spPr/>
+        <p:txBody>
+          <a:bodyPr/>
+          <a:lstStyle/>
+          <a:p>
+            <a:r>
+              <a:t>Ajouter les autres abréviations d'usage au tableau : Mme, p. j. (pièce jointe), c. c. (copie conforme), 1er, 2e. Jamais « 1ère » ni « 2ème ».</a:t>
+            </a:r>
+          </a:p>
+        </p:txBody>
+      </p:sp>
+      <p:sp>
+        <p:nvSpPr>
+          <p:cNvPr id="4" name="Slide Number Placeholder 3"/>
+          <p:cNvSpPr>
+            <a:spLocks noGrp="1"/>
+          </p:cNvSpPr>
+          <p:nvPr>
+            <p:ph type="sldNum" idx="5" sz="quarter"/>
+          </p:nvPr>
+        </p:nvSpPr>
+        <p:spPr/>
+      </p:sp>
+    </p:spTree>
+  </p:cSld>
+  <p:clrMapOvr>
+    <a:masterClrMapping/>
+  </p:clrMapOvr>
+</p:notes>
+</file>
+
+<file path=ppt/notesSlides/notesSlide14.xml><?xml version="1.0" encoding="utf-8"?>
+<p:notes xmlns:a="http://schemas.openxmlformats.org/drawingml/2006/main" xmlns:p="http://schemas.openxmlformats.org/presentationml/2006/main" xmlns:r="http://schemas.openxmlformats.org/officeDocument/2006/relationships">
+  <p:cSld>
+    <p:spTree>
+      <p:nvGrpSpPr>
+        <p:cNvPr id="1" name=""/>
+        <p:cNvGrpSpPr/>
+        <p:nvPr/>
+      </p:nvGrpSpPr>
+      <p:grpSpPr>
+        <a:xfrm>
+          <a:off x="0" y="0"/>
+          <a:ext cx="0" cy="0"/>
+          <a:chOff x="0" y="0"/>
+          <a:chExt cx="0" cy="0"/>
+        </a:xfrm>
+      </p:grpSpPr>
+      <p:sp>
+        <p:nvSpPr>
+          <p:cNvPr id="2" name="Slide Image Placeholder 1"/>
+          <p:cNvSpPr>
+            <a:spLocks noGrp="1"/>
+          </p:cNvSpPr>
+          <p:nvPr>
+            <p:ph type="sldImg" idx="2"/>
+          </p:nvPr>
+        </p:nvSpPr>
+        <p:spPr/>
+      </p:sp>
+      <p:sp>
+        <p:nvSpPr>
+          <p:cNvPr id="3" name="Notes Placeholder 2"/>
+          <p:cNvSpPr>
+            <a:spLocks noGrp="1"/>
+          </p:cNvSpPr>
+          <p:nvPr>
+            <p:ph type="body" idx="3" sz="quarter"/>
+          </p:nvPr>
+        </p:nvSpPr>
+        <p:spPr/>
+        <p:txBody>
+          <a:bodyPr/>
+          <a:lstStyle/>
+          <a:p>
+            <a:r>
               <a:t>Ramasser. Ne corriger que l'en-tête et l'objet : le corps de la note s'écrit en E2, et le corriger d'avance retirerait l'intérêt de la production finale.</a:t>
             </a:r>
           </a:p>
@@ -1073,7 +1215,7 @@
           <a:lstStyle/>
           <a:p>
             <a:r>
-              <a:t>Ouvrir l'exercice `t3note` du module en parallèle : les élèves cliquent dans la note pendant que le groupe répond à l'oral.</a:t>
+              <a:t>Le texte même de l'exercice `t3note`. Faire retrouver les six parties à même le document, dans l'ordre, avant de poser la moindre question : c'est le modèle que les élèves imiteront en D2.</a:t>
             </a:r>
           </a:p>
         </p:txBody>
@@ -1143,7 +1285,7 @@
           <a:lstStyle/>
           <a:p>
             <a:r>
-              <a:t>Corriger en groupe. Donner la bonne réponse, sans revenir sur qui s'est trompé.</a:t>
+              <a:t>Suite du document. Laisser le temps de le lire en entier avant de poser la première question.</a:t>
             </a:r>
           </a:p>
         </p:txBody>
@@ -1213,7 +1355,7 @@
           <a:lstStyle/>
           <a:p>
             <a:r>
-              <a:t>Diapositive à photographier. C'est l'exercice `t3genres` du module, qui en compte dix. La note dit la différence de fond, et elle explique toutes les différences de forme.</a:t>
+              <a:t>Ouvrir l'exercice `t3note` du module en parallèle : les élèves cliquent dans la note pendant que le groupe répond à l'oral.</a:t>
             </a:r>
           </a:p>
         </p:txBody>
@@ -1283,7 +1425,7 @@
           <a:lstStyle/>
           <a:p>
             <a:r>
-              <a:t>Le passage du verbe au nom - la nominalisation - est le même geste qu'au compte rendu, en B4. Le rappeler : c'est ce qui rend les écrits de travail secs et courts.</a:t>
+              <a:t>Corriger en groupe. Donner la bonne réponse, sans revenir sur qui s'est trompé.</a:t>
             </a:r>
           </a:p>
         </p:txBody>
@@ -4705,7 +4847,7 @@
                 </a:solidFill>
                 <a:latin typeface="Verdana"/>
               </a:rPr>
-              <a:t>CORRECTION</a:t>
+              <a:t>ANALYSE</a:t>
             </a:r>
           </a:p>
         </p:txBody>
@@ -4744,68 +4886,29 @@
                 </a:solidFill>
                 <a:latin typeface="Verdana"/>
               </a:rPr>
-              <a:t>Corrigez l'objet</a:t>
-            </a:r>
-          </a:p>
-        </p:txBody>
-      </p:sp>
-      <p:sp>
-        <p:nvSpPr>
-          <p:cNvPr id="7" name="TextBox 6"/>
-          <p:cNvSpPr txBox="1"/>
-          <p:nvPr/>
-        </p:nvSpPr>
-        <p:spPr>
-          <a:xfrm>
-            <a:off x="566928" y="1645920"/>
-            <a:ext cx="11057839" cy="329184"/>
-          </a:xfrm>
-          <a:prstGeom prst="rect">
-            <a:avLst/>
-          </a:prstGeom>
-          <a:noFill/>
-        </p:spPr>
-        <p:txBody>
-          <a:bodyPr wrap="square" lIns="0" rIns="0" tIns="0" bIns="0" anchor="t">
-            <a:spAutoFit/>
-          </a:bodyPr>
-          <a:lstStyle/>
-          <a:p>
-            <a:pPr algn="l">
-              <a:lnSpc>
-                <a:spcPct val="135000"/>
-              </a:lnSpc>
-            </a:pPr>
-            <a:r>
-              <a:rPr sz="1800" b="0" i="0">
-                <a:solidFill>
-                  <a:srgbClr val="6E7175"/>
-                </a:solidFill>
-                <a:latin typeface="Verdana"/>
-              </a:rPr>
-              <a:t>Correction — on lit la réponse, on ne commente pas l'erreur.</a:t>
-            </a:r>
-          </a:p>
-        </p:txBody>
-      </p:sp>
-      <p:sp>
-        <p:nvSpPr>
-          <p:cNvPr id="8" name="Rounded Rectangle 7"/>
+              <a:t>Note de service ou lettre d'affaires ?</a:t>
+            </a:r>
+          </a:p>
+        </p:txBody>
+      </p:sp>
+      <p:sp>
+        <p:nvSpPr>
+          <p:cNvPr id="7" name="Rounded Rectangle 6"/>
           <p:cNvSpPr/>
           <p:nvPr/>
         </p:nvSpPr>
         <p:spPr>
           <a:xfrm>
-            <a:off x="566928" y="2139696"/>
-            <a:ext cx="11057839" cy="613156"/>
+            <a:off x="566928" y="1810512"/>
+            <a:ext cx="11057839" cy="3002280"/>
           </a:xfrm>
           <a:prstGeom prst="roundRect">
             <a:avLst>
-              <a:gd name="adj" fmla="val 23860"/>
+              <a:gd name="adj" fmla="val 4873"/>
             </a:avLst>
           </a:prstGeom>
           <a:solidFill>
-            <a:srgbClr val="E6F5EE"/>
+            <a:srgbClr val="FFFFFF"/>
           </a:solidFill>
           <a:ln w="12700">
             <a:solidFill>
@@ -4836,22 +4939,176 @@
       </p:sp>
       <p:sp>
         <p:nvSpPr>
-          <p:cNvPr id="9" name="Rounded Rectangle 8"/>
+          <p:cNvPr id="8" name="TextBox 7"/>
+          <p:cNvSpPr txBox="1"/>
+          <p:nvPr/>
+        </p:nvSpPr>
+        <p:spPr>
+          <a:xfrm>
+            <a:off x="932688" y="1975104"/>
+            <a:ext cx="3291492" cy="237744"/>
+          </a:xfrm>
+          <a:prstGeom prst="rect">
+            <a:avLst/>
+          </a:prstGeom>
+          <a:noFill/>
+        </p:spPr>
+        <p:txBody>
+          <a:bodyPr wrap="square" lIns="0" rIns="0" tIns="0" bIns="0" anchor="t">
+            <a:spAutoFit/>
+          </a:bodyPr>
+          <a:lstStyle/>
+          <a:p>
+            <a:pPr algn="l">
+              <a:lnSpc>
+                <a:spcPct val="135000"/>
+              </a:lnSpc>
+            </a:pPr>
+            <a:r>
+              <a:rPr sz="1300" b="1" i="0" spc="156">
+                <a:solidFill>
+                  <a:srgbClr val="6E7175"/>
+                </a:solidFill>
+                <a:latin typeface="Verdana"/>
+              </a:rPr>
+              <a:t>L'ÉLÉMENT</a:t>
+            </a:r>
+          </a:p>
+        </p:txBody>
+      </p:sp>
+      <p:sp>
+        <p:nvSpPr>
+          <p:cNvPr id="9" name="TextBox 8"/>
+          <p:cNvSpPr txBox="1"/>
+          <p:nvPr/>
+        </p:nvSpPr>
+        <p:spPr>
+          <a:xfrm>
+            <a:off x="4443636" y="1975104"/>
+            <a:ext cx="6595914" cy="237744"/>
+          </a:xfrm>
+          <a:prstGeom prst="rect">
+            <a:avLst/>
+          </a:prstGeom>
+          <a:noFill/>
+        </p:spPr>
+        <p:txBody>
+          <a:bodyPr wrap="square" lIns="0" rIns="0" tIns="0" bIns="0" anchor="t">
+            <a:spAutoFit/>
+          </a:bodyPr>
+          <a:lstStyle/>
+          <a:p>
+            <a:pPr algn="l">
+              <a:lnSpc>
+                <a:spcPct val="135000"/>
+              </a:lnSpc>
+            </a:pPr>
+            <a:r>
+              <a:rPr sz="1300" b="1" i="0" spc="156">
+                <a:solidFill>
+                  <a:srgbClr val="6E7175"/>
+                </a:solidFill>
+                <a:latin typeface="Verdana"/>
+              </a:rPr>
+              <a:t>OÙ IL VA</a:t>
+            </a:r>
+          </a:p>
+        </p:txBody>
+      </p:sp>
+      <p:sp>
+        <p:nvSpPr>
+          <p:cNvPr id="10" name="TextBox 9"/>
+          <p:cNvSpPr txBox="1"/>
+          <p:nvPr/>
+        </p:nvSpPr>
+        <p:spPr>
+          <a:xfrm>
+            <a:off x="932688" y="2395728"/>
+            <a:ext cx="3291492" cy="271271"/>
+          </a:xfrm>
+          <a:prstGeom prst="rect">
+            <a:avLst/>
+          </a:prstGeom>
+          <a:noFill/>
+        </p:spPr>
+        <p:txBody>
+          <a:bodyPr wrap="square" lIns="0" rIns="0" tIns="0" bIns="0" anchor="t">
+            <a:spAutoFit/>
+          </a:bodyPr>
+          <a:lstStyle/>
+          <a:p>
+            <a:pPr algn="l">
+              <a:lnSpc>
+                <a:spcPct val="132000"/>
+              </a:lnSpc>
+            </a:pPr>
+            <a:r>
+              <a:rPr sz="1400" b="1" i="0">
+                <a:solidFill>
+                  <a:srgbClr val="B45309"/>
+                </a:solidFill>
+                <a:latin typeface="Verdana"/>
+              </a:rPr>
+              <a:t>DESTINATAIRE et EXPÉDITEUR</a:t>
+            </a:r>
+          </a:p>
+        </p:txBody>
+      </p:sp>
+      <p:sp>
+        <p:nvSpPr>
+          <p:cNvPr id="11" name="TextBox 10"/>
+          <p:cNvSpPr txBox="1"/>
+          <p:nvPr/>
+        </p:nvSpPr>
+        <p:spPr>
+          <a:xfrm>
+            <a:off x="4443636" y="2395728"/>
+            <a:ext cx="6595914" cy="271271"/>
+          </a:xfrm>
+          <a:prstGeom prst="rect">
+            <a:avLst/>
+          </a:prstGeom>
+          <a:noFill/>
+        </p:spPr>
+        <p:txBody>
+          <a:bodyPr wrap="square" lIns="0" rIns="0" tIns="0" bIns="0" anchor="t">
+            <a:spAutoFit/>
+          </a:bodyPr>
+          <a:lstStyle/>
+          <a:p>
+            <a:pPr algn="l">
+              <a:lnSpc>
+                <a:spcPct val="132000"/>
+              </a:lnSpc>
+            </a:pPr>
+            <a:r>
+              <a:rPr sz="1400" b="0" i="0">
+                <a:solidFill>
+                  <a:srgbClr val="3A3D40"/>
+                </a:solidFill>
+                <a:latin typeface="Verdana"/>
+              </a:rPr>
+              <a:t>la note de service</a:t>
+            </a:r>
+          </a:p>
+        </p:txBody>
+      </p:sp>
+      <p:sp>
+        <p:nvSpPr>
+          <p:cNvPr id="12" name="Rectangle 11"/>
           <p:cNvSpPr/>
           <p:nvPr/>
         </p:nvSpPr>
         <p:spPr>
           <a:xfrm>
-            <a:off x="841247" y="2263393"/>
-            <a:ext cx="365760" cy="365760"/>
-          </a:xfrm>
-          <a:prstGeom prst="roundRect">
-            <a:avLst>
-              <a:gd name="adj" fmla="val 32500"/>
-            </a:avLst>
+            <a:off x="932688" y="2740152"/>
+            <a:ext cx="10326319" cy="10058"/>
+          </a:xfrm>
+          <a:prstGeom prst="rect">
+            <a:avLst/>
           </a:prstGeom>
           <a:solidFill>
-            <a:srgbClr val="FBEEDC"/>
+            <a:srgbClr val="EAEAE8"/>
           </a:solidFill>
           <a:ln>
             <a:noFill/>
@@ -4880,14 +5137,14 @@
       </p:sp>
       <p:sp>
         <p:nvSpPr>
-          <p:cNvPr id="10" name="TextBox 9"/>
+          <p:cNvPr id="13" name="TextBox 12"/>
           <p:cNvSpPr txBox="1"/>
           <p:nvPr/>
         </p:nvSpPr>
         <p:spPr>
           <a:xfrm>
-            <a:off x="841247" y="2327401"/>
-            <a:ext cx="365760" cy="256032"/>
+            <a:off x="932688" y="2868168"/>
+            <a:ext cx="3291492" cy="271271"/>
           </a:xfrm>
           <a:prstGeom prst="rect">
             <a:avLst/>
@@ -4900,33 +5157,33 @@
           </a:bodyPr>
           <a:lstStyle/>
           <a:p>
-            <a:pPr algn="ctr">
+            <a:pPr algn="l">
               <a:lnSpc>
-                <a:spcPct val="135000"/>
+                <a:spcPct val="132000"/>
               </a:lnSpc>
             </a:pPr>
             <a:r>
-              <a:rPr sz="1500" b="1" i="0">
+              <a:rPr sz="1400" b="1" i="0">
                 <a:solidFill>
                   <a:srgbClr val="B45309"/>
                 </a:solidFill>
                 <a:latin typeface="Verdana"/>
               </a:rPr>
-              <a:t>1</a:t>
-            </a:r>
-          </a:p>
-        </p:txBody>
-      </p:sp>
-      <p:sp>
-        <p:nvSpPr>
-          <p:cNvPr id="11" name="TextBox 10"/>
+              <a:t>L'adresse du destinataire</a:t>
+            </a:r>
+          </a:p>
+        </p:txBody>
+      </p:sp>
+      <p:sp>
+        <p:nvSpPr>
+          <p:cNvPr id="14" name="TextBox 13"/>
           <p:cNvSpPr txBox="1"/>
           <p:nvPr/>
         </p:nvSpPr>
         <p:spPr>
           <a:xfrm>
-            <a:off x="1344168" y="2295144"/>
-            <a:ext cx="10097719" cy="338836"/>
+            <a:off x="4443636" y="2868168"/>
+            <a:ext cx="6595914" cy="271271"/>
           </a:xfrm>
           <a:prstGeom prst="rect">
             <a:avLst/>
@@ -4941,48 +5198,399 @@
           <a:p>
             <a:pPr algn="l">
               <a:lnSpc>
-                <a:spcPct val="140000"/>
+                <a:spcPct val="132000"/>
               </a:lnSpc>
             </a:pPr>
             <a:r>
-              <a:rPr sz="1700" b="0" i="0">
+              <a:rPr sz="1400" b="0" i="0">
                 <a:solidFill>
                   <a:srgbClr val="3A3D40"/>
                 </a:solidFill>
                 <a:latin typeface="Verdana"/>
               </a:rPr>
-              <a:t>Objet : nous changeons l'horaire du poste 4   </a:t>
-            </a:r>
-            <a:r>
-              <a:rPr sz="1700" b="1" i="0">
-                <a:solidFill>
-                  <a:srgbClr val="07734A"/>
-                </a:solidFill>
-                <a:latin typeface="Verdana"/>
-              </a:rPr>
-              <a:t>» Objet : modification de l'horaire du poste 4</a:t>
-            </a:r>
-          </a:p>
-        </p:txBody>
-      </p:sp>
-      <p:sp>
-        <p:nvSpPr>
-          <p:cNvPr id="12" name="Rounded Rectangle 11"/>
+              <a:t>la lettre d'affaires</a:t>
+            </a:r>
+          </a:p>
+        </p:txBody>
+      </p:sp>
+      <p:sp>
+        <p:nvSpPr>
+          <p:cNvPr id="15" name="Rectangle 14"/>
           <p:cNvSpPr/>
           <p:nvPr/>
         </p:nvSpPr>
         <p:spPr>
           <a:xfrm>
-            <a:off x="566928" y="2880868"/>
-            <a:ext cx="11057839" cy="613156"/>
+            <a:off x="932688" y="3212592"/>
+            <a:ext cx="10326319" cy="10058"/>
+          </a:xfrm>
+          <a:prstGeom prst="rect">
+            <a:avLst/>
+          </a:prstGeom>
+          <a:solidFill>
+            <a:srgbClr val="EAEAE8"/>
+          </a:solidFill>
+          <a:ln>
+            <a:noFill/>
+          </a:ln>
+          <a:effectLst/>
+        </p:spPr>
+        <p:style>
+          <a:lnRef idx="1">
+            <a:schemeClr val="accent1"/>
+          </a:lnRef>
+          <a:fillRef idx="3">
+            <a:schemeClr val="accent1"/>
+          </a:fillRef>
+          <a:effectRef idx="2">
+            <a:schemeClr val="accent1"/>
+          </a:effectRef>
+          <a:fontRef idx="minor">
+            <a:schemeClr val="lt1"/>
+          </a:fontRef>
+        </p:style>
+        <p:txBody>
+          <a:bodyPr rtlCol="0" anchor="ctr"/>
+          <a:lstStyle/>
+          <a:p/>
+        </p:txBody>
+      </p:sp>
+      <p:sp>
+        <p:nvSpPr>
+          <p:cNvPr id="16" name="TextBox 15"/>
+          <p:cNvSpPr txBox="1"/>
+          <p:nvPr/>
+        </p:nvSpPr>
+        <p:spPr>
+          <a:xfrm>
+            <a:off x="932688" y="3340608"/>
+            <a:ext cx="3291492" cy="271271"/>
+          </a:xfrm>
+          <a:prstGeom prst="rect">
+            <a:avLst/>
+          </a:prstGeom>
+          <a:noFill/>
+        </p:spPr>
+        <p:txBody>
+          <a:bodyPr wrap="square" lIns="0" rIns="0" tIns="0" bIns="0" anchor="t">
+            <a:spAutoFit/>
+          </a:bodyPr>
+          <a:lstStyle/>
+          <a:p>
+            <a:pPr algn="l">
+              <a:lnSpc>
+                <a:spcPct val="132000"/>
+              </a:lnSpc>
+            </a:pPr>
+            <a:r>
+              <a:rPr sz="1400" b="1" i="0">
+                <a:solidFill>
+                  <a:srgbClr val="B45309"/>
+                </a:solidFill>
+                <a:latin typeface="Verdana"/>
+              </a:rPr>
+              <a:t>« Monsieur, » seul sur sa ligne</a:t>
+            </a:r>
+          </a:p>
+        </p:txBody>
+      </p:sp>
+      <p:sp>
+        <p:nvSpPr>
+          <p:cNvPr id="17" name="TextBox 16"/>
+          <p:cNvSpPr txBox="1"/>
+          <p:nvPr/>
+        </p:nvSpPr>
+        <p:spPr>
+          <a:xfrm>
+            <a:off x="4443636" y="3340608"/>
+            <a:ext cx="6595914" cy="271271"/>
+          </a:xfrm>
+          <a:prstGeom prst="rect">
+            <a:avLst/>
+          </a:prstGeom>
+          <a:noFill/>
+        </p:spPr>
+        <p:txBody>
+          <a:bodyPr wrap="square" lIns="0" rIns="0" tIns="0" bIns="0" anchor="t">
+            <a:spAutoFit/>
+          </a:bodyPr>
+          <a:lstStyle/>
+          <a:p>
+            <a:pPr algn="l">
+              <a:lnSpc>
+                <a:spcPct val="132000"/>
+              </a:lnSpc>
+            </a:pPr>
+            <a:r>
+              <a:rPr sz="1400" b="0" i="0">
+                <a:solidFill>
+                  <a:srgbClr val="3A3D40"/>
+                </a:solidFill>
+                <a:latin typeface="Verdana"/>
+              </a:rPr>
+              <a:t>la lettre d'affaires</a:t>
+            </a:r>
+          </a:p>
+        </p:txBody>
+      </p:sp>
+      <p:sp>
+        <p:nvSpPr>
+          <p:cNvPr id="18" name="Rectangle 17"/>
+          <p:cNvSpPr/>
+          <p:nvPr/>
+        </p:nvSpPr>
+        <p:spPr>
+          <a:xfrm>
+            <a:off x="932688" y="3685031"/>
+            <a:ext cx="10326319" cy="10058"/>
+          </a:xfrm>
+          <a:prstGeom prst="rect">
+            <a:avLst/>
+          </a:prstGeom>
+          <a:solidFill>
+            <a:srgbClr val="EAEAE8"/>
+          </a:solidFill>
+          <a:ln>
+            <a:noFill/>
+          </a:ln>
+          <a:effectLst/>
+        </p:spPr>
+        <p:style>
+          <a:lnRef idx="1">
+            <a:schemeClr val="accent1"/>
+          </a:lnRef>
+          <a:fillRef idx="3">
+            <a:schemeClr val="accent1"/>
+          </a:fillRef>
+          <a:effectRef idx="2">
+            <a:schemeClr val="accent1"/>
+          </a:effectRef>
+          <a:fontRef idx="minor">
+            <a:schemeClr val="lt1"/>
+          </a:fontRef>
+        </p:style>
+        <p:txBody>
+          <a:bodyPr rtlCol="0" anchor="ctr"/>
+          <a:lstStyle/>
+          <a:p/>
+        </p:txBody>
+      </p:sp>
+      <p:sp>
+        <p:nvSpPr>
+          <p:cNvPr id="19" name="TextBox 18"/>
+          <p:cNvSpPr txBox="1"/>
+          <p:nvPr/>
+        </p:nvSpPr>
+        <p:spPr>
+          <a:xfrm>
+            <a:off x="932688" y="3813047"/>
+            <a:ext cx="3291492" cy="271271"/>
+          </a:xfrm>
+          <a:prstGeom prst="rect">
+            <a:avLst/>
+          </a:prstGeom>
+          <a:noFill/>
+        </p:spPr>
+        <p:txBody>
+          <a:bodyPr wrap="square" lIns="0" rIns="0" tIns="0" bIns="0" anchor="t">
+            <a:spAutoFit/>
+          </a:bodyPr>
+          <a:lstStyle/>
+          <a:p>
+            <a:pPr algn="l">
+              <a:lnSpc>
+                <a:spcPct val="132000"/>
+              </a:lnSpc>
+            </a:pPr>
+            <a:r>
+              <a:rPr sz="1400" b="1" i="0">
+                <a:solidFill>
+                  <a:srgbClr val="B45309"/>
+                </a:solidFill>
+                <a:latin typeface="Verdana"/>
+              </a:rPr>
+              <a:t>« Veuillez agréer... »</a:t>
+            </a:r>
+          </a:p>
+        </p:txBody>
+      </p:sp>
+      <p:sp>
+        <p:nvSpPr>
+          <p:cNvPr id="20" name="TextBox 19"/>
+          <p:cNvSpPr txBox="1"/>
+          <p:nvPr/>
+        </p:nvSpPr>
+        <p:spPr>
+          <a:xfrm>
+            <a:off x="4443636" y="3813047"/>
+            <a:ext cx="6595914" cy="271271"/>
+          </a:xfrm>
+          <a:prstGeom prst="rect">
+            <a:avLst/>
+          </a:prstGeom>
+          <a:noFill/>
+        </p:spPr>
+        <p:txBody>
+          <a:bodyPr wrap="square" lIns="0" rIns="0" tIns="0" bIns="0" anchor="t">
+            <a:spAutoFit/>
+          </a:bodyPr>
+          <a:lstStyle/>
+          <a:p>
+            <a:pPr algn="l">
+              <a:lnSpc>
+                <a:spcPct val="132000"/>
+              </a:lnSpc>
+            </a:pPr>
+            <a:r>
+              <a:rPr sz="1400" b="0" i="0">
+                <a:solidFill>
+                  <a:srgbClr val="3A3D40"/>
+                </a:solidFill>
+                <a:latin typeface="Verdana"/>
+              </a:rPr>
+              <a:t>la lettre d'affaires</a:t>
+            </a:r>
+          </a:p>
+        </p:txBody>
+      </p:sp>
+      <p:sp>
+        <p:nvSpPr>
+          <p:cNvPr id="21" name="Rectangle 20"/>
+          <p:cNvSpPr/>
+          <p:nvPr/>
+        </p:nvSpPr>
+        <p:spPr>
+          <a:xfrm>
+            <a:off x="932688" y="4157471"/>
+            <a:ext cx="10326319" cy="10058"/>
+          </a:xfrm>
+          <a:prstGeom prst="rect">
+            <a:avLst/>
+          </a:prstGeom>
+          <a:solidFill>
+            <a:srgbClr val="EAEAE8"/>
+          </a:solidFill>
+          <a:ln>
+            <a:noFill/>
+          </a:ln>
+          <a:effectLst/>
+        </p:spPr>
+        <p:style>
+          <a:lnRef idx="1">
+            <a:schemeClr val="accent1"/>
+          </a:lnRef>
+          <a:fillRef idx="3">
+            <a:schemeClr val="accent1"/>
+          </a:fillRef>
+          <a:effectRef idx="2">
+            <a:schemeClr val="accent1"/>
+          </a:effectRef>
+          <a:fontRef idx="minor">
+            <a:schemeClr val="lt1"/>
+          </a:fontRef>
+        </p:style>
+        <p:txBody>
+          <a:bodyPr rtlCol="0" anchor="ctr"/>
+          <a:lstStyle/>
+          <a:p/>
+        </p:txBody>
+      </p:sp>
+      <p:sp>
+        <p:nvSpPr>
+          <p:cNvPr id="22" name="TextBox 21"/>
+          <p:cNvSpPr txBox="1"/>
+          <p:nvPr/>
+        </p:nvSpPr>
+        <p:spPr>
+          <a:xfrm>
+            <a:off x="932688" y="4285487"/>
+            <a:ext cx="3291492" cy="271271"/>
+          </a:xfrm>
+          <a:prstGeom prst="rect">
+            <a:avLst/>
+          </a:prstGeom>
+          <a:noFill/>
+        </p:spPr>
+        <p:txBody>
+          <a:bodyPr wrap="square" lIns="0" rIns="0" tIns="0" bIns="0" anchor="t">
+            <a:spAutoFit/>
+          </a:bodyPr>
+          <a:lstStyle/>
+          <a:p>
+            <a:pPr algn="l">
+              <a:lnSpc>
+                <a:spcPct val="132000"/>
+              </a:lnSpc>
+            </a:pPr>
+            <a:r>
+              <a:rPr sz="1400" b="1" i="0">
+                <a:solidFill>
+                  <a:srgbClr val="B45309"/>
+                </a:solidFill>
+                <a:latin typeface="Verdana"/>
+              </a:rPr>
+              <a:t>Elle finit sur la fonction</a:t>
+            </a:r>
+          </a:p>
+        </p:txBody>
+      </p:sp>
+      <p:sp>
+        <p:nvSpPr>
+          <p:cNvPr id="23" name="TextBox 22"/>
+          <p:cNvSpPr txBox="1"/>
+          <p:nvPr/>
+        </p:nvSpPr>
+        <p:spPr>
+          <a:xfrm>
+            <a:off x="4443636" y="4285487"/>
+            <a:ext cx="6595914" cy="271271"/>
+          </a:xfrm>
+          <a:prstGeom prst="rect">
+            <a:avLst/>
+          </a:prstGeom>
+          <a:noFill/>
+        </p:spPr>
+        <p:txBody>
+          <a:bodyPr wrap="square" lIns="0" rIns="0" tIns="0" bIns="0" anchor="t">
+            <a:spAutoFit/>
+          </a:bodyPr>
+          <a:lstStyle/>
+          <a:p>
+            <a:pPr algn="l">
+              <a:lnSpc>
+                <a:spcPct val="132000"/>
+              </a:lnSpc>
+            </a:pPr>
+            <a:r>
+              <a:rPr sz="1400" b="0" i="0">
+                <a:solidFill>
+                  <a:srgbClr val="3A3D40"/>
+                </a:solidFill>
+                <a:latin typeface="Verdana"/>
+              </a:rPr>
+              <a:t>la note de service</a:t>
+            </a:r>
+          </a:p>
+        </p:txBody>
+      </p:sp>
+      <p:sp>
+        <p:nvSpPr>
+          <p:cNvPr id="24" name="Rounded Rectangle 23"/>
+          <p:cNvSpPr/>
+          <p:nvPr/>
+        </p:nvSpPr>
+        <p:spPr>
+          <a:xfrm>
+            <a:off x="566928" y="5050536"/>
+            <a:ext cx="11057839" cy="1027684"/>
           </a:xfrm>
           <a:prstGeom prst="roundRect">
             <a:avLst>
-              <a:gd name="adj" fmla="val 23860"/>
+              <a:gd name="adj" fmla="val 14236"/>
             </a:avLst>
           </a:prstGeom>
           <a:solidFill>
-            <a:srgbClr val="E6F5EE"/>
+            <a:srgbClr val="FBFBFA"/>
           </a:solidFill>
           <a:ln w="12700">
             <a:solidFill>
@@ -5013,58 +5621,14 @@
       </p:sp>
       <p:sp>
         <p:nvSpPr>
-          <p:cNvPr id="13" name="Rounded Rectangle 12"/>
-          <p:cNvSpPr/>
-          <p:nvPr/>
-        </p:nvSpPr>
-        <p:spPr>
-          <a:xfrm>
-            <a:off x="841247" y="3004566"/>
-            <a:ext cx="365760" cy="365760"/>
-          </a:xfrm>
-          <a:prstGeom prst="roundRect">
-            <a:avLst>
-              <a:gd name="adj" fmla="val 32500"/>
-            </a:avLst>
-          </a:prstGeom>
-          <a:solidFill>
-            <a:srgbClr val="FBEEDC"/>
-          </a:solidFill>
-          <a:ln>
-            <a:noFill/>
-          </a:ln>
-          <a:effectLst/>
-        </p:spPr>
-        <p:style>
-          <a:lnRef idx="1">
-            <a:schemeClr val="accent1"/>
-          </a:lnRef>
-          <a:fillRef idx="3">
-            <a:schemeClr val="accent1"/>
-          </a:fillRef>
-          <a:effectRef idx="2">
-            <a:schemeClr val="accent1"/>
-          </a:effectRef>
-          <a:fontRef idx="minor">
-            <a:schemeClr val="lt1"/>
-          </a:fontRef>
-        </p:style>
-        <p:txBody>
-          <a:bodyPr rtlCol="0" anchor="ctr"/>
-          <a:lstStyle/>
-          <a:p/>
-        </p:txBody>
-      </p:sp>
-      <p:sp>
-        <p:nvSpPr>
-          <p:cNvPr id="14" name="TextBox 13"/>
+          <p:cNvPr id="25" name="TextBox 24"/>
           <p:cNvSpPr txBox="1"/>
           <p:nvPr/>
         </p:nvSpPr>
         <p:spPr>
           <a:xfrm>
-            <a:off x="841247" y="3068573"/>
-            <a:ext cx="365760" cy="256032"/>
+            <a:off x="969264" y="5306568"/>
+            <a:ext cx="10234879" cy="570484"/>
           </a:xfrm>
           <a:prstGeom prst="rect">
             <a:avLst/>
@@ -5077,598 +5641,19 @@
           </a:bodyPr>
           <a:lstStyle/>
           <a:p>
-            <a:pPr algn="ctr">
+            <a:pPr algn="l">
               <a:lnSpc>
-                <a:spcPct val="135000"/>
+                <a:spcPct val="145000"/>
               </a:lnSpc>
             </a:pPr>
             <a:r>
-              <a:rPr sz="1500" b="1" i="0">
-                <a:solidFill>
-                  <a:srgbClr val="B45309"/>
-                </a:solidFill>
-                <a:latin typeface="Verdana"/>
-              </a:rPr>
-              <a:t>2</a:t>
-            </a:r>
-          </a:p>
-        </p:txBody>
-      </p:sp>
-      <p:sp>
-        <p:nvSpPr>
-          <p:cNvPr id="15" name="TextBox 14"/>
-          <p:cNvSpPr txBox="1"/>
-          <p:nvPr/>
-        </p:nvSpPr>
-        <p:spPr>
-          <a:xfrm>
-            <a:off x="1344168" y="3036316"/>
-            <a:ext cx="10097719" cy="338836"/>
-          </a:xfrm>
-          <a:prstGeom prst="rect">
-            <a:avLst/>
-          </a:prstGeom>
-          <a:noFill/>
-        </p:spPr>
-        <p:txBody>
-          <a:bodyPr wrap="square" lIns="0" rIns="0" tIns="0" bIns="0" anchor="t">
-            <a:spAutoFit/>
-          </a:bodyPr>
-          <a:lstStyle/>
-          <a:p>
-            <a:pPr algn="l">
-              <a:lnSpc>
-                <a:spcPct val="140000"/>
-              </a:lnSpc>
-            </a:pPr>
-            <a:r>
-              <a:rPr sz="1700" b="0" i="0">
-                <a:solidFill>
-                  <a:srgbClr val="3A3D40"/>
-                </a:solidFill>
-                <a:latin typeface="Verdana"/>
-              </a:rPr>
-              <a:t>Objet : il faut ranger la cafétéria   </a:t>
-            </a:r>
-            <a:r>
-              <a:rPr sz="1700" b="1" i="0">
-                <a:solidFill>
-                  <a:srgbClr val="07734A"/>
-                </a:solidFill>
-                <a:latin typeface="Verdana"/>
-              </a:rPr>
-              <a:t>» Objet : rangement de la cafétéria</a:t>
-            </a:r>
-          </a:p>
-        </p:txBody>
-      </p:sp>
-      <p:sp>
-        <p:nvSpPr>
-          <p:cNvPr id="16" name="Rounded Rectangle 15"/>
-          <p:cNvSpPr/>
-          <p:nvPr/>
-        </p:nvSpPr>
-        <p:spPr>
-          <a:xfrm>
-            <a:off x="566928" y="3622040"/>
-            <a:ext cx="11057839" cy="613156"/>
-          </a:xfrm>
-          <a:prstGeom prst="roundRect">
-            <a:avLst>
-              <a:gd name="adj" fmla="val 23860"/>
-            </a:avLst>
-          </a:prstGeom>
-          <a:solidFill>
-            <a:srgbClr val="E6F5EE"/>
-          </a:solidFill>
-          <a:ln w="12700">
-            <a:solidFill>
-              <a:srgbClr val="EAEAE8"/>
-            </a:solidFill>
-          </a:ln>
-          <a:effectLst/>
-        </p:spPr>
-        <p:style>
-          <a:lnRef idx="1">
-            <a:schemeClr val="accent1"/>
-          </a:lnRef>
-          <a:fillRef idx="3">
-            <a:schemeClr val="accent1"/>
-          </a:fillRef>
-          <a:effectRef idx="2">
-            <a:schemeClr val="accent1"/>
-          </a:effectRef>
-          <a:fontRef idx="minor">
-            <a:schemeClr val="lt1"/>
-          </a:fontRef>
-        </p:style>
-        <p:txBody>
-          <a:bodyPr rtlCol="0" anchor="ctr"/>
-          <a:lstStyle/>
-          <a:p/>
-        </p:txBody>
-      </p:sp>
-      <p:sp>
-        <p:nvSpPr>
-          <p:cNvPr id="17" name="Rounded Rectangle 16"/>
-          <p:cNvSpPr/>
-          <p:nvPr/>
-        </p:nvSpPr>
-        <p:spPr>
-          <a:xfrm>
-            <a:off x="841247" y="3745738"/>
-            <a:ext cx="365760" cy="365760"/>
-          </a:xfrm>
-          <a:prstGeom prst="roundRect">
-            <a:avLst>
-              <a:gd name="adj" fmla="val 32500"/>
-            </a:avLst>
-          </a:prstGeom>
-          <a:solidFill>
-            <a:srgbClr val="FBEEDC"/>
-          </a:solidFill>
-          <a:ln>
-            <a:noFill/>
-          </a:ln>
-          <a:effectLst/>
-        </p:spPr>
-        <p:style>
-          <a:lnRef idx="1">
-            <a:schemeClr val="accent1"/>
-          </a:lnRef>
-          <a:fillRef idx="3">
-            <a:schemeClr val="accent1"/>
-          </a:fillRef>
-          <a:effectRef idx="2">
-            <a:schemeClr val="accent1"/>
-          </a:effectRef>
-          <a:fontRef idx="minor">
-            <a:schemeClr val="lt1"/>
-          </a:fontRef>
-        </p:style>
-        <p:txBody>
-          <a:bodyPr rtlCol="0" anchor="ctr"/>
-          <a:lstStyle/>
-          <a:p/>
-        </p:txBody>
-      </p:sp>
-      <p:sp>
-        <p:nvSpPr>
-          <p:cNvPr id="18" name="TextBox 17"/>
-          <p:cNvSpPr txBox="1"/>
-          <p:nvPr/>
-        </p:nvSpPr>
-        <p:spPr>
-          <a:xfrm>
-            <a:off x="841247" y="3809746"/>
-            <a:ext cx="365760" cy="256032"/>
-          </a:xfrm>
-          <a:prstGeom prst="rect">
-            <a:avLst/>
-          </a:prstGeom>
-          <a:noFill/>
-        </p:spPr>
-        <p:txBody>
-          <a:bodyPr wrap="square" lIns="0" rIns="0" tIns="0" bIns="0" anchor="t">
-            <a:spAutoFit/>
-          </a:bodyPr>
-          <a:lstStyle/>
-          <a:p>
-            <a:pPr algn="ctr">
-              <a:lnSpc>
-                <a:spcPct val="135000"/>
-              </a:lnSpc>
-            </a:pPr>
-            <a:r>
-              <a:rPr sz="1500" b="1" i="0">
-                <a:solidFill>
-                  <a:srgbClr val="B45309"/>
-                </a:solidFill>
-                <a:latin typeface="Verdana"/>
-              </a:rPr>
-              <a:t>3</a:t>
-            </a:r>
-          </a:p>
-        </p:txBody>
-      </p:sp>
-      <p:sp>
-        <p:nvSpPr>
-          <p:cNvPr id="19" name="TextBox 18"/>
-          <p:cNvSpPr txBox="1"/>
-          <p:nvPr/>
-        </p:nvSpPr>
-        <p:spPr>
-          <a:xfrm>
-            <a:off x="1344168" y="3777488"/>
-            <a:ext cx="10097719" cy="338836"/>
-          </a:xfrm>
-          <a:prstGeom prst="rect">
-            <a:avLst/>
-          </a:prstGeom>
-          <a:noFill/>
-        </p:spPr>
-        <p:txBody>
-          <a:bodyPr wrap="square" lIns="0" rIns="0" tIns="0" bIns="0" anchor="t">
-            <a:spAutoFit/>
-          </a:bodyPr>
-          <a:lstStyle/>
-          <a:p>
-            <a:pPr algn="l">
-              <a:lnSpc>
-                <a:spcPct val="140000"/>
-              </a:lnSpc>
-            </a:pPr>
-            <a:r>
-              <a:rPr sz="1700" b="0" i="0">
-                <a:solidFill>
-                  <a:srgbClr val="3A3D40"/>
-                </a:solidFill>
-                <a:latin typeface="Verdana"/>
-              </a:rPr>
-              <a:t>Objet : on va fermer l'entrepôt le 3 juillet   </a:t>
-            </a:r>
-            <a:r>
-              <a:rPr sz="1700" b="1" i="0">
-                <a:solidFill>
-                  <a:srgbClr val="07734A"/>
-                </a:solidFill>
-                <a:latin typeface="Verdana"/>
-              </a:rPr>
-              <a:t>» Objet : fermeture de l'entrepôt le 3 juillet</a:t>
-            </a:r>
-          </a:p>
-        </p:txBody>
-      </p:sp>
-      <p:sp>
-        <p:nvSpPr>
-          <p:cNvPr id="20" name="Rounded Rectangle 19"/>
-          <p:cNvSpPr/>
-          <p:nvPr/>
-        </p:nvSpPr>
-        <p:spPr>
-          <a:xfrm>
-            <a:off x="566928" y="4363212"/>
-            <a:ext cx="11057839" cy="613156"/>
-          </a:xfrm>
-          <a:prstGeom prst="roundRect">
-            <a:avLst>
-              <a:gd name="adj" fmla="val 23860"/>
-            </a:avLst>
-          </a:prstGeom>
-          <a:solidFill>
-            <a:srgbClr val="E6F5EE"/>
-          </a:solidFill>
-          <a:ln w="12700">
-            <a:solidFill>
-              <a:srgbClr val="EAEAE8"/>
-            </a:solidFill>
-          </a:ln>
-          <a:effectLst/>
-        </p:spPr>
-        <p:style>
-          <a:lnRef idx="1">
-            <a:schemeClr val="accent1"/>
-          </a:lnRef>
-          <a:fillRef idx="3">
-            <a:schemeClr val="accent1"/>
-          </a:fillRef>
-          <a:effectRef idx="2">
-            <a:schemeClr val="accent1"/>
-          </a:effectRef>
-          <a:fontRef idx="minor">
-            <a:schemeClr val="lt1"/>
-          </a:fontRef>
-        </p:style>
-        <p:txBody>
-          <a:bodyPr rtlCol="0" anchor="ctr"/>
-          <a:lstStyle/>
-          <a:p/>
-        </p:txBody>
-      </p:sp>
-      <p:sp>
-        <p:nvSpPr>
-          <p:cNvPr id="21" name="Rounded Rectangle 20"/>
-          <p:cNvSpPr/>
-          <p:nvPr/>
-        </p:nvSpPr>
-        <p:spPr>
-          <a:xfrm>
-            <a:off x="841247" y="4486910"/>
-            <a:ext cx="365760" cy="365760"/>
-          </a:xfrm>
-          <a:prstGeom prst="roundRect">
-            <a:avLst>
-              <a:gd name="adj" fmla="val 32500"/>
-            </a:avLst>
-          </a:prstGeom>
-          <a:solidFill>
-            <a:srgbClr val="FBEEDC"/>
-          </a:solidFill>
-          <a:ln>
-            <a:noFill/>
-          </a:ln>
-          <a:effectLst/>
-        </p:spPr>
-        <p:style>
-          <a:lnRef idx="1">
-            <a:schemeClr val="accent1"/>
-          </a:lnRef>
-          <a:fillRef idx="3">
-            <a:schemeClr val="accent1"/>
-          </a:fillRef>
-          <a:effectRef idx="2">
-            <a:schemeClr val="accent1"/>
-          </a:effectRef>
-          <a:fontRef idx="minor">
-            <a:schemeClr val="lt1"/>
-          </a:fontRef>
-        </p:style>
-        <p:txBody>
-          <a:bodyPr rtlCol="0" anchor="ctr"/>
-          <a:lstStyle/>
-          <a:p/>
-        </p:txBody>
-      </p:sp>
-      <p:sp>
-        <p:nvSpPr>
-          <p:cNvPr id="22" name="TextBox 21"/>
-          <p:cNvSpPr txBox="1"/>
-          <p:nvPr/>
-        </p:nvSpPr>
-        <p:spPr>
-          <a:xfrm>
-            <a:off x="841247" y="4550918"/>
-            <a:ext cx="365760" cy="256032"/>
-          </a:xfrm>
-          <a:prstGeom prst="rect">
-            <a:avLst/>
-          </a:prstGeom>
-          <a:noFill/>
-        </p:spPr>
-        <p:txBody>
-          <a:bodyPr wrap="square" lIns="0" rIns="0" tIns="0" bIns="0" anchor="t">
-            <a:spAutoFit/>
-          </a:bodyPr>
-          <a:lstStyle/>
-          <a:p>
-            <a:pPr algn="ctr">
-              <a:lnSpc>
-                <a:spcPct val="135000"/>
-              </a:lnSpc>
-            </a:pPr>
-            <a:r>
-              <a:rPr sz="1500" b="1" i="0">
-                <a:solidFill>
-                  <a:srgbClr val="B45309"/>
-                </a:solidFill>
-                <a:latin typeface="Verdana"/>
-              </a:rPr>
-              <a:t>4</a:t>
-            </a:r>
-          </a:p>
-        </p:txBody>
-      </p:sp>
-      <p:sp>
-        <p:nvSpPr>
-          <p:cNvPr id="23" name="TextBox 22"/>
-          <p:cNvSpPr txBox="1"/>
-          <p:nvPr/>
-        </p:nvSpPr>
-        <p:spPr>
-          <a:xfrm>
-            <a:off x="1344168" y="4518660"/>
-            <a:ext cx="10097719" cy="338836"/>
-          </a:xfrm>
-          <a:prstGeom prst="rect">
-            <a:avLst/>
-          </a:prstGeom>
-          <a:noFill/>
-        </p:spPr>
-        <p:txBody>
-          <a:bodyPr wrap="square" lIns="0" rIns="0" tIns="0" bIns="0" anchor="t">
-            <a:spAutoFit/>
-          </a:bodyPr>
-          <a:lstStyle/>
-          <a:p>
-            <a:pPr algn="l">
-              <a:lnSpc>
-                <a:spcPct val="140000"/>
-              </a:lnSpc>
-            </a:pPr>
-            <a:r>
-              <a:rPr sz="1700" b="0" i="0">
-                <a:solidFill>
-                  <a:srgbClr val="3A3D40"/>
-                </a:solidFill>
-                <a:latin typeface="Verdana"/>
-              </a:rPr>
-              <a:t>Objet : je demande une soumission   </a:t>
-            </a:r>
-            <a:r>
-              <a:rPr sz="1700" b="1" i="0">
-                <a:solidFill>
-                  <a:srgbClr val="07734A"/>
-                </a:solidFill>
-                <a:latin typeface="Verdana"/>
-              </a:rPr>
-              <a:t>» Objet : demande de soumission</a:t>
-            </a:r>
-          </a:p>
-        </p:txBody>
-      </p:sp>
-      <p:sp>
-        <p:nvSpPr>
-          <p:cNvPr id="24" name="Rounded Rectangle 23"/>
-          <p:cNvSpPr/>
-          <p:nvPr/>
-        </p:nvSpPr>
-        <p:spPr>
-          <a:xfrm>
-            <a:off x="566928" y="5104384"/>
-            <a:ext cx="11057839" cy="613156"/>
-          </a:xfrm>
-          <a:prstGeom prst="roundRect">
-            <a:avLst>
-              <a:gd name="adj" fmla="val 23860"/>
-            </a:avLst>
-          </a:prstGeom>
-          <a:solidFill>
-            <a:srgbClr val="E6F5EE"/>
-          </a:solidFill>
-          <a:ln w="12700">
-            <a:solidFill>
-              <a:srgbClr val="EAEAE8"/>
-            </a:solidFill>
-          </a:ln>
-          <a:effectLst/>
-        </p:spPr>
-        <p:style>
-          <a:lnRef idx="1">
-            <a:schemeClr val="accent1"/>
-          </a:lnRef>
-          <a:fillRef idx="3">
-            <a:schemeClr val="accent1"/>
-          </a:fillRef>
-          <a:effectRef idx="2">
-            <a:schemeClr val="accent1"/>
-          </a:effectRef>
-          <a:fontRef idx="minor">
-            <a:schemeClr val="lt1"/>
-          </a:fontRef>
-        </p:style>
-        <p:txBody>
-          <a:bodyPr rtlCol="0" anchor="ctr"/>
-          <a:lstStyle/>
-          <a:p/>
-        </p:txBody>
-      </p:sp>
-      <p:sp>
-        <p:nvSpPr>
-          <p:cNvPr id="25" name="Rounded Rectangle 24"/>
-          <p:cNvSpPr/>
-          <p:nvPr/>
-        </p:nvSpPr>
-        <p:spPr>
-          <a:xfrm>
-            <a:off x="841247" y="5228082"/>
-            <a:ext cx="365760" cy="365760"/>
-          </a:xfrm>
-          <a:prstGeom prst="roundRect">
-            <a:avLst>
-              <a:gd name="adj" fmla="val 32500"/>
-            </a:avLst>
-          </a:prstGeom>
-          <a:solidFill>
-            <a:srgbClr val="FBEEDC"/>
-          </a:solidFill>
-          <a:ln>
-            <a:noFill/>
-          </a:ln>
-          <a:effectLst/>
-        </p:spPr>
-        <p:style>
-          <a:lnRef idx="1">
-            <a:schemeClr val="accent1"/>
-          </a:lnRef>
-          <a:fillRef idx="3">
-            <a:schemeClr val="accent1"/>
-          </a:fillRef>
-          <a:effectRef idx="2">
-            <a:schemeClr val="accent1"/>
-          </a:effectRef>
-          <a:fontRef idx="minor">
-            <a:schemeClr val="lt1"/>
-          </a:fontRef>
-        </p:style>
-        <p:txBody>
-          <a:bodyPr rtlCol="0" anchor="ctr"/>
-          <a:lstStyle/>
-          <a:p/>
-        </p:txBody>
-      </p:sp>
-      <p:sp>
-        <p:nvSpPr>
-          <p:cNvPr id="26" name="TextBox 25"/>
-          <p:cNvSpPr txBox="1"/>
-          <p:nvPr/>
-        </p:nvSpPr>
-        <p:spPr>
-          <a:xfrm>
-            <a:off x="841247" y="5292090"/>
-            <a:ext cx="365760" cy="256032"/>
-          </a:xfrm>
-          <a:prstGeom prst="rect">
-            <a:avLst/>
-          </a:prstGeom>
-          <a:noFill/>
-        </p:spPr>
-        <p:txBody>
-          <a:bodyPr wrap="square" lIns="0" rIns="0" tIns="0" bIns="0" anchor="t">
-            <a:spAutoFit/>
-          </a:bodyPr>
-          <a:lstStyle/>
-          <a:p>
-            <a:pPr algn="ctr">
-              <a:lnSpc>
-                <a:spcPct val="135000"/>
-              </a:lnSpc>
-            </a:pPr>
-            <a:r>
-              <a:rPr sz="1500" b="1" i="0">
-                <a:solidFill>
-                  <a:srgbClr val="B45309"/>
-                </a:solidFill>
-                <a:latin typeface="Verdana"/>
-              </a:rPr>
-              <a:t>5</a:t>
-            </a:r>
-          </a:p>
-        </p:txBody>
-      </p:sp>
-      <p:sp>
-        <p:nvSpPr>
-          <p:cNvPr id="27" name="TextBox 26"/>
-          <p:cNvSpPr txBox="1"/>
-          <p:nvPr/>
-        </p:nvSpPr>
-        <p:spPr>
-          <a:xfrm>
-            <a:off x="1344168" y="5259832"/>
-            <a:ext cx="10097719" cy="338836"/>
-          </a:xfrm>
-          <a:prstGeom prst="rect">
-            <a:avLst/>
-          </a:prstGeom>
-          <a:noFill/>
-        </p:spPr>
-        <p:txBody>
-          <a:bodyPr wrap="square" lIns="0" rIns="0" tIns="0" bIns="0" anchor="t">
-            <a:spAutoFit/>
-          </a:bodyPr>
-          <a:lstStyle/>
-          <a:p>
-            <a:pPr algn="l">
-              <a:lnSpc>
-                <a:spcPct val="140000"/>
-              </a:lnSpc>
-            </a:pPr>
-            <a:r>
-              <a:rPr sz="1700" b="0" i="0">
-                <a:solidFill>
-                  <a:srgbClr val="3A3D40"/>
-                </a:solidFill>
-                <a:latin typeface="Verdana"/>
-              </a:rPr>
-              <a:t>Objet : la formation aura lieu jeudi   </a:t>
-            </a:r>
-            <a:r>
-              <a:rPr sz="1700" b="1" i="0">
-                <a:solidFill>
-                  <a:srgbClr val="07734A"/>
-                </a:solidFill>
-                <a:latin typeface="Verdana"/>
-              </a:rPr>
-              <a:t>» Objet : formation du jeudi 14 mai</a:t>
+              <a:rPr sz="1400" b="0" i="0">
+                <a:solidFill>
+                  <a:srgbClr val="4B4F52"/>
+                </a:solidFill>
+                <a:latin typeface="Verdana"/>
+              </a:rPr>
+              <a:t>La note reste dans l'entreprise et n'engage que l'équipe. La lettre en sort, et ce qui y est écrit peut être invoqué plus tard.</a:t>
             </a:r>
           </a:p>
         </p:txBody>
@@ -5845,7 +5830,7 @@
                 </a:solidFill>
                 <a:latin typeface="Verdana"/>
               </a:rPr>
-              <a:t>PONCTUATION</a:t>
+              <a:t>PRATIQUE</a:t>
             </a:r>
           </a:p>
         </p:txBody>
@@ -5884,67 +5869,21 @@
                 </a:solidFill>
                 <a:latin typeface="Verdana"/>
               </a:rPr>
-              <a:t>Le piège le plus fréquent</a:t>
-            </a:r>
-          </a:p>
-        </p:txBody>
-      </p:sp>
-      <p:sp>
-        <p:nvSpPr>
-          <p:cNvPr id="7" name="Rounded Rectangle 6"/>
-          <p:cNvSpPr/>
-          <p:nvPr/>
-        </p:nvSpPr>
-        <p:spPr>
-          <a:xfrm>
-            <a:off x="566928" y="1856232"/>
-            <a:ext cx="5428335" cy="2331720"/>
-          </a:xfrm>
-          <a:prstGeom prst="roundRect">
-            <a:avLst>
-              <a:gd name="adj" fmla="val 6274"/>
-            </a:avLst>
-          </a:prstGeom>
-          <a:solidFill>
-            <a:srgbClr val="FFF6F5"/>
-          </a:solidFill>
-          <a:ln w="12700">
-            <a:solidFill>
-              <a:srgbClr val="DC2626"/>
-            </a:solidFill>
-          </a:ln>
-          <a:effectLst/>
-        </p:spPr>
-        <p:style>
-          <a:lnRef idx="1">
-            <a:schemeClr val="accent1"/>
-          </a:lnRef>
-          <a:fillRef idx="3">
-            <a:schemeClr val="accent1"/>
-          </a:fillRef>
-          <a:effectRef idx="2">
-            <a:schemeClr val="accent1"/>
-          </a:effectRef>
-          <a:fontRef idx="minor">
-            <a:schemeClr val="lt1"/>
-          </a:fontRef>
-        </p:style>
-        <p:txBody>
-          <a:bodyPr rtlCol="0" anchor="ctr"/>
-          <a:lstStyle/>
-          <a:p/>
-        </p:txBody>
-      </p:sp>
-      <p:sp>
-        <p:nvSpPr>
-          <p:cNvPr id="8" name="TextBox 7"/>
+              <a:t>Corrigez l'objet</a:t>
+            </a:r>
+          </a:p>
+        </p:txBody>
+      </p:sp>
+      <p:sp>
+        <p:nvSpPr>
+          <p:cNvPr id="7" name="TextBox 6"/>
           <p:cNvSpPr txBox="1"/>
           <p:nvPr/>
         </p:nvSpPr>
         <p:spPr>
           <a:xfrm>
-            <a:off x="932688" y="2130552"/>
-            <a:ext cx="4696815" cy="274320"/>
+            <a:off x="566928" y="1645920"/>
+            <a:ext cx="11057839" cy="329184"/>
           </a:xfrm>
           <a:prstGeom prst="rect">
             <a:avLst/>
@@ -5963,194 +5902,31 @@
               </a:lnSpc>
             </a:pPr>
             <a:r>
-              <a:rPr sz="1300" b="1" i="0" spc="156">
-                <a:solidFill>
-                  <a:srgbClr val="B91C1C"/>
-                </a:solidFill>
-                <a:latin typeface="Verdana"/>
-              </a:rPr>
-              <a:t>ON ENTEND SOUVENT</a:t>
-            </a:r>
-          </a:p>
-        </p:txBody>
-      </p:sp>
-      <p:sp>
-        <p:nvSpPr>
-          <p:cNvPr id="9" name="TextBox 8"/>
-          <p:cNvSpPr txBox="1"/>
-          <p:nvPr/>
-        </p:nvSpPr>
-        <p:spPr>
-          <a:xfrm>
-            <a:off x="932688" y="2569464"/>
-            <a:ext cx="4696815" cy="1417320"/>
-          </a:xfrm>
-          <a:prstGeom prst="rect">
-            <a:avLst/>
-          </a:prstGeom>
-          <a:noFill/>
-        </p:spPr>
-        <p:txBody>
-          <a:bodyPr wrap="square" lIns="0" rIns="0" tIns="0" bIns="0" anchor="t">
-            <a:spAutoFit/>
-          </a:bodyPr>
-          <a:lstStyle/>
-          <a:p>
-            <a:pPr algn="l">
-              <a:lnSpc>
-                <a:spcPct val="130000"/>
-              </a:lnSpc>
-            </a:pPr>
-            <a:r>
-              <a:rPr sz="2500" b="1" i="0">
-                <a:solidFill>
-                  <a:srgbClr val="17181A"/>
-                </a:solidFill>
-                <a:latin typeface="Verdana"/>
-              </a:rPr>
-              <a:t>« Terrebonne, 17/09/26 »</a:t>
-            </a:r>
-          </a:p>
-        </p:txBody>
-      </p:sp>
-      <p:sp>
-        <p:nvSpPr>
-          <p:cNvPr id="10" name="Rounded Rectangle 9"/>
+              <a:rPr sz="1800" b="0" i="0">
+                <a:solidFill>
+                  <a:srgbClr val="6E7175"/>
+                </a:solidFill>
+                <a:latin typeface="Verdana"/>
+              </a:rPr>
+              <a:t>Un objet n'a pas de verbe conjugué. Réécrivez-le.</a:t>
+            </a:r>
+          </a:p>
+        </p:txBody>
+      </p:sp>
+      <p:sp>
+        <p:nvSpPr>
+          <p:cNvPr id="8" name="Rounded Rectangle 7"/>
           <p:cNvSpPr/>
           <p:nvPr/>
         </p:nvSpPr>
         <p:spPr>
           <a:xfrm>
-            <a:off x="6196431" y="1856232"/>
-            <a:ext cx="5428335" cy="2331720"/>
+            <a:off x="566928" y="2139696"/>
+            <a:ext cx="11057839" cy="613156"/>
           </a:xfrm>
           <a:prstGeom prst="roundRect">
             <a:avLst>
-              <a:gd name="adj" fmla="val 6274"/>
-            </a:avLst>
-          </a:prstGeom>
-          <a:solidFill>
-            <a:srgbClr val="E6F5EE"/>
-          </a:solidFill>
-          <a:ln w="12700">
-            <a:solidFill>
-              <a:srgbClr val="0A8F5B"/>
-            </a:solidFill>
-          </a:ln>
-          <a:effectLst/>
-        </p:spPr>
-        <p:style>
-          <a:lnRef idx="1">
-            <a:schemeClr val="accent1"/>
-          </a:lnRef>
-          <a:fillRef idx="3">
-            <a:schemeClr val="accent1"/>
-          </a:fillRef>
-          <a:effectRef idx="2">
-            <a:schemeClr val="accent1"/>
-          </a:effectRef>
-          <a:fontRef idx="minor">
-            <a:schemeClr val="lt1"/>
-          </a:fontRef>
-        </p:style>
-        <p:txBody>
-          <a:bodyPr rtlCol="0" anchor="ctr"/>
-          <a:lstStyle/>
-          <a:p/>
-        </p:txBody>
-      </p:sp>
-      <p:sp>
-        <p:nvSpPr>
-          <p:cNvPr id="11" name="TextBox 10"/>
-          <p:cNvSpPr txBox="1"/>
-          <p:nvPr/>
-        </p:nvSpPr>
-        <p:spPr>
-          <a:xfrm>
-            <a:off x="6562191" y="2130552"/>
-            <a:ext cx="4696815" cy="274320"/>
-          </a:xfrm>
-          <a:prstGeom prst="rect">
-            <a:avLst/>
-          </a:prstGeom>
-          <a:noFill/>
-        </p:spPr>
-        <p:txBody>
-          <a:bodyPr wrap="square" lIns="0" rIns="0" tIns="0" bIns="0" anchor="t">
-            <a:spAutoFit/>
-          </a:bodyPr>
-          <a:lstStyle/>
-          <a:p>
-            <a:pPr algn="l">
-              <a:lnSpc>
-                <a:spcPct val="135000"/>
-              </a:lnSpc>
-            </a:pPr>
-            <a:r>
-              <a:rPr sz="1300" b="1" i="0" spc="156">
-                <a:solidFill>
-                  <a:srgbClr val="07734A"/>
-                </a:solidFill>
-                <a:latin typeface="Verdana"/>
-              </a:rPr>
-              <a:t>IL FAUT DIRE PLUTÔT</a:t>
-            </a:r>
-          </a:p>
-        </p:txBody>
-      </p:sp>
-      <p:sp>
-        <p:nvSpPr>
-          <p:cNvPr id="12" name="TextBox 11"/>
-          <p:cNvSpPr txBox="1"/>
-          <p:nvPr/>
-        </p:nvSpPr>
-        <p:spPr>
-          <a:xfrm>
-            <a:off x="6562191" y="2569464"/>
-            <a:ext cx="4696815" cy="1417320"/>
-          </a:xfrm>
-          <a:prstGeom prst="rect">
-            <a:avLst/>
-          </a:prstGeom>
-          <a:noFill/>
-        </p:spPr>
-        <p:txBody>
-          <a:bodyPr wrap="square" lIns="0" rIns="0" tIns="0" bIns="0" anchor="t">
-            <a:spAutoFit/>
-          </a:bodyPr>
-          <a:lstStyle/>
-          <a:p>
-            <a:pPr algn="l">
-              <a:lnSpc>
-                <a:spcPct val="130000"/>
-              </a:lnSpc>
-            </a:pPr>
-            <a:r>
-              <a:rPr sz="2500" b="1" i="0">
-                <a:solidFill>
-                  <a:srgbClr val="17181A"/>
-                </a:solidFill>
-                <a:latin typeface="Verdana"/>
-              </a:rPr>
-              <a:t>« Terrebonne, le 17 septembre 2026 »</a:t>
-            </a:r>
-          </a:p>
-        </p:txBody>
-      </p:sp>
-      <p:sp>
-        <p:nvSpPr>
-          <p:cNvPr id="13" name="Rounded Rectangle 12"/>
-          <p:cNvSpPr/>
-          <p:nvPr/>
-        </p:nvSpPr>
-        <p:spPr>
-          <a:xfrm>
-            <a:off x="566928" y="4462272"/>
-            <a:ext cx="11057839" cy="1618487"/>
-          </a:xfrm>
-          <a:prstGeom prst="roundRect">
-            <a:avLst>
-              <a:gd name="adj" fmla="val 9039"/>
+              <a:gd name="adj" fmla="val 23860"/>
             </a:avLst>
           </a:prstGeom>
           <a:solidFill>
@@ -6185,14 +5961,58 @@
       </p:sp>
       <p:sp>
         <p:nvSpPr>
-          <p:cNvPr id="14" name="TextBox 13"/>
+          <p:cNvPr id="9" name="Rounded Rectangle 8"/>
+          <p:cNvSpPr/>
+          <p:nvPr/>
+        </p:nvSpPr>
+        <p:spPr>
+          <a:xfrm>
+            <a:off x="841247" y="2263393"/>
+            <a:ext cx="365760" cy="365760"/>
+          </a:xfrm>
+          <a:prstGeom prst="roundRect">
+            <a:avLst>
+              <a:gd name="adj" fmla="val 32500"/>
+            </a:avLst>
+          </a:prstGeom>
+          <a:solidFill>
+            <a:srgbClr val="FBEEDC"/>
+          </a:solidFill>
+          <a:ln>
+            <a:noFill/>
+          </a:ln>
+          <a:effectLst/>
+        </p:spPr>
+        <p:style>
+          <a:lnRef idx="1">
+            <a:schemeClr val="accent1"/>
+          </a:lnRef>
+          <a:fillRef idx="3">
+            <a:schemeClr val="accent1"/>
+          </a:fillRef>
+          <a:effectRef idx="2">
+            <a:schemeClr val="accent1"/>
+          </a:effectRef>
+          <a:fontRef idx="minor">
+            <a:schemeClr val="lt1"/>
+          </a:fontRef>
+        </p:style>
+        <p:txBody>
+          <a:bodyPr rtlCol="0" anchor="ctr"/>
+          <a:lstStyle/>
+          <a:p/>
+        </p:txBody>
+      </p:sp>
+      <p:sp>
+        <p:nvSpPr>
+          <p:cNvPr id="10" name="TextBox 9"/>
           <p:cNvSpPr txBox="1"/>
           <p:nvPr/>
         </p:nvSpPr>
         <p:spPr>
           <a:xfrm>
-            <a:off x="969264" y="4736592"/>
-            <a:ext cx="10234879" cy="1518920"/>
+            <a:off x="841247" y="2327401"/>
+            <a:ext cx="365760" cy="256032"/>
           </a:xfrm>
           <a:prstGeom prst="rect">
             <a:avLst/>
@@ -6205,19 +6025,730 @@
           </a:bodyPr>
           <a:lstStyle/>
           <a:p>
+            <a:pPr algn="ctr">
+              <a:lnSpc>
+                <a:spcPct val="135000"/>
+              </a:lnSpc>
+            </a:pPr>
+            <a:r>
+              <a:rPr sz="1500" b="1" i="0">
+                <a:solidFill>
+                  <a:srgbClr val="B45309"/>
+                </a:solidFill>
+                <a:latin typeface="Verdana"/>
+              </a:rPr>
+              <a:t>1</a:t>
+            </a:r>
+          </a:p>
+        </p:txBody>
+      </p:sp>
+      <p:sp>
+        <p:nvSpPr>
+          <p:cNvPr id="11" name="TextBox 10"/>
+          <p:cNvSpPr txBox="1"/>
+          <p:nvPr/>
+        </p:nvSpPr>
+        <p:spPr>
+          <a:xfrm>
+            <a:off x="1344168" y="2295144"/>
+            <a:ext cx="10097719" cy="338836"/>
+          </a:xfrm>
+          <a:prstGeom prst="rect">
+            <a:avLst/>
+          </a:prstGeom>
+          <a:noFill/>
+        </p:spPr>
+        <p:txBody>
+          <a:bodyPr wrap="square" lIns="0" rIns="0" tIns="0" bIns="0" anchor="t">
+            <a:spAutoFit/>
+          </a:bodyPr>
+          <a:lstStyle/>
+          <a:p>
             <a:pPr algn="l">
               <a:lnSpc>
-                <a:spcPct val="145000"/>
+                <a:spcPct val="140000"/>
               </a:lnSpc>
             </a:pPr>
             <a:r>
-              <a:rPr sz="2000" b="0" i="0">
-                <a:solidFill>
-                  <a:srgbClr val="4B4F52"/>
-                </a:solidFill>
-                <a:latin typeface="Verdana"/>
-              </a:rPr>
-              <a:t>Le mois s'écrit en toutes lettres dans un écrit de travail. Une date en chiffres ne se lit pas de la même façon partout - le 09/03 est le 9 mars ici et le 3 septembre ailleurs - et un document se relit parfois deux ans plus tard. Même règle pour les abréviations : « M. » et non « Mr », qui est anglais.</a:t>
+              <a:rPr sz="1700" b="0" i="0">
+                <a:solidFill>
+                  <a:srgbClr val="3A3D40"/>
+                </a:solidFill>
+                <a:latin typeface="Verdana"/>
+              </a:rPr>
+              <a:t>Objet : nous changeons l'horaire du poste 4</a:t>
+            </a:r>
+          </a:p>
+        </p:txBody>
+      </p:sp>
+      <p:sp>
+        <p:nvSpPr>
+          <p:cNvPr id="12" name="Rounded Rectangle 11"/>
+          <p:cNvSpPr/>
+          <p:nvPr/>
+        </p:nvSpPr>
+        <p:spPr>
+          <a:xfrm>
+            <a:off x="566928" y="2880868"/>
+            <a:ext cx="11057839" cy="613156"/>
+          </a:xfrm>
+          <a:prstGeom prst="roundRect">
+            <a:avLst>
+              <a:gd name="adj" fmla="val 23860"/>
+            </a:avLst>
+          </a:prstGeom>
+          <a:solidFill>
+            <a:srgbClr val="FFFFFF"/>
+          </a:solidFill>
+          <a:ln w="12700">
+            <a:solidFill>
+              <a:srgbClr val="EAEAE8"/>
+            </a:solidFill>
+          </a:ln>
+          <a:effectLst/>
+        </p:spPr>
+        <p:style>
+          <a:lnRef idx="1">
+            <a:schemeClr val="accent1"/>
+          </a:lnRef>
+          <a:fillRef idx="3">
+            <a:schemeClr val="accent1"/>
+          </a:fillRef>
+          <a:effectRef idx="2">
+            <a:schemeClr val="accent1"/>
+          </a:effectRef>
+          <a:fontRef idx="minor">
+            <a:schemeClr val="lt1"/>
+          </a:fontRef>
+        </p:style>
+        <p:txBody>
+          <a:bodyPr rtlCol="0" anchor="ctr"/>
+          <a:lstStyle/>
+          <a:p/>
+        </p:txBody>
+      </p:sp>
+      <p:sp>
+        <p:nvSpPr>
+          <p:cNvPr id="13" name="Rounded Rectangle 12"/>
+          <p:cNvSpPr/>
+          <p:nvPr/>
+        </p:nvSpPr>
+        <p:spPr>
+          <a:xfrm>
+            <a:off x="841247" y="3004566"/>
+            <a:ext cx="365760" cy="365760"/>
+          </a:xfrm>
+          <a:prstGeom prst="roundRect">
+            <a:avLst>
+              <a:gd name="adj" fmla="val 32500"/>
+            </a:avLst>
+          </a:prstGeom>
+          <a:solidFill>
+            <a:srgbClr val="FBEEDC"/>
+          </a:solidFill>
+          <a:ln>
+            <a:noFill/>
+          </a:ln>
+          <a:effectLst/>
+        </p:spPr>
+        <p:style>
+          <a:lnRef idx="1">
+            <a:schemeClr val="accent1"/>
+          </a:lnRef>
+          <a:fillRef idx="3">
+            <a:schemeClr val="accent1"/>
+          </a:fillRef>
+          <a:effectRef idx="2">
+            <a:schemeClr val="accent1"/>
+          </a:effectRef>
+          <a:fontRef idx="minor">
+            <a:schemeClr val="lt1"/>
+          </a:fontRef>
+        </p:style>
+        <p:txBody>
+          <a:bodyPr rtlCol="0" anchor="ctr"/>
+          <a:lstStyle/>
+          <a:p/>
+        </p:txBody>
+      </p:sp>
+      <p:sp>
+        <p:nvSpPr>
+          <p:cNvPr id="14" name="TextBox 13"/>
+          <p:cNvSpPr txBox="1"/>
+          <p:nvPr/>
+        </p:nvSpPr>
+        <p:spPr>
+          <a:xfrm>
+            <a:off x="841247" y="3068573"/>
+            <a:ext cx="365760" cy="256032"/>
+          </a:xfrm>
+          <a:prstGeom prst="rect">
+            <a:avLst/>
+          </a:prstGeom>
+          <a:noFill/>
+        </p:spPr>
+        <p:txBody>
+          <a:bodyPr wrap="square" lIns="0" rIns="0" tIns="0" bIns="0" anchor="t">
+            <a:spAutoFit/>
+          </a:bodyPr>
+          <a:lstStyle/>
+          <a:p>
+            <a:pPr algn="ctr">
+              <a:lnSpc>
+                <a:spcPct val="135000"/>
+              </a:lnSpc>
+            </a:pPr>
+            <a:r>
+              <a:rPr sz="1500" b="1" i="0">
+                <a:solidFill>
+                  <a:srgbClr val="B45309"/>
+                </a:solidFill>
+                <a:latin typeface="Verdana"/>
+              </a:rPr>
+              <a:t>2</a:t>
+            </a:r>
+          </a:p>
+        </p:txBody>
+      </p:sp>
+      <p:sp>
+        <p:nvSpPr>
+          <p:cNvPr id="15" name="TextBox 14"/>
+          <p:cNvSpPr txBox="1"/>
+          <p:nvPr/>
+        </p:nvSpPr>
+        <p:spPr>
+          <a:xfrm>
+            <a:off x="1344168" y="3036316"/>
+            <a:ext cx="10097719" cy="338836"/>
+          </a:xfrm>
+          <a:prstGeom prst="rect">
+            <a:avLst/>
+          </a:prstGeom>
+          <a:noFill/>
+        </p:spPr>
+        <p:txBody>
+          <a:bodyPr wrap="square" lIns="0" rIns="0" tIns="0" bIns="0" anchor="t">
+            <a:spAutoFit/>
+          </a:bodyPr>
+          <a:lstStyle/>
+          <a:p>
+            <a:pPr algn="l">
+              <a:lnSpc>
+                <a:spcPct val="140000"/>
+              </a:lnSpc>
+            </a:pPr>
+            <a:r>
+              <a:rPr sz="1700" b="0" i="0">
+                <a:solidFill>
+                  <a:srgbClr val="3A3D40"/>
+                </a:solidFill>
+                <a:latin typeface="Verdana"/>
+              </a:rPr>
+              <a:t>Objet : il faut ranger la cafétéria</a:t>
+            </a:r>
+          </a:p>
+        </p:txBody>
+      </p:sp>
+      <p:sp>
+        <p:nvSpPr>
+          <p:cNvPr id="16" name="Rounded Rectangle 15"/>
+          <p:cNvSpPr/>
+          <p:nvPr/>
+        </p:nvSpPr>
+        <p:spPr>
+          <a:xfrm>
+            <a:off x="566928" y="3622040"/>
+            <a:ext cx="11057839" cy="613156"/>
+          </a:xfrm>
+          <a:prstGeom prst="roundRect">
+            <a:avLst>
+              <a:gd name="adj" fmla="val 23860"/>
+            </a:avLst>
+          </a:prstGeom>
+          <a:solidFill>
+            <a:srgbClr val="FFFFFF"/>
+          </a:solidFill>
+          <a:ln w="12700">
+            <a:solidFill>
+              <a:srgbClr val="EAEAE8"/>
+            </a:solidFill>
+          </a:ln>
+          <a:effectLst/>
+        </p:spPr>
+        <p:style>
+          <a:lnRef idx="1">
+            <a:schemeClr val="accent1"/>
+          </a:lnRef>
+          <a:fillRef idx="3">
+            <a:schemeClr val="accent1"/>
+          </a:fillRef>
+          <a:effectRef idx="2">
+            <a:schemeClr val="accent1"/>
+          </a:effectRef>
+          <a:fontRef idx="minor">
+            <a:schemeClr val="lt1"/>
+          </a:fontRef>
+        </p:style>
+        <p:txBody>
+          <a:bodyPr rtlCol="0" anchor="ctr"/>
+          <a:lstStyle/>
+          <a:p/>
+        </p:txBody>
+      </p:sp>
+      <p:sp>
+        <p:nvSpPr>
+          <p:cNvPr id="17" name="Rounded Rectangle 16"/>
+          <p:cNvSpPr/>
+          <p:nvPr/>
+        </p:nvSpPr>
+        <p:spPr>
+          <a:xfrm>
+            <a:off x="841247" y="3745738"/>
+            <a:ext cx="365760" cy="365760"/>
+          </a:xfrm>
+          <a:prstGeom prst="roundRect">
+            <a:avLst>
+              <a:gd name="adj" fmla="val 32500"/>
+            </a:avLst>
+          </a:prstGeom>
+          <a:solidFill>
+            <a:srgbClr val="FBEEDC"/>
+          </a:solidFill>
+          <a:ln>
+            <a:noFill/>
+          </a:ln>
+          <a:effectLst/>
+        </p:spPr>
+        <p:style>
+          <a:lnRef idx="1">
+            <a:schemeClr val="accent1"/>
+          </a:lnRef>
+          <a:fillRef idx="3">
+            <a:schemeClr val="accent1"/>
+          </a:fillRef>
+          <a:effectRef idx="2">
+            <a:schemeClr val="accent1"/>
+          </a:effectRef>
+          <a:fontRef idx="minor">
+            <a:schemeClr val="lt1"/>
+          </a:fontRef>
+        </p:style>
+        <p:txBody>
+          <a:bodyPr rtlCol="0" anchor="ctr"/>
+          <a:lstStyle/>
+          <a:p/>
+        </p:txBody>
+      </p:sp>
+      <p:sp>
+        <p:nvSpPr>
+          <p:cNvPr id="18" name="TextBox 17"/>
+          <p:cNvSpPr txBox="1"/>
+          <p:nvPr/>
+        </p:nvSpPr>
+        <p:spPr>
+          <a:xfrm>
+            <a:off x="841247" y="3809746"/>
+            <a:ext cx="365760" cy="256032"/>
+          </a:xfrm>
+          <a:prstGeom prst="rect">
+            <a:avLst/>
+          </a:prstGeom>
+          <a:noFill/>
+        </p:spPr>
+        <p:txBody>
+          <a:bodyPr wrap="square" lIns="0" rIns="0" tIns="0" bIns="0" anchor="t">
+            <a:spAutoFit/>
+          </a:bodyPr>
+          <a:lstStyle/>
+          <a:p>
+            <a:pPr algn="ctr">
+              <a:lnSpc>
+                <a:spcPct val="135000"/>
+              </a:lnSpc>
+            </a:pPr>
+            <a:r>
+              <a:rPr sz="1500" b="1" i="0">
+                <a:solidFill>
+                  <a:srgbClr val="B45309"/>
+                </a:solidFill>
+                <a:latin typeface="Verdana"/>
+              </a:rPr>
+              <a:t>3</a:t>
+            </a:r>
+          </a:p>
+        </p:txBody>
+      </p:sp>
+      <p:sp>
+        <p:nvSpPr>
+          <p:cNvPr id="19" name="TextBox 18"/>
+          <p:cNvSpPr txBox="1"/>
+          <p:nvPr/>
+        </p:nvSpPr>
+        <p:spPr>
+          <a:xfrm>
+            <a:off x="1344168" y="3777488"/>
+            <a:ext cx="10097719" cy="338836"/>
+          </a:xfrm>
+          <a:prstGeom prst="rect">
+            <a:avLst/>
+          </a:prstGeom>
+          <a:noFill/>
+        </p:spPr>
+        <p:txBody>
+          <a:bodyPr wrap="square" lIns="0" rIns="0" tIns="0" bIns="0" anchor="t">
+            <a:spAutoFit/>
+          </a:bodyPr>
+          <a:lstStyle/>
+          <a:p>
+            <a:pPr algn="l">
+              <a:lnSpc>
+                <a:spcPct val="140000"/>
+              </a:lnSpc>
+            </a:pPr>
+            <a:r>
+              <a:rPr sz="1700" b="0" i="0">
+                <a:solidFill>
+                  <a:srgbClr val="3A3D40"/>
+                </a:solidFill>
+                <a:latin typeface="Verdana"/>
+              </a:rPr>
+              <a:t>Objet : on va fermer l'entrepôt le 3 juillet</a:t>
+            </a:r>
+          </a:p>
+        </p:txBody>
+      </p:sp>
+      <p:sp>
+        <p:nvSpPr>
+          <p:cNvPr id="20" name="Rounded Rectangle 19"/>
+          <p:cNvSpPr/>
+          <p:nvPr/>
+        </p:nvSpPr>
+        <p:spPr>
+          <a:xfrm>
+            <a:off x="566928" y="4363212"/>
+            <a:ext cx="11057839" cy="613156"/>
+          </a:xfrm>
+          <a:prstGeom prst="roundRect">
+            <a:avLst>
+              <a:gd name="adj" fmla="val 23860"/>
+            </a:avLst>
+          </a:prstGeom>
+          <a:solidFill>
+            <a:srgbClr val="FFFFFF"/>
+          </a:solidFill>
+          <a:ln w="12700">
+            <a:solidFill>
+              <a:srgbClr val="EAEAE8"/>
+            </a:solidFill>
+          </a:ln>
+          <a:effectLst/>
+        </p:spPr>
+        <p:style>
+          <a:lnRef idx="1">
+            <a:schemeClr val="accent1"/>
+          </a:lnRef>
+          <a:fillRef idx="3">
+            <a:schemeClr val="accent1"/>
+          </a:fillRef>
+          <a:effectRef idx="2">
+            <a:schemeClr val="accent1"/>
+          </a:effectRef>
+          <a:fontRef idx="minor">
+            <a:schemeClr val="lt1"/>
+          </a:fontRef>
+        </p:style>
+        <p:txBody>
+          <a:bodyPr rtlCol="0" anchor="ctr"/>
+          <a:lstStyle/>
+          <a:p/>
+        </p:txBody>
+      </p:sp>
+      <p:sp>
+        <p:nvSpPr>
+          <p:cNvPr id="21" name="Rounded Rectangle 20"/>
+          <p:cNvSpPr/>
+          <p:nvPr/>
+        </p:nvSpPr>
+        <p:spPr>
+          <a:xfrm>
+            <a:off x="841247" y="4486910"/>
+            <a:ext cx="365760" cy="365760"/>
+          </a:xfrm>
+          <a:prstGeom prst="roundRect">
+            <a:avLst>
+              <a:gd name="adj" fmla="val 32500"/>
+            </a:avLst>
+          </a:prstGeom>
+          <a:solidFill>
+            <a:srgbClr val="FBEEDC"/>
+          </a:solidFill>
+          <a:ln>
+            <a:noFill/>
+          </a:ln>
+          <a:effectLst/>
+        </p:spPr>
+        <p:style>
+          <a:lnRef idx="1">
+            <a:schemeClr val="accent1"/>
+          </a:lnRef>
+          <a:fillRef idx="3">
+            <a:schemeClr val="accent1"/>
+          </a:fillRef>
+          <a:effectRef idx="2">
+            <a:schemeClr val="accent1"/>
+          </a:effectRef>
+          <a:fontRef idx="minor">
+            <a:schemeClr val="lt1"/>
+          </a:fontRef>
+        </p:style>
+        <p:txBody>
+          <a:bodyPr rtlCol="0" anchor="ctr"/>
+          <a:lstStyle/>
+          <a:p/>
+        </p:txBody>
+      </p:sp>
+      <p:sp>
+        <p:nvSpPr>
+          <p:cNvPr id="22" name="TextBox 21"/>
+          <p:cNvSpPr txBox="1"/>
+          <p:nvPr/>
+        </p:nvSpPr>
+        <p:spPr>
+          <a:xfrm>
+            <a:off x="841247" y="4550918"/>
+            <a:ext cx="365760" cy="256032"/>
+          </a:xfrm>
+          <a:prstGeom prst="rect">
+            <a:avLst/>
+          </a:prstGeom>
+          <a:noFill/>
+        </p:spPr>
+        <p:txBody>
+          <a:bodyPr wrap="square" lIns="0" rIns="0" tIns="0" bIns="0" anchor="t">
+            <a:spAutoFit/>
+          </a:bodyPr>
+          <a:lstStyle/>
+          <a:p>
+            <a:pPr algn="ctr">
+              <a:lnSpc>
+                <a:spcPct val="135000"/>
+              </a:lnSpc>
+            </a:pPr>
+            <a:r>
+              <a:rPr sz="1500" b="1" i="0">
+                <a:solidFill>
+                  <a:srgbClr val="B45309"/>
+                </a:solidFill>
+                <a:latin typeface="Verdana"/>
+              </a:rPr>
+              <a:t>4</a:t>
+            </a:r>
+          </a:p>
+        </p:txBody>
+      </p:sp>
+      <p:sp>
+        <p:nvSpPr>
+          <p:cNvPr id="23" name="TextBox 22"/>
+          <p:cNvSpPr txBox="1"/>
+          <p:nvPr/>
+        </p:nvSpPr>
+        <p:spPr>
+          <a:xfrm>
+            <a:off x="1344168" y="4518660"/>
+            <a:ext cx="10097719" cy="338836"/>
+          </a:xfrm>
+          <a:prstGeom prst="rect">
+            <a:avLst/>
+          </a:prstGeom>
+          <a:noFill/>
+        </p:spPr>
+        <p:txBody>
+          <a:bodyPr wrap="square" lIns="0" rIns="0" tIns="0" bIns="0" anchor="t">
+            <a:spAutoFit/>
+          </a:bodyPr>
+          <a:lstStyle/>
+          <a:p>
+            <a:pPr algn="l">
+              <a:lnSpc>
+                <a:spcPct val="140000"/>
+              </a:lnSpc>
+            </a:pPr>
+            <a:r>
+              <a:rPr sz="1700" b="0" i="0">
+                <a:solidFill>
+                  <a:srgbClr val="3A3D40"/>
+                </a:solidFill>
+                <a:latin typeface="Verdana"/>
+              </a:rPr>
+              <a:t>Objet : je demande une soumission</a:t>
+            </a:r>
+          </a:p>
+        </p:txBody>
+      </p:sp>
+      <p:sp>
+        <p:nvSpPr>
+          <p:cNvPr id="24" name="Rounded Rectangle 23"/>
+          <p:cNvSpPr/>
+          <p:nvPr/>
+        </p:nvSpPr>
+        <p:spPr>
+          <a:xfrm>
+            <a:off x="566928" y="5104384"/>
+            <a:ext cx="11057839" cy="613156"/>
+          </a:xfrm>
+          <a:prstGeom prst="roundRect">
+            <a:avLst>
+              <a:gd name="adj" fmla="val 23860"/>
+            </a:avLst>
+          </a:prstGeom>
+          <a:solidFill>
+            <a:srgbClr val="FFFFFF"/>
+          </a:solidFill>
+          <a:ln w="12700">
+            <a:solidFill>
+              <a:srgbClr val="EAEAE8"/>
+            </a:solidFill>
+          </a:ln>
+          <a:effectLst/>
+        </p:spPr>
+        <p:style>
+          <a:lnRef idx="1">
+            <a:schemeClr val="accent1"/>
+          </a:lnRef>
+          <a:fillRef idx="3">
+            <a:schemeClr val="accent1"/>
+          </a:fillRef>
+          <a:effectRef idx="2">
+            <a:schemeClr val="accent1"/>
+          </a:effectRef>
+          <a:fontRef idx="minor">
+            <a:schemeClr val="lt1"/>
+          </a:fontRef>
+        </p:style>
+        <p:txBody>
+          <a:bodyPr rtlCol="0" anchor="ctr"/>
+          <a:lstStyle/>
+          <a:p/>
+        </p:txBody>
+      </p:sp>
+      <p:sp>
+        <p:nvSpPr>
+          <p:cNvPr id="25" name="Rounded Rectangle 24"/>
+          <p:cNvSpPr/>
+          <p:nvPr/>
+        </p:nvSpPr>
+        <p:spPr>
+          <a:xfrm>
+            <a:off x="841247" y="5228082"/>
+            <a:ext cx="365760" cy="365760"/>
+          </a:xfrm>
+          <a:prstGeom prst="roundRect">
+            <a:avLst>
+              <a:gd name="adj" fmla="val 32500"/>
+            </a:avLst>
+          </a:prstGeom>
+          <a:solidFill>
+            <a:srgbClr val="FBEEDC"/>
+          </a:solidFill>
+          <a:ln>
+            <a:noFill/>
+          </a:ln>
+          <a:effectLst/>
+        </p:spPr>
+        <p:style>
+          <a:lnRef idx="1">
+            <a:schemeClr val="accent1"/>
+          </a:lnRef>
+          <a:fillRef idx="3">
+            <a:schemeClr val="accent1"/>
+          </a:fillRef>
+          <a:effectRef idx="2">
+            <a:schemeClr val="accent1"/>
+          </a:effectRef>
+          <a:fontRef idx="minor">
+            <a:schemeClr val="lt1"/>
+          </a:fontRef>
+        </p:style>
+        <p:txBody>
+          <a:bodyPr rtlCol="0" anchor="ctr"/>
+          <a:lstStyle/>
+          <a:p/>
+        </p:txBody>
+      </p:sp>
+      <p:sp>
+        <p:nvSpPr>
+          <p:cNvPr id="26" name="TextBox 25"/>
+          <p:cNvSpPr txBox="1"/>
+          <p:nvPr/>
+        </p:nvSpPr>
+        <p:spPr>
+          <a:xfrm>
+            <a:off x="841247" y="5292090"/>
+            <a:ext cx="365760" cy="256032"/>
+          </a:xfrm>
+          <a:prstGeom prst="rect">
+            <a:avLst/>
+          </a:prstGeom>
+          <a:noFill/>
+        </p:spPr>
+        <p:txBody>
+          <a:bodyPr wrap="square" lIns="0" rIns="0" tIns="0" bIns="0" anchor="t">
+            <a:spAutoFit/>
+          </a:bodyPr>
+          <a:lstStyle/>
+          <a:p>
+            <a:pPr algn="ctr">
+              <a:lnSpc>
+                <a:spcPct val="135000"/>
+              </a:lnSpc>
+            </a:pPr>
+            <a:r>
+              <a:rPr sz="1500" b="1" i="0">
+                <a:solidFill>
+                  <a:srgbClr val="B45309"/>
+                </a:solidFill>
+                <a:latin typeface="Verdana"/>
+              </a:rPr>
+              <a:t>5</a:t>
+            </a:r>
+          </a:p>
+        </p:txBody>
+      </p:sp>
+      <p:sp>
+        <p:nvSpPr>
+          <p:cNvPr id="27" name="TextBox 26"/>
+          <p:cNvSpPr txBox="1"/>
+          <p:nvPr/>
+        </p:nvSpPr>
+        <p:spPr>
+          <a:xfrm>
+            <a:off x="1344168" y="5259832"/>
+            <a:ext cx="10097719" cy="338836"/>
+          </a:xfrm>
+          <a:prstGeom prst="rect">
+            <a:avLst/>
+          </a:prstGeom>
+          <a:noFill/>
+        </p:spPr>
+        <p:txBody>
+          <a:bodyPr wrap="square" lIns="0" rIns="0" tIns="0" bIns="0" anchor="t">
+            <a:spAutoFit/>
+          </a:bodyPr>
+          <a:lstStyle/>
+          <a:p>
+            <a:pPr algn="l">
+              <a:lnSpc>
+                <a:spcPct val="140000"/>
+              </a:lnSpc>
+            </a:pPr>
+            <a:r>
+              <a:rPr sz="1700" b="0" i="0">
+                <a:solidFill>
+                  <a:srgbClr val="3A3D40"/>
+                </a:solidFill>
+                <a:latin typeface="Verdana"/>
+              </a:rPr>
+              <a:t>Objet : la formation aura lieu jeudi</a:t>
             </a:r>
           </a:p>
         </p:txBody>
@@ -6362,6 +6893,1695 @@
       </p:sp>
       <p:sp>
         <p:nvSpPr>
+          <p:cNvPr id="5" name="TextBox 4"/>
+          <p:cNvSpPr txBox="1"/>
+          <p:nvPr/>
+        </p:nvSpPr>
+        <p:spPr>
+          <a:xfrm>
+            <a:off x="566928" y="420624"/>
+            <a:ext cx="11057839" cy="237744"/>
+          </a:xfrm>
+          <a:prstGeom prst="rect">
+            <a:avLst/>
+          </a:prstGeom>
+          <a:noFill/>
+        </p:spPr>
+        <p:txBody>
+          <a:bodyPr wrap="square" lIns="0" rIns="0" tIns="0" bIns="0" anchor="t">
+            <a:spAutoFit/>
+          </a:bodyPr>
+          <a:lstStyle/>
+          <a:p>
+            <a:pPr algn="l">
+              <a:lnSpc>
+                <a:spcPct val="135000"/>
+              </a:lnSpc>
+            </a:pPr>
+            <a:r>
+              <a:rPr sz="1300" b="1" i="0" spc="156">
+                <a:solidFill>
+                  <a:srgbClr val="B45309"/>
+                </a:solidFill>
+                <a:latin typeface="Verdana"/>
+              </a:rPr>
+              <a:t>CORRECTION</a:t>
+            </a:r>
+          </a:p>
+        </p:txBody>
+      </p:sp>
+      <p:sp>
+        <p:nvSpPr>
+          <p:cNvPr id="6" name="TextBox 5"/>
+          <p:cNvSpPr txBox="1"/>
+          <p:nvPr/>
+        </p:nvSpPr>
+        <p:spPr>
+          <a:xfrm>
+            <a:off x="566928" y="749808"/>
+            <a:ext cx="11057839" cy="877824"/>
+          </a:xfrm>
+          <a:prstGeom prst="rect">
+            <a:avLst/>
+          </a:prstGeom>
+          <a:noFill/>
+        </p:spPr>
+        <p:txBody>
+          <a:bodyPr wrap="square" lIns="0" rIns="0" tIns="0" bIns="0" anchor="t">
+            <a:spAutoFit/>
+          </a:bodyPr>
+          <a:lstStyle/>
+          <a:p>
+            <a:pPr algn="l">
+              <a:lnSpc>
+                <a:spcPct val="115000"/>
+              </a:lnSpc>
+            </a:pPr>
+            <a:r>
+              <a:rPr sz="3400" b="1" i="0">
+                <a:solidFill>
+                  <a:srgbClr val="17181A"/>
+                </a:solidFill>
+                <a:latin typeface="Verdana"/>
+              </a:rPr>
+              <a:t>Corrigez l'objet</a:t>
+            </a:r>
+          </a:p>
+        </p:txBody>
+      </p:sp>
+      <p:sp>
+        <p:nvSpPr>
+          <p:cNvPr id="7" name="TextBox 6"/>
+          <p:cNvSpPr txBox="1"/>
+          <p:nvPr/>
+        </p:nvSpPr>
+        <p:spPr>
+          <a:xfrm>
+            <a:off x="566928" y="1645920"/>
+            <a:ext cx="11057839" cy="329184"/>
+          </a:xfrm>
+          <a:prstGeom prst="rect">
+            <a:avLst/>
+          </a:prstGeom>
+          <a:noFill/>
+        </p:spPr>
+        <p:txBody>
+          <a:bodyPr wrap="square" lIns="0" rIns="0" tIns="0" bIns="0" anchor="t">
+            <a:spAutoFit/>
+          </a:bodyPr>
+          <a:lstStyle/>
+          <a:p>
+            <a:pPr algn="l">
+              <a:lnSpc>
+                <a:spcPct val="135000"/>
+              </a:lnSpc>
+            </a:pPr>
+            <a:r>
+              <a:rPr sz="1800" b="0" i="0">
+                <a:solidFill>
+                  <a:srgbClr val="6E7175"/>
+                </a:solidFill>
+                <a:latin typeface="Verdana"/>
+              </a:rPr>
+              <a:t>Correction — on lit la réponse, on ne commente pas l'erreur.</a:t>
+            </a:r>
+          </a:p>
+        </p:txBody>
+      </p:sp>
+      <p:sp>
+        <p:nvSpPr>
+          <p:cNvPr id="8" name="Rounded Rectangle 7"/>
+          <p:cNvSpPr/>
+          <p:nvPr/>
+        </p:nvSpPr>
+        <p:spPr>
+          <a:xfrm>
+            <a:off x="566928" y="2139696"/>
+            <a:ext cx="11057839" cy="613156"/>
+          </a:xfrm>
+          <a:prstGeom prst="roundRect">
+            <a:avLst>
+              <a:gd name="adj" fmla="val 23860"/>
+            </a:avLst>
+          </a:prstGeom>
+          <a:solidFill>
+            <a:srgbClr val="E6F5EE"/>
+          </a:solidFill>
+          <a:ln w="12700">
+            <a:solidFill>
+              <a:srgbClr val="EAEAE8"/>
+            </a:solidFill>
+          </a:ln>
+          <a:effectLst/>
+        </p:spPr>
+        <p:style>
+          <a:lnRef idx="1">
+            <a:schemeClr val="accent1"/>
+          </a:lnRef>
+          <a:fillRef idx="3">
+            <a:schemeClr val="accent1"/>
+          </a:fillRef>
+          <a:effectRef idx="2">
+            <a:schemeClr val="accent1"/>
+          </a:effectRef>
+          <a:fontRef idx="minor">
+            <a:schemeClr val="lt1"/>
+          </a:fontRef>
+        </p:style>
+        <p:txBody>
+          <a:bodyPr rtlCol="0" anchor="ctr"/>
+          <a:lstStyle/>
+          <a:p/>
+        </p:txBody>
+      </p:sp>
+      <p:sp>
+        <p:nvSpPr>
+          <p:cNvPr id="9" name="Rounded Rectangle 8"/>
+          <p:cNvSpPr/>
+          <p:nvPr/>
+        </p:nvSpPr>
+        <p:spPr>
+          <a:xfrm>
+            <a:off x="841247" y="2263393"/>
+            <a:ext cx="365760" cy="365760"/>
+          </a:xfrm>
+          <a:prstGeom prst="roundRect">
+            <a:avLst>
+              <a:gd name="adj" fmla="val 32500"/>
+            </a:avLst>
+          </a:prstGeom>
+          <a:solidFill>
+            <a:srgbClr val="FBEEDC"/>
+          </a:solidFill>
+          <a:ln>
+            <a:noFill/>
+          </a:ln>
+          <a:effectLst/>
+        </p:spPr>
+        <p:style>
+          <a:lnRef idx="1">
+            <a:schemeClr val="accent1"/>
+          </a:lnRef>
+          <a:fillRef idx="3">
+            <a:schemeClr val="accent1"/>
+          </a:fillRef>
+          <a:effectRef idx="2">
+            <a:schemeClr val="accent1"/>
+          </a:effectRef>
+          <a:fontRef idx="minor">
+            <a:schemeClr val="lt1"/>
+          </a:fontRef>
+        </p:style>
+        <p:txBody>
+          <a:bodyPr rtlCol="0" anchor="ctr"/>
+          <a:lstStyle/>
+          <a:p/>
+        </p:txBody>
+      </p:sp>
+      <p:sp>
+        <p:nvSpPr>
+          <p:cNvPr id="10" name="TextBox 9"/>
+          <p:cNvSpPr txBox="1"/>
+          <p:nvPr/>
+        </p:nvSpPr>
+        <p:spPr>
+          <a:xfrm>
+            <a:off x="841247" y="2327401"/>
+            <a:ext cx="365760" cy="256032"/>
+          </a:xfrm>
+          <a:prstGeom prst="rect">
+            <a:avLst/>
+          </a:prstGeom>
+          <a:noFill/>
+        </p:spPr>
+        <p:txBody>
+          <a:bodyPr wrap="square" lIns="0" rIns="0" tIns="0" bIns="0" anchor="t">
+            <a:spAutoFit/>
+          </a:bodyPr>
+          <a:lstStyle/>
+          <a:p>
+            <a:pPr algn="ctr">
+              <a:lnSpc>
+                <a:spcPct val="135000"/>
+              </a:lnSpc>
+            </a:pPr>
+            <a:r>
+              <a:rPr sz="1500" b="1" i="0">
+                <a:solidFill>
+                  <a:srgbClr val="B45309"/>
+                </a:solidFill>
+                <a:latin typeface="Verdana"/>
+              </a:rPr>
+              <a:t>1</a:t>
+            </a:r>
+          </a:p>
+        </p:txBody>
+      </p:sp>
+      <p:sp>
+        <p:nvSpPr>
+          <p:cNvPr id="11" name="TextBox 10"/>
+          <p:cNvSpPr txBox="1"/>
+          <p:nvPr/>
+        </p:nvSpPr>
+        <p:spPr>
+          <a:xfrm>
+            <a:off x="1344168" y="2295144"/>
+            <a:ext cx="10097719" cy="338836"/>
+          </a:xfrm>
+          <a:prstGeom prst="rect">
+            <a:avLst/>
+          </a:prstGeom>
+          <a:noFill/>
+        </p:spPr>
+        <p:txBody>
+          <a:bodyPr wrap="square" lIns="0" rIns="0" tIns="0" bIns="0" anchor="t">
+            <a:spAutoFit/>
+          </a:bodyPr>
+          <a:lstStyle/>
+          <a:p>
+            <a:pPr algn="l">
+              <a:lnSpc>
+                <a:spcPct val="140000"/>
+              </a:lnSpc>
+            </a:pPr>
+            <a:r>
+              <a:rPr sz="1700" b="0" i="0">
+                <a:solidFill>
+                  <a:srgbClr val="3A3D40"/>
+                </a:solidFill>
+                <a:latin typeface="Verdana"/>
+              </a:rPr>
+              <a:t>Objet : nous changeons l'horaire du poste 4   </a:t>
+            </a:r>
+            <a:r>
+              <a:rPr sz="1700" b="1" i="0">
+                <a:solidFill>
+                  <a:srgbClr val="07734A"/>
+                </a:solidFill>
+                <a:latin typeface="Verdana"/>
+              </a:rPr>
+              <a:t>» Objet : modification de l'horaire du poste 4</a:t>
+            </a:r>
+          </a:p>
+        </p:txBody>
+      </p:sp>
+      <p:sp>
+        <p:nvSpPr>
+          <p:cNvPr id="12" name="Rounded Rectangle 11"/>
+          <p:cNvSpPr/>
+          <p:nvPr/>
+        </p:nvSpPr>
+        <p:spPr>
+          <a:xfrm>
+            <a:off x="566928" y="2880868"/>
+            <a:ext cx="11057839" cy="613156"/>
+          </a:xfrm>
+          <a:prstGeom prst="roundRect">
+            <a:avLst>
+              <a:gd name="adj" fmla="val 23860"/>
+            </a:avLst>
+          </a:prstGeom>
+          <a:solidFill>
+            <a:srgbClr val="E6F5EE"/>
+          </a:solidFill>
+          <a:ln w="12700">
+            <a:solidFill>
+              <a:srgbClr val="EAEAE8"/>
+            </a:solidFill>
+          </a:ln>
+          <a:effectLst/>
+        </p:spPr>
+        <p:style>
+          <a:lnRef idx="1">
+            <a:schemeClr val="accent1"/>
+          </a:lnRef>
+          <a:fillRef idx="3">
+            <a:schemeClr val="accent1"/>
+          </a:fillRef>
+          <a:effectRef idx="2">
+            <a:schemeClr val="accent1"/>
+          </a:effectRef>
+          <a:fontRef idx="minor">
+            <a:schemeClr val="lt1"/>
+          </a:fontRef>
+        </p:style>
+        <p:txBody>
+          <a:bodyPr rtlCol="0" anchor="ctr"/>
+          <a:lstStyle/>
+          <a:p/>
+        </p:txBody>
+      </p:sp>
+      <p:sp>
+        <p:nvSpPr>
+          <p:cNvPr id="13" name="Rounded Rectangle 12"/>
+          <p:cNvSpPr/>
+          <p:nvPr/>
+        </p:nvSpPr>
+        <p:spPr>
+          <a:xfrm>
+            <a:off x="841247" y="3004566"/>
+            <a:ext cx="365760" cy="365760"/>
+          </a:xfrm>
+          <a:prstGeom prst="roundRect">
+            <a:avLst>
+              <a:gd name="adj" fmla="val 32500"/>
+            </a:avLst>
+          </a:prstGeom>
+          <a:solidFill>
+            <a:srgbClr val="FBEEDC"/>
+          </a:solidFill>
+          <a:ln>
+            <a:noFill/>
+          </a:ln>
+          <a:effectLst/>
+        </p:spPr>
+        <p:style>
+          <a:lnRef idx="1">
+            <a:schemeClr val="accent1"/>
+          </a:lnRef>
+          <a:fillRef idx="3">
+            <a:schemeClr val="accent1"/>
+          </a:fillRef>
+          <a:effectRef idx="2">
+            <a:schemeClr val="accent1"/>
+          </a:effectRef>
+          <a:fontRef idx="minor">
+            <a:schemeClr val="lt1"/>
+          </a:fontRef>
+        </p:style>
+        <p:txBody>
+          <a:bodyPr rtlCol="0" anchor="ctr"/>
+          <a:lstStyle/>
+          <a:p/>
+        </p:txBody>
+      </p:sp>
+      <p:sp>
+        <p:nvSpPr>
+          <p:cNvPr id="14" name="TextBox 13"/>
+          <p:cNvSpPr txBox="1"/>
+          <p:nvPr/>
+        </p:nvSpPr>
+        <p:spPr>
+          <a:xfrm>
+            <a:off x="841247" y="3068573"/>
+            <a:ext cx="365760" cy="256032"/>
+          </a:xfrm>
+          <a:prstGeom prst="rect">
+            <a:avLst/>
+          </a:prstGeom>
+          <a:noFill/>
+        </p:spPr>
+        <p:txBody>
+          <a:bodyPr wrap="square" lIns="0" rIns="0" tIns="0" bIns="0" anchor="t">
+            <a:spAutoFit/>
+          </a:bodyPr>
+          <a:lstStyle/>
+          <a:p>
+            <a:pPr algn="ctr">
+              <a:lnSpc>
+                <a:spcPct val="135000"/>
+              </a:lnSpc>
+            </a:pPr>
+            <a:r>
+              <a:rPr sz="1500" b="1" i="0">
+                <a:solidFill>
+                  <a:srgbClr val="B45309"/>
+                </a:solidFill>
+                <a:latin typeface="Verdana"/>
+              </a:rPr>
+              <a:t>2</a:t>
+            </a:r>
+          </a:p>
+        </p:txBody>
+      </p:sp>
+      <p:sp>
+        <p:nvSpPr>
+          <p:cNvPr id="15" name="TextBox 14"/>
+          <p:cNvSpPr txBox="1"/>
+          <p:nvPr/>
+        </p:nvSpPr>
+        <p:spPr>
+          <a:xfrm>
+            <a:off x="1344168" y="3036316"/>
+            <a:ext cx="10097719" cy="338836"/>
+          </a:xfrm>
+          <a:prstGeom prst="rect">
+            <a:avLst/>
+          </a:prstGeom>
+          <a:noFill/>
+        </p:spPr>
+        <p:txBody>
+          <a:bodyPr wrap="square" lIns="0" rIns="0" tIns="0" bIns="0" anchor="t">
+            <a:spAutoFit/>
+          </a:bodyPr>
+          <a:lstStyle/>
+          <a:p>
+            <a:pPr algn="l">
+              <a:lnSpc>
+                <a:spcPct val="140000"/>
+              </a:lnSpc>
+            </a:pPr>
+            <a:r>
+              <a:rPr sz="1700" b="0" i="0">
+                <a:solidFill>
+                  <a:srgbClr val="3A3D40"/>
+                </a:solidFill>
+                <a:latin typeface="Verdana"/>
+              </a:rPr>
+              <a:t>Objet : il faut ranger la cafétéria   </a:t>
+            </a:r>
+            <a:r>
+              <a:rPr sz="1700" b="1" i="0">
+                <a:solidFill>
+                  <a:srgbClr val="07734A"/>
+                </a:solidFill>
+                <a:latin typeface="Verdana"/>
+              </a:rPr>
+              <a:t>» Objet : rangement de la cafétéria</a:t>
+            </a:r>
+          </a:p>
+        </p:txBody>
+      </p:sp>
+      <p:sp>
+        <p:nvSpPr>
+          <p:cNvPr id="16" name="Rounded Rectangle 15"/>
+          <p:cNvSpPr/>
+          <p:nvPr/>
+        </p:nvSpPr>
+        <p:spPr>
+          <a:xfrm>
+            <a:off x="566928" y="3622040"/>
+            <a:ext cx="11057839" cy="613156"/>
+          </a:xfrm>
+          <a:prstGeom prst="roundRect">
+            <a:avLst>
+              <a:gd name="adj" fmla="val 23860"/>
+            </a:avLst>
+          </a:prstGeom>
+          <a:solidFill>
+            <a:srgbClr val="E6F5EE"/>
+          </a:solidFill>
+          <a:ln w="12700">
+            <a:solidFill>
+              <a:srgbClr val="EAEAE8"/>
+            </a:solidFill>
+          </a:ln>
+          <a:effectLst/>
+        </p:spPr>
+        <p:style>
+          <a:lnRef idx="1">
+            <a:schemeClr val="accent1"/>
+          </a:lnRef>
+          <a:fillRef idx="3">
+            <a:schemeClr val="accent1"/>
+          </a:fillRef>
+          <a:effectRef idx="2">
+            <a:schemeClr val="accent1"/>
+          </a:effectRef>
+          <a:fontRef idx="minor">
+            <a:schemeClr val="lt1"/>
+          </a:fontRef>
+        </p:style>
+        <p:txBody>
+          <a:bodyPr rtlCol="0" anchor="ctr"/>
+          <a:lstStyle/>
+          <a:p/>
+        </p:txBody>
+      </p:sp>
+      <p:sp>
+        <p:nvSpPr>
+          <p:cNvPr id="17" name="Rounded Rectangle 16"/>
+          <p:cNvSpPr/>
+          <p:nvPr/>
+        </p:nvSpPr>
+        <p:spPr>
+          <a:xfrm>
+            <a:off x="841247" y="3745738"/>
+            <a:ext cx="365760" cy="365760"/>
+          </a:xfrm>
+          <a:prstGeom prst="roundRect">
+            <a:avLst>
+              <a:gd name="adj" fmla="val 32500"/>
+            </a:avLst>
+          </a:prstGeom>
+          <a:solidFill>
+            <a:srgbClr val="FBEEDC"/>
+          </a:solidFill>
+          <a:ln>
+            <a:noFill/>
+          </a:ln>
+          <a:effectLst/>
+        </p:spPr>
+        <p:style>
+          <a:lnRef idx="1">
+            <a:schemeClr val="accent1"/>
+          </a:lnRef>
+          <a:fillRef idx="3">
+            <a:schemeClr val="accent1"/>
+          </a:fillRef>
+          <a:effectRef idx="2">
+            <a:schemeClr val="accent1"/>
+          </a:effectRef>
+          <a:fontRef idx="minor">
+            <a:schemeClr val="lt1"/>
+          </a:fontRef>
+        </p:style>
+        <p:txBody>
+          <a:bodyPr rtlCol="0" anchor="ctr"/>
+          <a:lstStyle/>
+          <a:p/>
+        </p:txBody>
+      </p:sp>
+      <p:sp>
+        <p:nvSpPr>
+          <p:cNvPr id="18" name="TextBox 17"/>
+          <p:cNvSpPr txBox="1"/>
+          <p:nvPr/>
+        </p:nvSpPr>
+        <p:spPr>
+          <a:xfrm>
+            <a:off x="841247" y="3809746"/>
+            <a:ext cx="365760" cy="256032"/>
+          </a:xfrm>
+          <a:prstGeom prst="rect">
+            <a:avLst/>
+          </a:prstGeom>
+          <a:noFill/>
+        </p:spPr>
+        <p:txBody>
+          <a:bodyPr wrap="square" lIns="0" rIns="0" tIns="0" bIns="0" anchor="t">
+            <a:spAutoFit/>
+          </a:bodyPr>
+          <a:lstStyle/>
+          <a:p>
+            <a:pPr algn="ctr">
+              <a:lnSpc>
+                <a:spcPct val="135000"/>
+              </a:lnSpc>
+            </a:pPr>
+            <a:r>
+              <a:rPr sz="1500" b="1" i="0">
+                <a:solidFill>
+                  <a:srgbClr val="B45309"/>
+                </a:solidFill>
+                <a:latin typeface="Verdana"/>
+              </a:rPr>
+              <a:t>3</a:t>
+            </a:r>
+          </a:p>
+        </p:txBody>
+      </p:sp>
+      <p:sp>
+        <p:nvSpPr>
+          <p:cNvPr id="19" name="TextBox 18"/>
+          <p:cNvSpPr txBox="1"/>
+          <p:nvPr/>
+        </p:nvSpPr>
+        <p:spPr>
+          <a:xfrm>
+            <a:off x="1344168" y="3777488"/>
+            <a:ext cx="10097719" cy="338836"/>
+          </a:xfrm>
+          <a:prstGeom prst="rect">
+            <a:avLst/>
+          </a:prstGeom>
+          <a:noFill/>
+        </p:spPr>
+        <p:txBody>
+          <a:bodyPr wrap="square" lIns="0" rIns="0" tIns="0" bIns="0" anchor="t">
+            <a:spAutoFit/>
+          </a:bodyPr>
+          <a:lstStyle/>
+          <a:p>
+            <a:pPr algn="l">
+              <a:lnSpc>
+                <a:spcPct val="140000"/>
+              </a:lnSpc>
+            </a:pPr>
+            <a:r>
+              <a:rPr sz="1700" b="0" i="0">
+                <a:solidFill>
+                  <a:srgbClr val="3A3D40"/>
+                </a:solidFill>
+                <a:latin typeface="Verdana"/>
+              </a:rPr>
+              <a:t>Objet : on va fermer l'entrepôt le 3 juillet   </a:t>
+            </a:r>
+            <a:r>
+              <a:rPr sz="1700" b="1" i="0">
+                <a:solidFill>
+                  <a:srgbClr val="07734A"/>
+                </a:solidFill>
+                <a:latin typeface="Verdana"/>
+              </a:rPr>
+              <a:t>» Objet : fermeture de l'entrepôt le 3 juillet</a:t>
+            </a:r>
+          </a:p>
+        </p:txBody>
+      </p:sp>
+      <p:sp>
+        <p:nvSpPr>
+          <p:cNvPr id="20" name="Rounded Rectangle 19"/>
+          <p:cNvSpPr/>
+          <p:nvPr/>
+        </p:nvSpPr>
+        <p:spPr>
+          <a:xfrm>
+            <a:off x="566928" y="4363212"/>
+            <a:ext cx="11057839" cy="613156"/>
+          </a:xfrm>
+          <a:prstGeom prst="roundRect">
+            <a:avLst>
+              <a:gd name="adj" fmla="val 23860"/>
+            </a:avLst>
+          </a:prstGeom>
+          <a:solidFill>
+            <a:srgbClr val="E6F5EE"/>
+          </a:solidFill>
+          <a:ln w="12700">
+            <a:solidFill>
+              <a:srgbClr val="EAEAE8"/>
+            </a:solidFill>
+          </a:ln>
+          <a:effectLst/>
+        </p:spPr>
+        <p:style>
+          <a:lnRef idx="1">
+            <a:schemeClr val="accent1"/>
+          </a:lnRef>
+          <a:fillRef idx="3">
+            <a:schemeClr val="accent1"/>
+          </a:fillRef>
+          <a:effectRef idx="2">
+            <a:schemeClr val="accent1"/>
+          </a:effectRef>
+          <a:fontRef idx="minor">
+            <a:schemeClr val="lt1"/>
+          </a:fontRef>
+        </p:style>
+        <p:txBody>
+          <a:bodyPr rtlCol="0" anchor="ctr"/>
+          <a:lstStyle/>
+          <a:p/>
+        </p:txBody>
+      </p:sp>
+      <p:sp>
+        <p:nvSpPr>
+          <p:cNvPr id="21" name="Rounded Rectangle 20"/>
+          <p:cNvSpPr/>
+          <p:nvPr/>
+        </p:nvSpPr>
+        <p:spPr>
+          <a:xfrm>
+            <a:off x="841247" y="4486910"/>
+            <a:ext cx="365760" cy="365760"/>
+          </a:xfrm>
+          <a:prstGeom prst="roundRect">
+            <a:avLst>
+              <a:gd name="adj" fmla="val 32500"/>
+            </a:avLst>
+          </a:prstGeom>
+          <a:solidFill>
+            <a:srgbClr val="FBEEDC"/>
+          </a:solidFill>
+          <a:ln>
+            <a:noFill/>
+          </a:ln>
+          <a:effectLst/>
+        </p:spPr>
+        <p:style>
+          <a:lnRef idx="1">
+            <a:schemeClr val="accent1"/>
+          </a:lnRef>
+          <a:fillRef idx="3">
+            <a:schemeClr val="accent1"/>
+          </a:fillRef>
+          <a:effectRef idx="2">
+            <a:schemeClr val="accent1"/>
+          </a:effectRef>
+          <a:fontRef idx="minor">
+            <a:schemeClr val="lt1"/>
+          </a:fontRef>
+        </p:style>
+        <p:txBody>
+          <a:bodyPr rtlCol="0" anchor="ctr"/>
+          <a:lstStyle/>
+          <a:p/>
+        </p:txBody>
+      </p:sp>
+      <p:sp>
+        <p:nvSpPr>
+          <p:cNvPr id="22" name="TextBox 21"/>
+          <p:cNvSpPr txBox="1"/>
+          <p:nvPr/>
+        </p:nvSpPr>
+        <p:spPr>
+          <a:xfrm>
+            <a:off x="841247" y="4550918"/>
+            <a:ext cx="365760" cy="256032"/>
+          </a:xfrm>
+          <a:prstGeom prst="rect">
+            <a:avLst/>
+          </a:prstGeom>
+          <a:noFill/>
+        </p:spPr>
+        <p:txBody>
+          <a:bodyPr wrap="square" lIns="0" rIns="0" tIns="0" bIns="0" anchor="t">
+            <a:spAutoFit/>
+          </a:bodyPr>
+          <a:lstStyle/>
+          <a:p>
+            <a:pPr algn="ctr">
+              <a:lnSpc>
+                <a:spcPct val="135000"/>
+              </a:lnSpc>
+            </a:pPr>
+            <a:r>
+              <a:rPr sz="1500" b="1" i="0">
+                <a:solidFill>
+                  <a:srgbClr val="B45309"/>
+                </a:solidFill>
+                <a:latin typeface="Verdana"/>
+              </a:rPr>
+              <a:t>4</a:t>
+            </a:r>
+          </a:p>
+        </p:txBody>
+      </p:sp>
+      <p:sp>
+        <p:nvSpPr>
+          <p:cNvPr id="23" name="TextBox 22"/>
+          <p:cNvSpPr txBox="1"/>
+          <p:nvPr/>
+        </p:nvSpPr>
+        <p:spPr>
+          <a:xfrm>
+            <a:off x="1344168" y="4518660"/>
+            <a:ext cx="10097719" cy="338836"/>
+          </a:xfrm>
+          <a:prstGeom prst="rect">
+            <a:avLst/>
+          </a:prstGeom>
+          <a:noFill/>
+        </p:spPr>
+        <p:txBody>
+          <a:bodyPr wrap="square" lIns="0" rIns="0" tIns="0" bIns="0" anchor="t">
+            <a:spAutoFit/>
+          </a:bodyPr>
+          <a:lstStyle/>
+          <a:p>
+            <a:pPr algn="l">
+              <a:lnSpc>
+                <a:spcPct val="140000"/>
+              </a:lnSpc>
+            </a:pPr>
+            <a:r>
+              <a:rPr sz="1700" b="0" i="0">
+                <a:solidFill>
+                  <a:srgbClr val="3A3D40"/>
+                </a:solidFill>
+                <a:latin typeface="Verdana"/>
+              </a:rPr>
+              <a:t>Objet : je demande une soumission   </a:t>
+            </a:r>
+            <a:r>
+              <a:rPr sz="1700" b="1" i="0">
+                <a:solidFill>
+                  <a:srgbClr val="07734A"/>
+                </a:solidFill>
+                <a:latin typeface="Verdana"/>
+              </a:rPr>
+              <a:t>» Objet : demande de soumission</a:t>
+            </a:r>
+          </a:p>
+        </p:txBody>
+      </p:sp>
+      <p:sp>
+        <p:nvSpPr>
+          <p:cNvPr id="24" name="Rounded Rectangle 23"/>
+          <p:cNvSpPr/>
+          <p:nvPr/>
+        </p:nvSpPr>
+        <p:spPr>
+          <a:xfrm>
+            <a:off x="566928" y="5104384"/>
+            <a:ext cx="11057839" cy="613156"/>
+          </a:xfrm>
+          <a:prstGeom prst="roundRect">
+            <a:avLst>
+              <a:gd name="adj" fmla="val 23860"/>
+            </a:avLst>
+          </a:prstGeom>
+          <a:solidFill>
+            <a:srgbClr val="E6F5EE"/>
+          </a:solidFill>
+          <a:ln w="12700">
+            <a:solidFill>
+              <a:srgbClr val="EAEAE8"/>
+            </a:solidFill>
+          </a:ln>
+          <a:effectLst/>
+        </p:spPr>
+        <p:style>
+          <a:lnRef idx="1">
+            <a:schemeClr val="accent1"/>
+          </a:lnRef>
+          <a:fillRef idx="3">
+            <a:schemeClr val="accent1"/>
+          </a:fillRef>
+          <a:effectRef idx="2">
+            <a:schemeClr val="accent1"/>
+          </a:effectRef>
+          <a:fontRef idx="minor">
+            <a:schemeClr val="lt1"/>
+          </a:fontRef>
+        </p:style>
+        <p:txBody>
+          <a:bodyPr rtlCol="0" anchor="ctr"/>
+          <a:lstStyle/>
+          <a:p/>
+        </p:txBody>
+      </p:sp>
+      <p:sp>
+        <p:nvSpPr>
+          <p:cNvPr id="25" name="Rounded Rectangle 24"/>
+          <p:cNvSpPr/>
+          <p:nvPr/>
+        </p:nvSpPr>
+        <p:spPr>
+          <a:xfrm>
+            <a:off x="841247" y="5228082"/>
+            <a:ext cx="365760" cy="365760"/>
+          </a:xfrm>
+          <a:prstGeom prst="roundRect">
+            <a:avLst>
+              <a:gd name="adj" fmla="val 32500"/>
+            </a:avLst>
+          </a:prstGeom>
+          <a:solidFill>
+            <a:srgbClr val="FBEEDC"/>
+          </a:solidFill>
+          <a:ln>
+            <a:noFill/>
+          </a:ln>
+          <a:effectLst/>
+        </p:spPr>
+        <p:style>
+          <a:lnRef idx="1">
+            <a:schemeClr val="accent1"/>
+          </a:lnRef>
+          <a:fillRef idx="3">
+            <a:schemeClr val="accent1"/>
+          </a:fillRef>
+          <a:effectRef idx="2">
+            <a:schemeClr val="accent1"/>
+          </a:effectRef>
+          <a:fontRef idx="minor">
+            <a:schemeClr val="lt1"/>
+          </a:fontRef>
+        </p:style>
+        <p:txBody>
+          <a:bodyPr rtlCol="0" anchor="ctr"/>
+          <a:lstStyle/>
+          <a:p/>
+        </p:txBody>
+      </p:sp>
+      <p:sp>
+        <p:nvSpPr>
+          <p:cNvPr id="26" name="TextBox 25"/>
+          <p:cNvSpPr txBox="1"/>
+          <p:nvPr/>
+        </p:nvSpPr>
+        <p:spPr>
+          <a:xfrm>
+            <a:off x="841247" y="5292090"/>
+            <a:ext cx="365760" cy="256032"/>
+          </a:xfrm>
+          <a:prstGeom prst="rect">
+            <a:avLst/>
+          </a:prstGeom>
+          <a:noFill/>
+        </p:spPr>
+        <p:txBody>
+          <a:bodyPr wrap="square" lIns="0" rIns="0" tIns="0" bIns="0" anchor="t">
+            <a:spAutoFit/>
+          </a:bodyPr>
+          <a:lstStyle/>
+          <a:p>
+            <a:pPr algn="ctr">
+              <a:lnSpc>
+                <a:spcPct val="135000"/>
+              </a:lnSpc>
+            </a:pPr>
+            <a:r>
+              <a:rPr sz="1500" b="1" i="0">
+                <a:solidFill>
+                  <a:srgbClr val="B45309"/>
+                </a:solidFill>
+                <a:latin typeface="Verdana"/>
+              </a:rPr>
+              <a:t>5</a:t>
+            </a:r>
+          </a:p>
+        </p:txBody>
+      </p:sp>
+      <p:sp>
+        <p:nvSpPr>
+          <p:cNvPr id="27" name="TextBox 26"/>
+          <p:cNvSpPr txBox="1"/>
+          <p:nvPr/>
+        </p:nvSpPr>
+        <p:spPr>
+          <a:xfrm>
+            <a:off x="1344168" y="5259832"/>
+            <a:ext cx="10097719" cy="338836"/>
+          </a:xfrm>
+          <a:prstGeom prst="rect">
+            <a:avLst/>
+          </a:prstGeom>
+          <a:noFill/>
+        </p:spPr>
+        <p:txBody>
+          <a:bodyPr wrap="square" lIns="0" rIns="0" tIns="0" bIns="0" anchor="t">
+            <a:spAutoFit/>
+          </a:bodyPr>
+          <a:lstStyle/>
+          <a:p>
+            <a:pPr algn="l">
+              <a:lnSpc>
+                <a:spcPct val="140000"/>
+              </a:lnSpc>
+            </a:pPr>
+            <a:r>
+              <a:rPr sz="1700" b="0" i="0">
+                <a:solidFill>
+                  <a:srgbClr val="3A3D40"/>
+                </a:solidFill>
+                <a:latin typeface="Verdana"/>
+              </a:rPr>
+              <a:t>Objet : la formation aura lieu jeudi   </a:t>
+            </a:r>
+            <a:r>
+              <a:rPr sz="1700" b="1" i="0">
+                <a:solidFill>
+                  <a:srgbClr val="07734A"/>
+                </a:solidFill>
+                <a:latin typeface="Verdana"/>
+              </a:rPr>
+              <a:t>» Objet : formation du jeudi 14 mai</a:t>
+            </a:r>
+          </a:p>
+        </p:txBody>
+      </p:sp>
+    </p:spTree>
+  </p:cSld>
+  <p:clrMapOvr>
+    <a:masterClrMapping/>
+  </p:clrMapOvr>
+</p:sld>
+</file>
+
+<file path=ppt/slides/slide13.xml><?xml version="1.0" encoding="utf-8"?>
+<p:sld xmlns:a="http://schemas.openxmlformats.org/drawingml/2006/main" xmlns:p="http://schemas.openxmlformats.org/presentationml/2006/main" xmlns:r="http://schemas.openxmlformats.org/officeDocument/2006/relationships">
+  <p:cSld>
+    <p:spTree>
+      <p:nvGrpSpPr>
+        <p:cNvPr id="1" name=""/>
+        <p:cNvGrpSpPr/>
+        <p:nvPr/>
+      </p:nvGrpSpPr>
+      <p:grpSpPr/>
+      <p:sp>
+        <p:nvSpPr>
+          <p:cNvPr id="2" name="Rectangle 1"/>
+          <p:cNvSpPr/>
+          <p:nvPr/>
+        </p:nvSpPr>
+        <p:spPr>
+          <a:xfrm>
+            <a:off x="0" y="0"/>
+            <a:ext cx="12191695" cy="6858000"/>
+          </a:xfrm>
+          <a:prstGeom prst="rect">
+            <a:avLst/>
+          </a:prstGeom>
+          <a:solidFill>
+            <a:srgbClr val="F7F7F5"/>
+          </a:solidFill>
+          <a:ln>
+            <a:noFill/>
+          </a:ln>
+          <a:effectLst/>
+        </p:spPr>
+        <p:style>
+          <a:lnRef idx="1">
+            <a:schemeClr val="accent1"/>
+          </a:lnRef>
+          <a:fillRef idx="3">
+            <a:schemeClr val="accent1"/>
+          </a:fillRef>
+          <a:effectRef idx="2">
+            <a:schemeClr val="accent1"/>
+          </a:effectRef>
+          <a:fontRef idx="minor">
+            <a:schemeClr val="lt1"/>
+          </a:fontRef>
+        </p:style>
+        <p:txBody>
+          <a:bodyPr rtlCol="0" anchor="ctr"/>
+          <a:lstStyle/>
+          <a:p/>
+        </p:txBody>
+      </p:sp>
+      <p:sp>
+        <p:nvSpPr>
+          <p:cNvPr id="3" name="TextBox 2"/>
+          <p:cNvSpPr txBox="1"/>
+          <p:nvPr/>
+        </p:nvSpPr>
+        <p:spPr>
+          <a:xfrm>
+            <a:off x="566928" y="6355080"/>
+            <a:ext cx="6400800" cy="219456"/>
+          </a:xfrm>
+          <a:prstGeom prst="rect">
+            <a:avLst/>
+          </a:prstGeom>
+          <a:noFill/>
+        </p:spPr>
+        <p:txBody>
+          <a:bodyPr wrap="square" lIns="0" rIns="0" tIns="0" bIns="0" anchor="t">
+            <a:spAutoFit/>
+          </a:bodyPr>
+          <a:lstStyle/>
+          <a:p>
+            <a:pPr algn="l">
+              <a:lnSpc>
+                <a:spcPct val="135000"/>
+              </a:lnSpc>
+            </a:pPr>
+            <a:r>
+              <a:rPr sz="1200" b="0" i="0">
+                <a:solidFill>
+                  <a:srgbClr val="6E7175"/>
+                </a:solidFill>
+                <a:latin typeface="Verdana"/>
+              </a:rPr>
+              <a:t>D1 · Présenter un projet au travail</a:t>
+            </a:r>
+          </a:p>
+        </p:txBody>
+      </p:sp>
+      <p:sp>
+        <p:nvSpPr>
+          <p:cNvPr id="4" name="TextBox 3"/>
+          <p:cNvSpPr txBox="1"/>
+          <p:nvPr/>
+        </p:nvSpPr>
+        <p:spPr>
+          <a:xfrm>
+            <a:off x="10710367" y="6355080"/>
+            <a:ext cx="914400" cy="219456"/>
+          </a:xfrm>
+          <a:prstGeom prst="rect">
+            <a:avLst/>
+          </a:prstGeom>
+          <a:noFill/>
+        </p:spPr>
+        <p:txBody>
+          <a:bodyPr wrap="square" lIns="0" rIns="0" tIns="0" bIns="0" anchor="t">
+            <a:spAutoFit/>
+          </a:bodyPr>
+          <a:lstStyle/>
+          <a:p>
+            <a:pPr algn="r">
+              <a:lnSpc>
+                <a:spcPct val="135000"/>
+              </a:lnSpc>
+            </a:pPr>
+            <a:r>
+              <a:rPr sz="1200" b="0" i="0">
+                <a:solidFill>
+                  <a:srgbClr val="6E7175"/>
+                </a:solidFill>
+                <a:latin typeface="Verdana"/>
+              </a:rPr>
+              <a:t>13</a:t>
+            </a:r>
+          </a:p>
+        </p:txBody>
+      </p:sp>
+      <p:sp>
+        <p:nvSpPr>
+          <p:cNvPr id="5" name="TextBox 4"/>
+          <p:cNvSpPr txBox="1"/>
+          <p:nvPr/>
+        </p:nvSpPr>
+        <p:spPr>
+          <a:xfrm>
+            <a:off x="566928" y="420624"/>
+            <a:ext cx="11057839" cy="237744"/>
+          </a:xfrm>
+          <a:prstGeom prst="rect">
+            <a:avLst/>
+          </a:prstGeom>
+          <a:noFill/>
+        </p:spPr>
+        <p:txBody>
+          <a:bodyPr wrap="square" lIns="0" rIns="0" tIns="0" bIns="0" anchor="t">
+            <a:spAutoFit/>
+          </a:bodyPr>
+          <a:lstStyle/>
+          <a:p>
+            <a:pPr algn="l">
+              <a:lnSpc>
+                <a:spcPct val="135000"/>
+              </a:lnSpc>
+            </a:pPr>
+            <a:r>
+              <a:rPr sz="1300" b="1" i="0" spc="156">
+                <a:solidFill>
+                  <a:srgbClr val="B45309"/>
+                </a:solidFill>
+                <a:latin typeface="Verdana"/>
+              </a:rPr>
+              <a:t>PONCTUATION</a:t>
+            </a:r>
+          </a:p>
+        </p:txBody>
+      </p:sp>
+      <p:sp>
+        <p:nvSpPr>
+          <p:cNvPr id="6" name="TextBox 5"/>
+          <p:cNvSpPr txBox="1"/>
+          <p:nvPr/>
+        </p:nvSpPr>
+        <p:spPr>
+          <a:xfrm>
+            <a:off x="566928" y="749808"/>
+            <a:ext cx="11057839" cy="877824"/>
+          </a:xfrm>
+          <a:prstGeom prst="rect">
+            <a:avLst/>
+          </a:prstGeom>
+          <a:noFill/>
+        </p:spPr>
+        <p:txBody>
+          <a:bodyPr wrap="square" lIns="0" rIns="0" tIns="0" bIns="0" anchor="t">
+            <a:spAutoFit/>
+          </a:bodyPr>
+          <a:lstStyle/>
+          <a:p>
+            <a:pPr algn="l">
+              <a:lnSpc>
+                <a:spcPct val="115000"/>
+              </a:lnSpc>
+            </a:pPr>
+            <a:r>
+              <a:rPr sz="3400" b="1" i="0">
+                <a:solidFill>
+                  <a:srgbClr val="17181A"/>
+                </a:solidFill>
+                <a:latin typeface="Verdana"/>
+              </a:rPr>
+              <a:t>Le piège le plus fréquent</a:t>
+            </a:r>
+          </a:p>
+        </p:txBody>
+      </p:sp>
+      <p:sp>
+        <p:nvSpPr>
+          <p:cNvPr id="7" name="Rounded Rectangle 6"/>
+          <p:cNvSpPr/>
+          <p:nvPr/>
+        </p:nvSpPr>
+        <p:spPr>
+          <a:xfrm>
+            <a:off x="566928" y="1856232"/>
+            <a:ext cx="5428335" cy="2331720"/>
+          </a:xfrm>
+          <a:prstGeom prst="roundRect">
+            <a:avLst>
+              <a:gd name="adj" fmla="val 6274"/>
+            </a:avLst>
+          </a:prstGeom>
+          <a:solidFill>
+            <a:srgbClr val="FFF6F5"/>
+          </a:solidFill>
+          <a:ln w="12700">
+            <a:solidFill>
+              <a:srgbClr val="DC2626"/>
+            </a:solidFill>
+          </a:ln>
+          <a:effectLst/>
+        </p:spPr>
+        <p:style>
+          <a:lnRef idx="1">
+            <a:schemeClr val="accent1"/>
+          </a:lnRef>
+          <a:fillRef idx="3">
+            <a:schemeClr val="accent1"/>
+          </a:fillRef>
+          <a:effectRef idx="2">
+            <a:schemeClr val="accent1"/>
+          </a:effectRef>
+          <a:fontRef idx="minor">
+            <a:schemeClr val="lt1"/>
+          </a:fontRef>
+        </p:style>
+        <p:txBody>
+          <a:bodyPr rtlCol="0" anchor="ctr"/>
+          <a:lstStyle/>
+          <a:p/>
+        </p:txBody>
+      </p:sp>
+      <p:sp>
+        <p:nvSpPr>
+          <p:cNvPr id="8" name="TextBox 7"/>
+          <p:cNvSpPr txBox="1"/>
+          <p:nvPr/>
+        </p:nvSpPr>
+        <p:spPr>
+          <a:xfrm>
+            <a:off x="932688" y="2130552"/>
+            <a:ext cx="4696815" cy="274320"/>
+          </a:xfrm>
+          <a:prstGeom prst="rect">
+            <a:avLst/>
+          </a:prstGeom>
+          <a:noFill/>
+        </p:spPr>
+        <p:txBody>
+          <a:bodyPr wrap="square" lIns="0" rIns="0" tIns="0" bIns="0" anchor="t">
+            <a:spAutoFit/>
+          </a:bodyPr>
+          <a:lstStyle/>
+          <a:p>
+            <a:pPr algn="l">
+              <a:lnSpc>
+                <a:spcPct val="135000"/>
+              </a:lnSpc>
+            </a:pPr>
+            <a:r>
+              <a:rPr sz="1300" b="1" i="0" spc="156">
+                <a:solidFill>
+                  <a:srgbClr val="B91C1C"/>
+                </a:solidFill>
+                <a:latin typeface="Verdana"/>
+              </a:rPr>
+              <a:t>ON ENTEND SOUVENT</a:t>
+            </a:r>
+          </a:p>
+        </p:txBody>
+      </p:sp>
+      <p:sp>
+        <p:nvSpPr>
+          <p:cNvPr id="9" name="TextBox 8"/>
+          <p:cNvSpPr txBox="1"/>
+          <p:nvPr/>
+        </p:nvSpPr>
+        <p:spPr>
+          <a:xfrm>
+            <a:off x="932688" y="2569464"/>
+            <a:ext cx="4696815" cy="1417320"/>
+          </a:xfrm>
+          <a:prstGeom prst="rect">
+            <a:avLst/>
+          </a:prstGeom>
+          <a:noFill/>
+        </p:spPr>
+        <p:txBody>
+          <a:bodyPr wrap="square" lIns="0" rIns="0" tIns="0" bIns="0" anchor="t">
+            <a:spAutoFit/>
+          </a:bodyPr>
+          <a:lstStyle/>
+          <a:p>
+            <a:pPr algn="l">
+              <a:lnSpc>
+                <a:spcPct val="130000"/>
+              </a:lnSpc>
+            </a:pPr>
+            <a:r>
+              <a:rPr sz="2500" b="1" i="0">
+                <a:solidFill>
+                  <a:srgbClr val="17181A"/>
+                </a:solidFill>
+                <a:latin typeface="Verdana"/>
+              </a:rPr>
+              <a:t>« Terrebonne, 17/09/26 »</a:t>
+            </a:r>
+          </a:p>
+        </p:txBody>
+      </p:sp>
+      <p:sp>
+        <p:nvSpPr>
+          <p:cNvPr id="10" name="Rounded Rectangle 9"/>
+          <p:cNvSpPr/>
+          <p:nvPr/>
+        </p:nvSpPr>
+        <p:spPr>
+          <a:xfrm>
+            <a:off x="6196431" y="1856232"/>
+            <a:ext cx="5428335" cy="2331720"/>
+          </a:xfrm>
+          <a:prstGeom prst="roundRect">
+            <a:avLst>
+              <a:gd name="adj" fmla="val 6274"/>
+            </a:avLst>
+          </a:prstGeom>
+          <a:solidFill>
+            <a:srgbClr val="E6F5EE"/>
+          </a:solidFill>
+          <a:ln w="12700">
+            <a:solidFill>
+              <a:srgbClr val="0A8F5B"/>
+            </a:solidFill>
+          </a:ln>
+          <a:effectLst/>
+        </p:spPr>
+        <p:style>
+          <a:lnRef idx="1">
+            <a:schemeClr val="accent1"/>
+          </a:lnRef>
+          <a:fillRef idx="3">
+            <a:schemeClr val="accent1"/>
+          </a:fillRef>
+          <a:effectRef idx="2">
+            <a:schemeClr val="accent1"/>
+          </a:effectRef>
+          <a:fontRef idx="minor">
+            <a:schemeClr val="lt1"/>
+          </a:fontRef>
+        </p:style>
+        <p:txBody>
+          <a:bodyPr rtlCol="0" anchor="ctr"/>
+          <a:lstStyle/>
+          <a:p/>
+        </p:txBody>
+      </p:sp>
+      <p:sp>
+        <p:nvSpPr>
+          <p:cNvPr id="11" name="TextBox 10"/>
+          <p:cNvSpPr txBox="1"/>
+          <p:nvPr/>
+        </p:nvSpPr>
+        <p:spPr>
+          <a:xfrm>
+            <a:off x="6562191" y="2130552"/>
+            <a:ext cx="4696815" cy="274320"/>
+          </a:xfrm>
+          <a:prstGeom prst="rect">
+            <a:avLst/>
+          </a:prstGeom>
+          <a:noFill/>
+        </p:spPr>
+        <p:txBody>
+          <a:bodyPr wrap="square" lIns="0" rIns="0" tIns="0" bIns="0" anchor="t">
+            <a:spAutoFit/>
+          </a:bodyPr>
+          <a:lstStyle/>
+          <a:p>
+            <a:pPr algn="l">
+              <a:lnSpc>
+                <a:spcPct val="135000"/>
+              </a:lnSpc>
+            </a:pPr>
+            <a:r>
+              <a:rPr sz="1300" b="1" i="0" spc="156">
+                <a:solidFill>
+                  <a:srgbClr val="07734A"/>
+                </a:solidFill>
+                <a:latin typeface="Verdana"/>
+              </a:rPr>
+              <a:t>IL FAUT DIRE PLUTÔT</a:t>
+            </a:r>
+          </a:p>
+        </p:txBody>
+      </p:sp>
+      <p:sp>
+        <p:nvSpPr>
+          <p:cNvPr id="12" name="TextBox 11"/>
+          <p:cNvSpPr txBox="1"/>
+          <p:nvPr/>
+        </p:nvSpPr>
+        <p:spPr>
+          <a:xfrm>
+            <a:off x="6562191" y="2569464"/>
+            <a:ext cx="4696815" cy="1417320"/>
+          </a:xfrm>
+          <a:prstGeom prst="rect">
+            <a:avLst/>
+          </a:prstGeom>
+          <a:noFill/>
+        </p:spPr>
+        <p:txBody>
+          <a:bodyPr wrap="square" lIns="0" rIns="0" tIns="0" bIns="0" anchor="t">
+            <a:spAutoFit/>
+          </a:bodyPr>
+          <a:lstStyle/>
+          <a:p>
+            <a:pPr algn="l">
+              <a:lnSpc>
+                <a:spcPct val="130000"/>
+              </a:lnSpc>
+            </a:pPr>
+            <a:r>
+              <a:rPr sz="2500" b="1" i="0">
+                <a:solidFill>
+                  <a:srgbClr val="17181A"/>
+                </a:solidFill>
+                <a:latin typeface="Verdana"/>
+              </a:rPr>
+              <a:t>« Terrebonne, le 17 septembre 2026 »</a:t>
+            </a:r>
+          </a:p>
+        </p:txBody>
+      </p:sp>
+      <p:sp>
+        <p:nvSpPr>
+          <p:cNvPr id="13" name="Rounded Rectangle 12"/>
+          <p:cNvSpPr/>
+          <p:nvPr/>
+        </p:nvSpPr>
+        <p:spPr>
+          <a:xfrm>
+            <a:off x="566928" y="4462272"/>
+            <a:ext cx="11057839" cy="1618487"/>
+          </a:xfrm>
+          <a:prstGeom prst="roundRect">
+            <a:avLst>
+              <a:gd name="adj" fmla="val 9039"/>
+            </a:avLst>
+          </a:prstGeom>
+          <a:solidFill>
+            <a:srgbClr val="FFFFFF"/>
+          </a:solidFill>
+          <a:ln w="12700">
+            <a:solidFill>
+              <a:srgbClr val="EAEAE8"/>
+            </a:solidFill>
+          </a:ln>
+          <a:effectLst/>
+        </p:spPr>
+        <p:style>
+          <a:lnRef idx="1">
+            <a:schemeClr val="accent1"/>
+          </a:lnRef>
+          <a:fillRef idx="3">
+            <a:schemeClr val="accent1"/>
+          </a:fillRef>
+          <a:effectRef idx="2">
+            <a:schemeClr val="accent1"/>
+          </a:effectRef>
+          <a:fontRef idx="minor">
+            <a:schemeClr val="lt1"/>
+          </a:fontRef>
+        </p:style>
+        <p:txBody>
+          <a:bodyPr rtlCol="0" anchor="ctr"/>
+          <a:lstStyle/>
+          <a:p/>
+        </p:txBody>
+      </p:sp>
+      <p:sp>
+        <p:nvSpPr>
+          <p:cNvPr id="14" name="TextBox 13"/>
+          <p:cNvSpPr txBox="1"/>
+          <p:nvPr/>
+        </p:nvSpPr>
+        <p:spPr>
+          <a:xfrm>
+            <a:off x="969264" y="4736592"/>
+            <a:ext cx="10234879" cy="1518920"/>
+          </a:xfrm>
+          <a:prstGeom prst="rect">
+            <a:avLst/>
+          </a:prstGeom>
+          <a:noFill/>
+        </p:spPr>
+        <p:txBody>
+          <a:bodyPr wrap="square" lIns="0" rIns="0" tIns="0" bIns="0" anchor="t">
+            <a:spAutoFit/>
+          </a:bodyPr>
+          <a:lstStyle/>
+          <a:p>
+            <a:pPr algn="l">
+              <a:lnSpc>
+                <a:spcPct val="145000"/>
+              </a:lnSpc>
+            </a:pPr>
+            <a:r>
+              <a:rPr sz="2000" b="0" i="0">
+                <a:solidFill>
+                  <a:srgbClr val="4B4F52"/>
+                </a:solidFill>
+                <a:latin typeface="Verdana"/>
+              </a:rPr>
+              <a:t>Le mois s'écrit en toutes lettres dans un écrit de travail. Une date en chiffres ne se lit pas de la même façon partout - le 09/03 est le 9 mars ici et le 3 septembre ailleurs - et un document se relit parfois deux ans plus tard. Même règle pour les abréviations : « M. » et non « Mr », qui est anglais.</a:t>
+            </a:r>
+          </a:p>
+        </p:txBody>
+      </p:sp>
+    </p:spTree>
+  </p:cSld>
+  <p:clrMapOvr>
+    <a:masterClrMapping/>
+  </p:clrMapOvr>
+</p:sld>
+</file>
+
+<file path=ppt/slides/slide14.xml><?xml version="1.0" encoding="utf-8"?>
+<p:sld xmlns:a="http://schemas.openxmlformats.org/drawingml/2006/main" xmlns:p="http://schemas.openxmlformats.org/presentationml/2006/main" xmlns:r="http://schemas.openxmlformats.org/officeDocument/2006/relationships">
+  <p:cSld>
+    <p:spTree>
+      <p:nvGrpSpPr>
+        <p:cNvPr id="1" name=""/>
+        <p:cNvGrpSpPr/>
+        <p:nvPr/>
+      </p:nvGrpSpPr>
+      <p:grpSpPr/>
+      <p:sp>
+        <p:nvSpPr>
+          <p:cNvPr id="2" name="Rectangle 1"/>
+          <p:cNvSpPr/>
+          <p:nvPr/>
+        </p:nvSpPr>
+        <p:spPr>
+          <a:xfrm>
+            <a:off x="0" y="0"/>
+            <a:ext cx="12191695" cy="6858000"/>
+          </a:xfrm>
+          <a:prstGeom prst="rect">
+            <a:avLst/>
+          </a:prstGeom>
+          <a:solidFill>
+            <a:srgbClr val="F7F7F5"/>
+          </a:solidFill>
+          <a:ln>
+            <a:noFill/>
+          </a:ln>
+          <a:effectLst/>
+        </p:spPr>
+        <p:style>
+          <a:lnRef idx="1">
+            <a:schemeClr val="accent1"/>
+          </a:lnRef>
+          <a:fillRef idx="3">
+            <a:schemeClr val="accent1"/>
+          </a:fillRef>
+          <a:effectRef idx="2">
+            <a:schemeClr val="accent1"/>
+          </a:effectRef>
+          <a:fontRef idx="minor">
+            <a:schemeClr val="lt1"/>
+          </a:fontRef>
+        </p:style>
+        <p:txBody>
+          <a:bodyPr rtlCol="0" anchor="ctr"/>
+          <a:lstStyle/>
+          <a:p/>
+        </p:txBody>
+      </p:sp>
+      <p:sp>
+        <p:nvSpPr>
+          <p:cNvPr id="3" name="TextBox 2"/>
+          <p:cNvSpPr txBox="1"/>
+          <p:nvPr/>
+        </p:nvSpPr>
+        <p:spPr>
+          <a:xfrm>
+            <a:off x="566928" y="6355080"/>
+            <a:ext cx="6400800" cy="219456"/>
+          </a:xfrm>
+          <a:prstGeom prst="rect">
+            <a:avLst/>
+          </a:prstGeom>
+          <a:noFill/>
+        </p:spPr>
+        <p:txBody>
+          <a:bodyPr wrap="square" lIns="0" rIns="0" tIns="0" bIns="0" anchor="t">
+            <a:spAutoFit/>
+          </a:bodyPr>
+          <a:lstStyle/>
+          <a:p>
+            <a:pPr algn="l">
+              <a:lnSpc>
+                <a:spcPct val="135000"/>
+              </a:lnSpc>
+            </a:pPr>
+            <a:r>
+              <a:rPr sz="1200" b="0" i="0">
+                <a:solidFill>
+                  <a:srgbClr val="6E7175"/>
+                </a:solidFill>
+                <a:latin typeface="Verdana"/>
+              </a:rPr>
+              <a:t>D1 · Présenter un projet au travail</a:t>
+            </a:r>
+          </a:p>
+        </p:txBody>
+      </p:sp>
+      <p:sp>
+        <p:nvSpPr>
+          <p:cNvPr id="4" name="TextBox 3"/>
+          <p:cNvSpPr txBox="1"/>
+          <p:nvPr/>
+        </p:nvSpPr>
+        <p:spPr>
+          <a:xfrm>
+            <a:off x="10710367" y="6355080"/>
+            <a:ext cx="914400" cy="219456"/>
+          </a:xfrm>
+          <a:prstGeom prst="rect">
+            <a:avLst/>
+          </a:prstGeom>
+          <a:noFill/>
+        </p:spPr>
+        <p:txBody>
+          <a:bodyPr wrap="square" lIns="0" rIns="0" tIns="0" bIns="0" anchor="t">
+            <a:spAutoFit/>
+          </a:bodyPr>
+          <a:lstStyle/>
+          <a:p>
+            <a:pPr algn="r">
+              <a:lnSpc>
+                <a:spcPct val="135000"/>
+              </a:lnSpc>
+            </a:pPr>
+            <a:r>
+              <a:rPr sz="1200" b="0" i="0">
+                <a:solidFill>
+                  <a:srgbClr val="6E7175"/>
+                </a:solidFill>
+                <a:latin typeface="Verdana"/>
+              </a:rPr>
+              <a:t>14</a:t>
+            </a:r>
+          </a:p>
+        </p:txBody>
+      </p:sp>
+      <p:sp>
+        <p:nvSpPr>
           <p:cNvPr id="5" name="Rectangle 4"/>
           <p:cNvSpPr/>
           <p:nvPr/>
@@ -9952,7 +12172,7 @@
                 </a:solidFill>
                 <a:latin typeface="Verdana"/>
               </a:rPr>
-              <a:t>COMPRÉHENSION</a:t>
+              <a:t>LE DOCUMENT</a:t>
             </a:r>
           </a:p>
         </p:txBody>
@@ -9998,57 +12218,18 @@
       </p:sp>
       <p:sp>
         <p:nvSpPr>
-          <p:cNvPr id="7" name="TextBox 6"/>
-          <p:cNvSpPr txBox="1"/>
-          <p:nvPr/>
-        </p:nvSpPr>
-        <p:spPr>
-          <a:xfrm>
-            <a:off x="566928" y="1645920"/>
-            <a:ext cx="11057839" cy="329184"/>
-          </a:xfrm>
-          <a:prstGeom prst="rect">
-            <a:avLst/>
-          </a:prstGeom>
-          <a:noFill/>
-        </p:spPr>
-        <p:txBody>
-          <a:bodyPr wrap="square" lIns="0" rIns="0" tIns="0" bIns="0" anchor="t">
-            <a:spAutoFit/>
-          </a:bodyPr>
-          <a:lstStyle/>
-          <a:p>
-            <a:pPr algn="l">
-              <a:lnSpc>
-                <a:spcPct val="135000"/>
-              </a:lnSpc>
-            </a:pPr>
-            <a:r>
-              <a:rPr sz="1800" b="0" i="0">
-                <a:solidFill>
-                  <a:srgbClr val="6E7175"/>
-                </a:solidFill>
-                <a:latin typeface="Verdana"/>
-              </a:rPr>
-              <a:t>Répondez d'après le document projeté au module.</a:t>
-            </a:r>
-          </a:p>
-        </p:txBody>
-      </p:sp>
-      <p:sp>
-        <p:nvSpPr>
-          <p:cNvPr id="8" name="Rounded Rectangle 7"/>
+          <p:cNvPr id="7" name="Rounded Rectangle 6"/>
           <p:cNvSpPr/>
           <p:nvPr/>
         </p:nvSpPr>
         <p:spPr>
           <a:xfrm>
-            <a:off x="566928" y="2139696"/>
-            <a:ext cx="11057839" cy="559816"/>
+            <a:off x="566928" y="1737360"/>
+            <a:ext cx="11057839" cy="4320540"/>
           </a:xfrm>
           <a:prstGeom prst="roundRect">
             <a:avLst>
-              <a:gd name="adj" fmla="val 26134"/>
+              <a:gd name="adj" fmla="val 3386"/>
             </a:avLst>
           </a:prstGeom>
           <a:solidFill>
@@ -10083,58 +12264,14 @@
       </p:sp>
       <p:sp>
         <p:nvSpPr>
-          <p:cNvPr id="9" name="Rounded Rectangle 8"/>
-          <p:cNvSpPr/>
-          <p:nvPr/>
-        </p:nvSpPr>
-        <p:spPr>
-          <a:xfrm>
-            <a:off x="841247" y="2236724"/>
-            <a:ext cx="365760" cy="365760"/>
-          </a:xfrm>
-          <a:prstGeom prst="roundRect">
-            <a:avLst>
-              <a:gd name="adj" fmla="val 32500"/>
-            </a:avLst>
-          </a:prstGeom>
-          <a:solidFill>
-            <a:srgbClr val="FBEEDC"/>
-          </a:solidFill>
-          <a:ln>
-            <a:noFill/>
-          </a:ln>
-          <a:effectLst/>
-        </p:spPr>
-        <p:style>
-          <a:lnRef idx="1">
-            <a:schemeClr val="accent1"/>
-          </a:lnRef>
-          <a:fillRef idx="3">
-            <a:schemeClr val="accent1"/>
-          </a:fillRef>
-          <a:effectRef idx="2">
-            <a:schemeClr val="accent1"/>
-          </a:effectRef>
-          <a:fontRef idx="minor">
-            <a:schemeClr val="lt1"/>
-          </a:fontRef>
-        </p:style>
-        <p:txBody>
-          <a:bodyPr rtlCol="0" anchor="ctr"/>
-          <a:lstStyle/>
-          <a:p/>
-        </p:txBody>
-      </p:sp>
-      <p:sp>
-        <p:nvSpPr>
-          <p:cNvPr id="10" name="TextBox 9"/>
+          <p:cNvPr id="8" name="TextBox 7"/>
           <p:cNvSpPr txBox="1"/>
           <p:nvPr/>
         </p:nvSpPr>
         <p:spPr>
           <a:xfrm>
-            <a:off x="841247" y="2300732"/>
-            <a:ext cx="365760" cy="256032"/>
+            <a:off x="978408" y="1993391"/>
+            <a:ext cx="10234879" cy="368046"/>
           </a:xfrm>
           <a:prstGeom prst="rect">
             <a:avLst/>
@@ -10147,33 +12284,33 @@
           </a:bodyPr>
           <a:lstStyle/>
           <a:p>
-            <a:pPr algn="ctr">
+            <a:pPr algn="l">
               <a:lnSpc>
-                <a:spcPct val="135000"/>
+                <a:spcPct val="145000"/>
               </a:lnSpc>
             </a:pPr>
             <a:r>
-              <a:rPr sz="1500" b="1" i="0">
-                <a:solidFill>
-                  <a:srgbClr val="B45309"/>
-                </a:solidFill>
-                <a:latin typeface="Verdana"/>
-              </a:rPr>
-              <a:t>1</a:t>
-            </a:r>
-          </a:p>
-        </p:txBody>
-      </p:sp>
-      <p:sp>
-        <p:nvSpPr>
-          <p:cNvPr id="11" name="TextBox 10"/>
+              <a:rPr sz="1800" b="0" i="0">
+                <a:solidFill>
+                  <a:srgbClr val="3A3D40"/>
+                </a:solidFill>
+                <a:latin typeface="Verdana"/>
+              </a:rPr>
+              <a:t>MEUBLES RIVE-DU-NORD — NOTE DE SERVICE</a:t>
+            </a:r>
+          </a:p>
+        </p:txBody>
+      </p:sp>
+      <p:sp>
+        <p:nvSpPr>
+          <p:cNvPr id="9" name="TextBox 8"/>
           <p:cNvSpPr txBox="1"/>
           <p:nvPr/>
         </p:nvSpPr>
         <p:spPr>
           <a:xfrm>
-            <a:off x="1344168" y="2295144"/>
-            <a:ext cx="10097719" cy="285496"/>
+            <a:off x="978408" y="2489453"/>
+            <a:ext cx="10234879" cy="1030986"/>
           </a:xfrm>
           <a:prstGeom prst="rect">
             <a:avLst/>
@@ -10188,121 +12325,31 @@
           <a:p>
             <a:pPr algn="l">
               <a:lnSpc>
-                <a:spcPct val="140000"/>
+                <a:spcPct val="145000"/>
               </a:lnSpc>
             </a:pPr>
             <a:r>
-              <a:rPr sz="1400" b="0" i="0">
+              <a:rPr sz="1800" b="0" i="0">
                 <a:solidFill>
                   <a:srgbClr val="3A3D40"/>
                 </a:solidFill>
                 <a:latin typeface="Verdana"/>
               </a:rPr>
-              <a:t>À qui la note s'adresse-t-elle ?</a:t>
-            </a:r>
-          </a:p>
-        </p:txBody>
-      </p:sp>
-      <p:sp>
-        <p:nvSpPr>
-          <p:cNvPr id="12" name="Rounded Rectangle 11"/>
-          <p:cNvSpPr/>
-          <p:nvPr/>
-        </p:nvSpPr>
-        <p:spPr>
-          <a:xfrm>
-            <a:off x="566928" y="2827528"/>
-            <a:ext cx="11057839" cy="559816"/>
-          </a:xfrm>
-          <a:prstGeom prst="roundRect">
-            <a:avLst>
-              <a:gd name="adj" fmla="val 26134"/>
-            </a:avLst>
-          </a:prstGeom>
-          <a:solidFill>
-            <a:srgbClr val="FFFFFF"/>
-          </a:solidFill>
-          <a:ln w="12700">
-            <a:solidFill>
-              <a:srgbClr val="EAEAE8"/>
-            </a:solidFill>
-          </a:ln>
-          <a:effectLst/>
-        </p:spPr>
-        <p:style>
-          <a:lnRef idx="1">
-            <a:schemeClr val="accent1"/>
-          </a:lnRef>
-          <a:fillRef idx="3">
-            <a:schemeClr val="accent1"/>
-          </a:fillRef>
-          <a:effectRef idx="2">
-            <a:schemeClr val="accent1"/>
-          </a:effectRef>
-          <a:fontRef idx="minor">
-            <a:schemeClr val="lt1"/>
-          </a:fontRef>
-        </p:style>
-        <p:txBody>
-          <a:bodyPr rtlCol="0" anchor="ctr"/>
-          <a:lstStyle/>
-          <a:p/>
-        </p:txBody>
-      </p:sp>
-      <p:sp>
-        <p:nvSpPr>
-          <p:cNvPr id="13" name="Rounded Rectangle 12"/>
-          <p:cNvSpPr/>
-          <p:nvPr/>
-        </p:nvSpPr>
-        <p:spPr>
-          <a:xfrm>
-            <a:off x="841247" y="2924556"/>
-            <a:ext cx="365760" cy="365760"/>
-          </a:xfrm>
-          <a:prstGeom prst="roundRect">
-            <a:avLst>
-              <a:gd name="adj" fmla="val 32500"/>
-            </a:avLst>
-          </a:prstGeom>
-          <a:solidFill>
-            <a:srgbClr val="FBEEDC"/>
-          </a:solidFill>
-          <a:ln>
-            <a:noFill/>
-          </a:ln>
-          <a:effectLst/>
-        </p:spPr>
-        <p:style>
-          <a:lnRef idx="1">
-            <a:schemeClr val="accent1"/>
-          </a:lnRef>
-          <a:fillRef idx="3">
-            <a:schemeClr val="accent1"/>
-          </a:fillRef>
-          <a:effectRef idx="2">
-            <a:schemeClr val="accent1"/>
-          </a:effectRef>
-          <a:fontRef idx="minor">
-            <a:schemeClr val="lt1"/>
-          </a:fontRef>
-        </p:style>
-        <p:txBody>
-          <a:bodyPr rtlCol="0" anchor="ctr"/>
-          <a:lstStyle/>
-          <a:p/>
-        </p:txBody>
-      </p:sp>
-      <p:sp>
-        <p:nvSpPr>
-          <p:cNvPr id="14" name="TextBox 13"/>
+              <a:t>DESTINATAIRES : le personnel du poste 4 et les chefs d'équipe de l'expédition. EXPÉDITRICE : Aïcha Traoré, coordonnatrice adjointe à l'expédition. DATE : le 16 septembre. OBJET : rotation des tâches au poste 4, à l'essai.</a:t>
+            </a:r>
+          </a:p>
+        </p:txBody>
+      </p:sp>
+      <p:sp>
+        <p:nvSpPr>
+          <p:cNvPr id="10" name="TextBox 9"/>
           <p:cNvSpPr txBox="1"/>
           <p:nvPr/>
         </p:nvSpPr>
         <p:spPr>
           <a:xfrm>
-            <a:off x="841247" y="2988564"/>
-            <a:ext cx="365760" cy="256032"/>
+            <a:off x="978408" y="3648455"/>
+            <a:ext cx="10234879" cy="1030986"/>
           </a:xfrm>
           <a:prstGeom prst="rect">
             <a:avLst/>
@@ -10315,33 +12362,33 @@
           </a:bodyPr>
           <a:lstStyle/>
           <a:p>
-            <a:pPr algn="ctr">
+            <a:pPr algn="l">
               <a:lnSpc>
-                <a:spcPct val="135000"/>
+                <a:spcPct val="145000"/>
               </a:lnSpc>
             </a:pPr>
             <a:r>
-              <a:rPr sz="1500" b="1" i="0">
-                <a:solidFill>
-                  <a:srgbClr val="B45309"/>
-                </a:solidFill>
-                <a:latin typeface="Verdana"/>
-              </a:rPr>
-              <a:t>2</a:t>
-            </a:r>
-          </a:p>
-        </p:txBody>
-      </p:sp>
-      <p:sp>
-        <p:nvSpPr>
-          <p:cNvPr id="15" name="TextBox 14"/>
+              <a:rPr sz="1800" b="0" i="0">
+                <a:solidFill>
+                  <a:srgbClr val="3A3D40"/>
+                </a:solidFill>
+                <a:latin typeface="Verdana"/>
+              </a:rPr>
+              <a:t>À la réunion de production du 15 septembre, le nombre de flexions exigées au poste d'emballage a été présenté au comité. Trois personnes du poste ont consulté pour le dos depuis le mois de mars.</a:t>
+            </a:r>
+          </a:p>
+        </p:txBody>
+      </p:sp>
+      <p:sp>
+        <p:nvSpPr>
+          <p:cNvPr id="11" name="TextBox 10"/>
           <p:cNvSpPr txBox="1"/>
           <p:nvPr/>
         </p:nvSpPr>
         <p:spPr>
           <a:xfrm>
-            <a:off x="1344168" y="2982975"/>
-            <a:ext cx="10097719" cy="285496"/>
+            <a:off x="978408" y="4807457"/>
+            <a:ext cx="10234879" cy="1030986"/>
           </a:xfrm>
           <a:prstGeom prst="rect">
             <a:avLst/>
@@ -10356,689 +12403,17 @@
           <a:p>
             <a:pPr algn="l">
               <a:lnSpc>
-                <a:spcPct val="140000"/>
+                <a:spcPct val="145000"/>
               </a:lnSpc>
             </a:pPr>
             <a:r>
-              <a:rPr sz="1400" b="0" i="0">
+              <a:rPr sz="1800" b="0" i="0">
                 <a:solidFill>
                   <a:srgbClr val="3A3D40"/>
                 </a:solidFill>
                 <a:latin typeface="Verdana"/>
               </a:rPr>
-              <a:t>Quel est l'objet ?</a:t>
-            </a:r>
-          </a:p>
-        </p:txBody>
-      </p:sp>
-      <p:sp>
-        <p:nvSpPr>
-          <p:cNvPr id="16" name="Rounded Rectangle 15"/>
-          <p:cNvSpPr/>
-          <p:nvPr/>
-        </p:nvSpPr>
-        <p:spPr>
-          <a:xfrm>
-            <a:off x="566928" y="3515359"/>
-            <a:ext cx="11057839" cy="559816"/>
-          </a:xfrm>
-          <a:prstGeom prst="roundRect">
-            <a:avLst>
-              <a:gd name="adj" fmla="val 26134"/>
-            </a:avLst>
-          </a:prstGeom>
-          <a:solidFill>
-            <a:srgbClr val="FFFFFF"/>
-          </a:solidFill>
-          <a:ln w="12700">
-            <a:solidFill>
-              <a:srgbClr val="EAEAE8"/>
-            </a:solidFill>
-          </a:ln>
-          <a:effectLst/>
-        </p:spPr>
-        <p:style>
-          <a:lnRef idx="1">
-            <a:schemeClr val="accent1"/>
-          </a:lnRef>
-          <a:fillRef idx="3">
-            <a:schemeClr val="accent1"/>
-          </a:fillRef>
-          <a:effectRef idx="2">
-            <a:schemeClr val="accent1"/>
-          </a:effectRef>
-          <a:fontRef idx="minor">
-            <a:schemeClr val="lt1"/>
-          </a:fontRef>
-        </p:style>
-        <p:txBody>
-          <a:bodyPr rtlCol="0" anchor="ctr"/>
-          <a:lstStyle/>
-          <a:p/>
-        </p:txBody>
-      </p:sp>
-      <p:sp>
-        <p:nvSpPr>
-          <p:cNvPr id="17" name="Rounded Rectangle 16"/>
-          <p:cNvSpPr/>
-          <p:nvPr/>
-        </p:nvSpPr>
-        <p:spPr>
-          <a:xfrm>
-            <a:off x="841247" y="3612388"/>
-            <a:ext cx="365760" cy="365760"/>
-          </a:xfrm>
-          <a:prstGeom prst="roundRect">
-            <a:avLst>
-              <a:gd name="adj" fmla="val 32500"/>
-            </a:avLst>
-          </a:prstGeom>
-          <a:solidFill>
-            <a:srgbClr val="FBEEDC"/>
-          </a:solidFill>
-          <a:ln>
-            <a:noFill/>
-          </a:ln>
-          <a:effectLst/>
-        </p:spPr>
-        <p:style>
-          <a:lnRef idx="1">
-            <a:schemeClr val="accent1"/>
-          </a:lnRef>
-          <a:fillRef idx="3">
-            <a:schemeClr val="accent1"/>
-          </a:fillRef>
-          <a:effectRef idx="2">
-            <a:schemeClr val="accent1"/>
-          </a:effectRef>
-          <a:fontRef idx="minor">
-            <a:schemeClr val="lt1"/>
-          </a:fontRef>
-        </p:style>
-        <p:txBody>
-          <a:bodyPr rtlCol="0" anchor="ctr"/>
-          <a:lstStyle/>
-          <a:p/>
-        </p:txBody>
-      </p:sp>
-      <p:sp>
-        <p:nvSpPr>
-          <p:cNvPr id="18" name="TextBox 17"/>
-          <p:cNvSpPr txBox="1"/>
-          <p:nvPr/>
-        </p:nvSpPr>
-        <p:spPr>
-          <a:xfrm>
-            <a:off x="841247" y="3676395"/>
-            <a:ext cx="365760" cy="256032"/>
-          </a:xfrm>
-          <a:prstGeom prst="rect">
-            <a:avLst/>
-          </a:prstGeom>
-          <a:noFill/>
-        </p:spPr>
-        <p:txBody>
-          <a:bodyPr wrap="square" lIns="0" rIns="0" tIns="0" bIns="0" anchor="t">
-            <a:spAutoFit/>
-          </a:bodyPr>
-          <a:lstStyle/>
-          <a:p>
-            <a:pPr algn="ctr">
-              <a:lnSpc>
-                <a:spcPct val="135000"/>
-              </a:lnSpc>
-            </a:pPr>
-            <a:r>
-              <a:rPr sz="1500" b="1" i="0">
-                <a:solidFill>
-                  <a:srgbClr val="B45309"/>
-                </a:solidFill>
-                <a:latin typeface="Verdana"/>
-              </a:rPr>
-              <a:t>3</a:t>
-            </a:r>
-          </a:p>
-        </p:txBody>
-      </p:sp>
-      <p:sp>
-        <p:nvSpPr>
-          <p:cNvPr id="19" name="TextBox 18"/>
-          <p:cNvSpPr txBox="1"/>
-          <p:nvPr/>
-        </p:nvSpPr>
-        <p:spPr>
-          <a:xfrm>
-            <a:off x="1344168" y="3670807"/>
-            <a:ext cx="10097719" cy="285496"/>
-          </a:xfrm>
-          <a:prstGeom prst="rect">
-            <a:avLst/>
-          </a:prstGeom>
-          <a:noFill/>
-        </p:spPr>
-        <p:txBody>
-          <a:bodyPr wrap="square" lIns="0" rIns="0" tIns="0" bIns="0" anchor="t">
-            <a:spAutoFit/>
-          </a:bodyPr>
-          <a:lstStyle/>
-          <a:p>
-            <a:pPr algn="l">
-              <a:lnSpc>
-                <a:spcPct val="140000"/>
-              </a:lnSpc>
-            </a:pPr>
-            <a:r>
-              <a:rPr sz="1400" b="0" i="0">
-                <a:solidFill>
-                  <a:srgbClr val="3A3D40"/>
-                </a:solidFill>
-                <a:latin typeface="Verdana"/>
-              </a:rPr>
-              <a:t>Qu'est-ce qui change, et à partir de quand ?</a:t>
-            </a:r>
-          </a:p>
-        </p:txBody>
-      </p:sp>
-      <p:sp>
-        <p:nvSpPr>
-          <p:cNvPr id="20" name="Rounded Rectangle 19"/>
-          <p:cNvSpPr/>
-          <p:nvPr/>
-        </p:nvSpPr>
-        <p:spPr>
-          <a:xfrm>
-            <a:off x="566928" y="4203192"/>
-            <a:ext cx="11057839" cy="559816"/>
-          </a:xfrm>
-          <a:prstGeom prst="roundRect">
-            <a:avLst>
-              <a:gd name="adj" fmla="val 26134"/>
-            </a:avLst>
-          </a:prstGeom>
-          <a:solidFill>
-            <a:srgbClr val="FFFFFF"/>
-          </a:solidFill>
-          <a:ln w="12700">
-            <a:solidFill>
-              <a:srgbClr val="EAEAE8"/>
-            </a:solidFill>
-          </a:ln>
-          <a:effectLst/>
-        </p:spPr>
-        <p:style>
-          <a:lnRef idx="1">
-            <a:schemeClr val="accent1"/>
-          </a:lnRef>
-          <a:fillRef idx="3">
-            <a:schemeClr val="accent1"/>
-          </a:fillRef>
-          <a:effectRef idx="2">
-            <a:schemeClr val="accent1"/>
-          </a:effectRef>
-          <a:fontRef idx="minor">
-            <a:schemeClr val="lt1"/>
-          </a:fontRef>
-        </p:style>
-        <p:txBody>
-          <a:bodyPr rtlCol="0" anchor="ctr"/>
-          <a:lstStyle/>
-          <a:p/>
-        </p:txBody>
-      </p:sp>
-      <p:sp>
-        <p:nvSpPr>
-          <p:cNvPr id="21" name="Rounded Rectangle 20"/>
-          <p:cNvSpPr/>
-          <p:nvPr/>
-        </p:nvSpPr>
-        <p:spPr>
-          <a:xfrm>
-            <a:off x="841247" y="4300220"/>
-            <a:ext cx="365760" cy="365760"/>
-          </a:xfrm>
-          <a:prstGeom prst="roundRect">
-            <a:avLst>
-              <a:gd name="adj" fmla="val 32500"/>
-            </a:avLst>
-          </a:prstGeom>
-          <a:solidFill>
-            <a:srgbClr val="FBEEDC"/>
-          </a:solidFill>
-          <a:ln>
-            <a:noFill/>
-          </a:ln>
-          <a:effectLst/>
-        </p:spPr>
-        <p:style>
-          <a:lnRef idx="1">
-            <a:schemeClr val="accent1"/>
-          </a:lnRef>
-          <a:fillRef idx="3">
-            <a:schemeClr val="accent1"/>
-          </a:fillRef>
-          <a:effectRef idx="2">
-            <a:schemeClr val="accent1"/>
-          </a:effectRef>
-          <a:fontRef idx="minor">
-            <a:schemeClr val="lt1"/>
-          </a:fontRef>
-        </p:style>
-        <p:txBody>
-          <a:bodyPr rtlCol="0" anchor="ctr"/>
-          <a:lstStyle/>
-          <a:p/>
-        </p:txBody>
-      </p:sp>
-      <p:sp>
-        <p:nvSpPr>
-          <p:cNvPr id="22" name="TextBox 21"/>
-          <p:cNvSpPr txBox="1"/>
-          <p:nvPr/>
-        </p:nvSpPr>
-        <p:spPr>
-          <a:xfrm>
-            <a:off x="841247" y="4364228"/>
-            <a:ext cx="365760" cy="256032"/>
-          </a:xfrm>
-          <a:prstGeom prst="rect">
-            <a:avLst/>
-          </a:prstGeom>
-          <a:noFill/>
-        </p:spPr>
-        <p:txBody>
-          <a:bodyPr wrap="square" lIns="0" rIns="0" tIns="0" bIns="0" anchor="t">
-            <a:spAutoFit/>
-          </a:bodyPr>
-          <a:lstStyle/>
-          <a:p>
-            <a:pPr algn="ctr">
-              <a:lnSpc>
-                <a:spcPct val="135000"/>
-              </a:lnSpc>
-            </a:pPr>
-            <a:r>
-              <a:rPr sz="1500" b="1" i="0">
-                <a:solidFill>
-                  <a:srgbClr val="B45309"/>
-                </a:solidFill>
-                <a:latin typeface="Verdana"/>
-              </a:rPr>
-              <a:t>4</a:t>
-            </a:r>
-          </a:p>
-        </p:txBody>
-      </p:sp>
-      <p:sp>
-        <p:nvSpPr>
-          <p:cNvPr id="23" name="TextBox 22"/>
-          <p:cNvSpPr txBox="1"/>
-          <p:nvPr/>
-        </p:nvSpPr>
-        <p:spPr>
-          <a:xfrm>
-            <a:off x="1344168" y="4358640"/>
-            <a:ext cx="10097719" cy="285496"/>
-          </a:xfrm>
-          <a:prstGeom prst="rect">
-            <a:avLst/>
-          </a:prstGeom>
-          <a:noFill/>
-        </p:spPr>
-        <p:txBody>
-          <a:bodyPr wrap="square" lIns="0" rIns="0" tIns="0" bIns="0" anchor="t">
-            <a:spAutoFit/>
-          </a:bodyPr>
-          <a:lstStyle/>
-          <a:p>
-            <a:pPr algn="l">
-              <a:lnSpc>
-                <a:spcPct val="140000"/>
-              </a:lnSpc>
-            </a:pPr>
-            <a:r>
-              <a:rPr sz="1400" b="0" i="0">
-                <a:solidFill>
-                  <a:srgbClr val="3A3D40"/>
-                </a:solidFill>
-                <a:latin typeface="Verdana"/>
-              </a:rPr>
-              <a:t>Combien de temps dure l'essai ?</a:t>
-            </a:r>
-          </a:p>
-        </p:txBody>
-      </p:sp>
-      <p:sp>
-        <p:nvSpPr>
-          <p:cNvPr id="24" name="Rounded Rectangle 23"/>
-          <p:cNvSpPr/>
-          <p:nvPr/>
-        </p:nvSpPr>
-        <p:spPr>
-          <a:xfrm>
-            <a:off x="566928" y="4891023"/>
-            <a:ext cx="11057839" cy="559816"/>
-          </a:xfrm>
-          <a:prstGeom prst="roundRect">
-            <a:avLst>
-              <a:gd name="adj" fmla="val 26134"/>
-            </a:avLst>
-          </a:prstGeom>
-          <a:solidFill>
-            <a:srgbClr val="FFFFFF"/>
-          </a:solidFill>
-          <a:ln w="12700">
-            <a:solidFill>
-              <a:srgbClr val="EAEAE8"/>
-            </a:solidFill>
-          </a:ln>
-          <a:effectLst/>
-        </p:spPr>
-        <p:style>
-          <a:lnRef idx="1">
-            <a:schemeClr val="accent1"/>
-          </a:lnRef>
-          <a:fillRef idx="3">
-            <a:schemeClr val="accent1"/>
-          </a:fillRef>
-          <a:effectRef idx="2">
-            <a:schemeClr val="accent1"/>
-          </a:effectRef>
-          <a:fontRef idx="minor">
-            <a:schemeClr val="lt1"/>
-          </a:fontRef>
-        </p:style>
-        <p:txBody>
-          <a:bodyPr rtlCol="0" anchor="ctr"/>
-          <a:lstStyle/>
-          <a:p/>
-        </p:txBody>
-      </p:sp>
-      <p:sp>
-        <p:nvSpPr>
-          <p:cNvPr id="25" name="Rounded Rectangle 24"/>
-          <p:cNvSpPr/>
-          <p:nvPr/>
-        </p:nvSpPr>
-        <p:spPr>
-          <a:xfrm>
-            <a:off x="841247" y="4988051"/>
-            <a:ext cx="365760" cy="365760"/>
-          </a:xfrm>
-          <a:prstGeom prst="roundRect">
-            <a:avLst>
-              <a:gd name="adj" fmla="val 32500"/>
-            </a:avLst>
-          </a:prstGeom>
-          <a:solidFill>
-            <a:srgbClr val="FBEEDC"/>
-          </a:solidFill>
-          <a:ln>
-            <a:noFill/>
-          </a:ln>
-          <a:effectLst/>
-        </p:spPr>
-        <p:style>
-          <a:lnRef idx="1">
-            <a:schemeClr val="accent1"/>
-          </a:lnRef>
-          <a:fillRef idx="3">
-            <a:schemeClr val="accent1"/>
-          </a:fillRef>
-          <a:effectRef idx="2">
-            <a:schemeClr val="accent1"/>
-          </a:effectRef>
-          <a:fontRef idx="minor">
-            <a:schemeClr val="lt1"/>
-          </a:fontRef>
-        </p:style>
-        <p:txBody>
-          <a:bodyPr rtlCol="0" anchor="ctr"/>
-          <a:lstStyle/>
-          <a:p/>
-        </p:txBody>
-      </p:sp>
-      <p:sp>
-        <p:nvSpPr>
-          <p:cNvPr id="26" name="TextBox 25"/>
-          <p:cNvSpPr txBox="1"/>
-          <p:nvPr/>
-        </p:nvSpPr>
-        <p:spPr>
-          <a:xfrm>
-            <a:off x="841247" y="5052059"/>
-            <a:ext cx="365760" cy="256032"/>
-          </a:xfrm>
-          <a:prstGeom prst="rect">
-            <a:avLst/>
-          </a:prstGeom>
-          <a:noFill/>
-        </p:spPr>
-        <p:txBody>
-          <a:bodyPr wrap="square" lIns="0" rIns="0" tIns="0" bIns="0" anchor="t">
-            <a:spAutoFit/>
-          </a:bodyPr>
-          <a:lstStyle/>
-          <a:p>
-            <a:pPr algn="ctr">
-              <a:lnSpc>
-                <a:spcPct val="135000"/>
-              </a:lnSpc>
-            </a:pPr>
-            <a:r>
-              <a:rPr sz="1500" b="1" i="0">
-                <a:solidFill>
-                  <a:srgbClr val="B45309"/>
-                </a:solidFill>
-                <a:latin typeface="Verdana"/>
-              </a:rPr>
-              <a:t>5</a:t>
-            </a:r>
-          </a:p>
-        </p:txBody>
-      </p:sp>
-      <p:sp>
-        <p:nvSpPr>
-          <p:cNvPr id="27" name="TextBox 26"/>
-          <p:cNvSpPr txBox="1"/>
-          <p:nvPr/>
-        </p:nvSpPr>
-        <p:spPr>
-          <a:xfrm>
-            <a:off x="1344168" y="5046471"/>
-            <a:ext cx="10097719" cy="285496"/>
-          </a:xfrm>
-          <a:prstGeom prst="rect">
-            <a:avLst/>
-          </a:prstGeom>
-          <a:noFill/>
-        </p:spPr>
-        <p:txBody>
-          <a:bodyPr wrap="square" lIns="0" rIns="0" tIns="0" bIns="0" anchor="t">
-            <a:spAutoFit/>
-          </a:bodyPr>
-          <a:lstStyle/>
-          <a:p>
-            <a:pPr algn="l">
-              <a:lnSpc>
-                <a:spcPct val="140000"/>
-              </a:lnSpc>
-            </a:pPr>
-            <a:r>
-              <a:rPr sz="1400" b="0" i="0">
-                <a:solidFill>
-                  <a:srgbClr val="3A3D40"/>
-                </a:solidFill>
-                <a:latin typeface="Verdana"/>
-              </a:rPr>
-              <a:t>Qu'est-ce qu'on demande au lecteur de faire ?</a:t>
-            </a:r>
-          </a:p>
-        </p:txBody>
-      </p:sp>
-      <p:sp>
-        <p:nvSpPr>
-          <p:cNvPr id="28" name="Rounded Rectangle 27"/>
-          <p:cNvSpPr/>
-          <p:nvPr/>
-        </p:nvSpPr>
-        <p:spPr>
-          <a:xfrm>
-            <a:off x="566928" y="5578856"/>
-            <a:ext cx="11057839" cy="559816"/>
-          </a:xfrm>
-          <a:prstGeom prst="roundRect">
-            <a:avLst>
-              <a:gd name="adj" fmla="val 26134"/>
-            </a:avLst>
-          </a:prstGeom>
-          <a:solidFill>
-            <a:srgbClr val="FFFFFF"/>
-          </a:solidFill>
-          <a:ln w="12700">
-            <a:solidFill>
-              <a:srgbClr val="EAEAE8"/>
-            </a:solidFill>
-          </a:ln>
-          <a:effectLst/>
-        </p:spPr>
-        <p:style>
-          <a:lnRef idx="1">
-            <a:schemeClr val="accent1"/>
-          </a:lnRef>
-          <a:fillRef idx="3">
-            <a:schemeClr val="accent1"/>
-          </a:fillRef>
-          <a:effectRef idx="2">
-            <a:schemeClr val="accent1"/>
-          </a:effectRef>
-          <a:fontRef idx="minor">
-            <a:schemeClr val="lt1"/>
-          </a:fontRef>
-        </p:style>
-        <p:txBody>
-          <a:bodyPr rtlCol="0" anchor="ctr"/>
-          <a:lstStyle/>
-          <a:p/>
-        </p:txBody>
-      </p:sp>
-      <p:sp>
-        <p:nvSpPr>
-          <p:cNvPr id="29" name="Rounded Rectangle 28"/>
-          <p:cNvSpPr/>
-          <p:nvPr/>
-        </p:nvSpPr>
-        <p:spPr>
-          <a:xfrm>
-            <a:off x="841247" y="5675884"/>
-            <a:ext cx="365760" cy="365760"/>
-          </a:xfrm>
-          <a:prstGeom prst="roundRect">
-            <a:avLst>
-              <a:gd name="adj" fmla="val 32500"/>
-            </a:avLst>
-          </a:prstGeom>
-          <a:solidFill>
-            <a:srgbClr val="FBEEDC"/>
-          </a:solidFill>
-          <a:ln>
-            <a:noFill/>
-          </a:ln>
-          <a:effectLst/>
-        </p:spPr>
-        <p:style>
-          <a:lnRef idx="1">
-            <a:schemeClr val="accent1"/>
-          </a:lnRef>
-          <a:fillRef idx="3">
-            <a:schemeClr val="accent1"/>
-          </a:fillRef>
-          <a:effectRef idx="2">
-            <a:schemeClr val="accent1"/>
-          </a:effectRef>
-          <a:fontRef idx="minor">
-            <a:schemeClr val="lt1"/>
-          </a:fontRef>
-        </p:style>
-        <p:txBody>
-          <a:bodyPr rtlCol="0" anchor="ctr"/>
-          <a:lstStyle/>
-          <a:p/>
-        </p:txBody>
-      </p:sp>
-      <p:sp>
-        <p:nvSpPr>
-          <p:cNvPr id="30" name="TextBox 29"/>
-          <p:cNvSpPr txBox="1"/>
-          <p:nvPr/>
-        </p:nvSpPr>
-        <p:spPr>
-          <a:xfrm>
-            <a:off x="841247" y="5739892"/>
-            <a:ext cx="365760" cy="256032"/>
-          </a:xfrm>
-          <a:prstGeom prst="rect">
-            <a:avLst/>
-          </a:prstGeom>
-          <a:noFill/>
-        </p:spPr>
-        <p:txBody>
-          <a:bodyPr wrap="square" lIns="0" rIns="0" tIns="0" bIns="0" anchor="t">
-            <a:spAutoFit/>
-          </a:bodyPr>
-          <a:lstStyle/>
-          <a:p>
-            <a:pPr algn="ctr">
-              <a:lnSpc>
-                <a:spcPct val="135000"/>
-              </a:lnSpc>
-            </a:pPr>
-            <a:r>
-              <a:rPr sz="1500" b="1" i="0">
-                <a:solidFill>
-                  <a:srgbClr val="B45309"/>
-                </a:solidFill>
-                <a:latin typeface="Verdana"/>
-              </a:rPr>
-              <a:t>6</a:t>
-            </a:r>
-          </a:p>
-        </p:txBody>
-      </p:sp>
-      <p:sp>
-        <p:nvSpPr>
-          <p:cNvPr id="31" name="TextBox 30"/>
-          <p:cNvSpPr txBox="1"/>
-          <p:nvPr/>
-        </p:nvSpPr>
-        <p:spPr>
-          <a:xfrm>
-            <a:off x="1344168" y="5734304"/>
-            <a:ext cx="10097719" cy="285496"/>
-          </a:xfrm>
-          <a:prstGeom prst="rect">
-            <a:avLst/>
-          </a:prstGeom>
-          <a:noFill/>
-        </p:spPr>
-        <p:txBody>
-          <a:bodyPr wrap="square" lIns="0" rIns="0" tIns="0" bIns="0" anchor="t">
-            <a:spAutoFit/>
-          </a:bodyPr>
-          <a:lstStyle/>
-          <a:p>
-            <a:pPr algn="l">
-              <a:lnSpc>
-                <a:spcPct val="140000"/>
-              </a:lnSpc>
-            </a:pPr>
-            <a:r>
-              <a:rPr sz="1400" b="0" i="0">
-                <a:solidFill>
-                  <a:srgbClr val="3A3D40"/>
-                </a:solidFill>
-                <a:latin typeface="Verdana"/>
-              </a:rPr>
-              <a:t>Qu'est-ce qui ne change pas pendant l'essai ?</a:t>
+              <a:t>À compter du lundi 22 septembre, et pour une période d'essai de quatre semaines, les cinq personnes affectées au poste 4 alterneront : quatre heures d'emballage, puis quatre heures à la préparation des commandes. L'alternance se fera à 11 h 30.</a:t>
             </a:r>
           </a:p>
         </p:txBody>
@@ -11215,7 +12590,7 @@
                 </a:solidFill>
                 <a:latin typeface="Verdana"/>
               </a:rPr>
-              <a:t>CORRECTION</a:t>
+              <a:t>LE DOCUMENT</a:t>
             </a:r>
           </a:p>
         </p:txBody>
@@ -11254,68 +12629,29 @@
                 </a:solidFill>
                 <a:latin typeface="Verdana"/>
               </a:rPr>
-              <a:t>La note de service d'Aïcha</a:t>
-            </a:r>
-          </a:p>
-        </p:txBody>
-      </p:sp>
-      <p:sp>
-        <p:nvSpPr>
-          <p:cNvPr id="7" name="TextBox 6"/>
-          <p:cNvSpPr txBox="1"/>
-          <p:nvPr/>
-        </p:nvSpPr>
-        <p:spPr>
-          <a:xfrm>
-            <a:off x="566928" y="1645920"/>
-            <a:ext cx="11057839" cy="329184"/>
-          </a:xfrm>
-          <a:prstGeom prst="rect">
-            <a:avLst/>
-          </a:prstGeom>
-          <a:noFill/>
-        </p:spPr>
-        <p:txBody>
-          <a:bodyPr wrap="square" lIns="0" rIns="0" tIns="0" bIns="0" anchor="t">
-            <a:spAutoFit/>
-          </a:bodyPr>
-          <a:lstStyle/>
-          <a:p>
-            <a:pPr algn="l">
-              <a:lnSpc>
-                <a:spcPct val="135000"/>
-              </a:lnSpc>
-            </a:pPr>
-            <a:r>
-              <a:rPr sz="1800" b="0" i="0">
-                <a:solidFill>
-                  <a:srgbClr val="6E7175"/>
-                </a:solidFill>
-                <a:latin typeface="Verdana"/>
-              </a:rPr>
-              <a:t>Correction — on lit la réponse, on ne commente pas l'erreur.</a:t>
-            </a:r>
-          </a:p>
-        </p:txBody>
-      </p:sp>
-      <p:sp>
-        <p:nvSpPr>
-          <p:cNvPr id="8" name="Rounded Rectangle 7"/>
+              <a:t>La note de service d'Aïcha (suite)</a:t>
+            </a:r>
+          </a:p>
+        </p:txBody>
+      </p:sp>
+      <p:sp>
+        <p:nvSpPr>
+          <p:cNvPr id="7" name="Rounded Rectangle 6"/>
           <p:cNvSpPr/>
           <p:nvPr/>
         </p:nvSpPr>
         <p:spPr>
           <a:xfrm>
-            <a:off x="566928" y="2139696"/>
-            <a:ext cx="11057839" cy="559816"/>
+            <a:off x="566928" y="1737360"/>
+            <a:ext cx="11057839" cy="3161538"/>
           </a:xfrm>
           <a:prstGeom prst="roundRect">
             <a:avLst>
-              <a:gd name="adj" fmla="val 26134"/>
+              <a:gd name="adj" fmla="val 4627"/>
             </a:avLst>
           </a:prstGeom>
           <a:solidFill>
-            <a:srgbClr val="E6F5EE"/>
+            <a:srgbClr val="FFFFFF"/>
           </a:solidFill>
           <a:ln w="12700">
             <a:solidFill>
@@ -11346,58 +12682,14 @@
       </p:sp>
       <p:sp>
         <p:nvSpPr>
-          <p:cNvPr id="9" name="Rounded Rectangle 8"/>
-          <p:cNvSpPr/>
-          <p:nvPr/>
-        </p:nvSpPr>
-        <p:spPr>
-          <a:xfrm>
-            <a:off x="841247" y="2236724"/>
-            <a:ext cx="365760" cy="365760"/>
-          </a:xfrm>
-          <a:prstGeom prst="roundRect">
-            <a:avLst>
-              <a:gd name="adj" fmla="val 32500"/>
-            </a:avLst>
-          </a:prstGeom>
-          <a:solidFill>
-            <a:srgbClr val="FBEEDC"/>
-          </a:solidFill>
-          <a:ln>
-            <a:noFill/>
-          </a:ln>
-          <a:effectLst/>
-        </p:spPr>
-        <p:style>
-          <a:lnRef idx="1">
-            <a:schemeClr val="accent1"/>
-          </a:lnRef>
-          <a:fillRef idx="3">
-            <a:schemeClr val="accent1"/>
-          </a:fillRef>
-          <a:effectRef idx="2">
-            <a:schemeClr val="accent1"/>
-          </a:effectRef>
-          <a:fontRef idx="minor">
-            <a:schemeClr val="lt1"/>
-          </a:fontRef>
-        </p:style>
-        <p:txBody>
-          <a:bodyPr rtlCol="0" anchor="ctr"/>
-          <a:lstStyle/>
-          <a:p/>
-        </p:txBody>
-      </p:sp>
-      <p:sp>
-        <p:nvSpPr>
-          <p:cNvPr id="10" name="TextBox 9"/>
+          <p:cNvPr id="8" name="TextBox 7"/>
           <p:cNvSpPr txBox="1"/>
           <p:nvPr/>
         </p:nvSpPr>
         <p:spPr>
           <a:xfrm>
-            <a:off x="841247" y="2300732"/>
-            <a:ext cx="365760" cy="256032"/>
+            <a:off x="978408" y="1993391"/>
+            <a:ext cx="10234879" cy="1030986"/>
           </a:xfrm>
           <a:prstGeom prst="rect">
             <a:avLst/>
@@ -11410,33 +12702,33 @@
           </a:bodyPr>
           <a:lstStyle/>
           <a:p>
-            <a:pPr algn="ctr">
+            <a:pPr algn="l">
               <a:lnSpc>
-                <a:spcPct val="135000"/>
+                <a:spcPct val="145000"/>
               </a:lnSpc>
             </a:pPr>
             <a:r>
-              <a:rPr sz="1500" b="1" i="0">
-                <a:solidFill>
-                  <a:srgbClr val="B45309"/>
-                </a:solidFill>
-                <a:latin typeface="Verdana"/>
-              </a:rPr>
-              <a:t>1</a:t>
-            </a:r>
-          </a:p>
-        </p:txBody>
-      </p:sp>
-      <p:sp>
-        <p:nvSpPr>
-          <p:cNvPr id="11" name="TextBox 10"/>
+              <a:rPr sz="1800" b="0" i="0">
+                <a:solidFill>
+                  <a:srgbClr val="3A3D40"/>
+                </a:solidFill>
+                <a:latin typeface="Verdana"/>
+              </a:rPr>
+              <a:t>Il vous est demandé de noter, sur la feuille affichée au poste, l'heure de chaque changement et toute difficulté rencontrée. Ces notes seront relevées le vendredi 17 octobre.</a:t>
+            </a:r>
+          </a:p>
+        </p:txBody>
+      </p:sp>
+      <p:sp>
+        <p:nvSpPr>
+          <p:cNvPr id="9" name="TextBox 8"/>
           <p:cNvSpPr txBox="1"/>
           <p:nvPr/>
         </p:nvSpPr>
         <p:spPr>
           <a:xfrm>
-            <a:off x="1344168" y="2295144"/>
-            <a:ext cx="10097719" cy="285496"/>
+            <a:off x="978408" y="3152394"/>
+            <a:ext cx="10234879" cy="699516"/>
           </a:xfrm>
           <a:prstGeom prst="rect">
             <a:avLst/>
@@ -11451,130 +12743,31 @@
           <a:p>
             <a:pPr algn="l">
               <a:lnSpc>
-                <a:spcPct val="140000"/>
+                <a:spcPct val="145000"/>
               </a:lnSpc>
             </a:pPr>
             <a:r>
-              <a:rPr sz="1400" b="0" i="0">
+              <a:rPr sz="1800" b="0" i="0">
                 <a:solidFill>
                   <a:srgbClr val="3A3D40"/>
                 </a:solidFill>
                 <a:latin typeface="Verdana"/>
               </a:rPr>
-              <a:t>À qui la note s'adresse-t-elle ?   </a:t>
-            </a:r>
-            <a:r>
-              <a:rPr sz="1400" b="1" i="0">
-                <a:solidFill>
-                  <a:srgbClr val="07734A"/>
-                </a:solidFill>
-                <a:latin typeface="Verdana"/>
-              </a:rPr>
-              <a:t>» au personnel du poste 4 et aux chefs d'équipe</a:t>
-            </a:r>
-          </a:p>
-        </p:txBody>
-      </p:sp>
-      <p:sp>
-        <p:nvSpPr>
-          <p:cNvPr id="12" name="Rounded Rectangle 11"/>
-          <p:cNvSpPr/>
-          <p:nvPr/>
-        </p:nvSpPr>
-        <p:spPr>
-          <a:xfrm>
-            <a:off x="566928" y="2827528"/>
-            <a:ext cx="11057839" cy="559816"/>
-          </a:xfrm>
-          <a:prstGeom prst="roundRect">
-            <a:avLst>
-              <a:gd name="adj" fmla="val 26134"/>
-            </a:avLst>
-          </a:prstGeom>
-          <a:solidFill>
-            <a:srgbClr val="E6F5EE"/>
-          </a:solidFill>
-          <a:ln w="12700">
-            <a:solidFill>
-              <a:srgbClr val="EAEAE8"/>
-            </a:solidFill>
-          </a:ln>
-          <a:effectLst/>
-        </p:spPr>
-        <p:style>
-          <a:lnRef idx="1">
-            <a:schemeClr val="accent1"/>
-          </a:lnRef>
-          <a:fillRef idx="3">
-            <a:schemeClr val="accent1"/>
-          </a:fillRef>
-          <a:effectRef idx="2">
-            <a:schemeClr val="accent1"/>
-          </a:effectRef>
-          <a:fontRef idx="minor">
-            <a:schemeClr val="lt1"/>
-          </a:fontRef>
-        </p:style>
-        <p:txBody>
-          <a:bodyPr rtlCol="0" anchor="ctr"/>
-          <a:lstStyle/>
-          <a:p/>
-        </p:txBody>
-      </p:sp>
-      <p:sp>
-        <p:nvSpPr>
-          <p:cNvPr id="13" name="Rounded Rectangle 12"/>
-          <p:cNvSpPr/>
-          <p:nvPr/>
-        </p:nvSpPr>
-        <p:spPr>
-          <a:xfrm>
-            <a:off x="841247" y="2924556"/>
-            <a:ext cx="365760" cy="365760"/>
-          </a:xfrm>
-          <a:prstGeom prst="roundRect">
-            <a:avLst>
-              <a:gd name="adj" fmla="val 32500"/>
-            </a:avLst>
-          </a:prstGeom>
-          <a:solidFill>
-            <a:srgbClr val="FBEEDC"/>
-          </a:solidFill>
-          <a:ln>
-            <a:noFill/>
-          </a:ln>
-          <a:effectLst/>
-        </p:spPr>
-        <p:style>
-          <a:lnRef idx="1">
-            <a:schemeClr val="accent1"/>
-          </a:lnRef>
-          <a:fillRef idx="3">
-            <a:schemeClr val="accent1"/>
-          </a:fillRef>
-          <a:effectRef idx="2">
-            <a:schemeClr val="accent1"/>
-          </a:effectRef>
-          <a:fontRef idx="minor">
-            <a:schemeClr val="lt1"/>
-          </a:fontRef>
-        </p:style>
-        <p:txBody>
-          <a:bodyPr rtlCol="0" anchor="ctr"/>
-          <a:lstStyle/>
-          <a:p/>
-        </p:txBody>
-      </p:sp>
-      <p:sp>
-        <p:nvSpPr>
-          <p:cNvPr id="14" name="TextBox 13"/>
+              <a:t>Aucune modification n'est apportée aux quotas de production pendant l'essai. Toute question peut m'être adressée directement ou par l'entremise de votre chef d'équipe.</a:t>
+            </a:r>
+          </a:p>
+        </p:txBody>
+      </p:sp>
+      <p:sp>
+        <p:nvSpPr>
+          <p:cNvPr id="10" name="TextBox 9"/>
           <p:cNvSpPr txBox="1"/>
           <p:nvPr/>
         </p:nvSpPr>
         <p:spPr>
           <a:xfrm>
-            <a:off x="841247" y="2988564"/>
-            <a:ext cx="365760" cy="256032"/>
+            <a:off x="978408" y="3979926"/>
+            <a:ext cx="10234879" cy="699516"/>
           </a:xfrm>
           <a:prstGeom prst="rect">
             <a:avLst/>
@@ -11587,775 +12780,19 @@
           </a:bodyPr>
           <a:lstStyle/>
           <a:p>
-            <a:pPr algn="ctr">
+            <a:pPr algn="l">
               <a:lnSpc>
-                <a:spcPct val="135000"/>
+                <a:spcPct val="145000"/>
               </a:lnSpc>
             </a:pPr>
             <a:r>
-              <a:rPr sz="1500" b="1" i="0">
-                <a:solidFill>
-                  <a:srgbClr val="B45309"/>
-                </a:solidFill>
-                <a:latin typeface="Verdana"/>
-              </a:rPr>
-              <a:t>2</a:t>
-            </a:r>
-          </a:p>
-        </p:txBody>
-      </p:sp>
-      <p:sp>
-        <p:nvSpPr>
-          <p:cNvPr id="15" name="TextBox 14"/>
-          <p:cNvSpPr txBox="1"/>
-          <p:nvPr/>
-        </p:nvSpPr>
-        <p:spPr>
-          <a:xfrm>
-            <a:off x="1344168" y="2982975"/>
-            <a:ext cx="10097719" cy="285496"/>
-          </a:xfrm>
-          <a:prstGeom prst="rect">
-            <a:avLst/>
-          </a:prstGeom>
-          <a:noFill/>
-        </p:spPr>
-        <p:txBody>
-          <a:bodyPr wrap="square" lIns="0" rIns="0" tIns="0" bIns="0" anchor="t">
-            <a:spAutoFit/>
-          </a:bodyPr>
-          <a:lstStyle/>
-          <a:p>
-            <a:pPr algn="l">
-              <a:lnSpc>
-                <a:spcPct val="140000"/>
-              </a:lnSpc>
-            </a:pPr>
-            <a:r>
-              <a:rPr sz="1400" b="0" i="0">
+              <a:rPr sz="1800" b="0" i="0">
                 <a:solidFill>
                   <a:srgbClr val="3A3D40"/>
                 </a:solidFill>
                 <a:latin typeface="Verdana"/>
               </a:rPr>
-              <a:t>Quel est l'objet ?   </a:t>
-            </a:r>
-            <a:r>
-              <a:rPr sz="1400" b="1" i="0">
-                <a:solidFill>
-                  <a:srgbClr val="07734A"/>
-                </a:solidFill>
-                <a:latin typeface="Verdana"/>
-              </a:rPr>
-              <a:t>» rotation des tâches au poste 4, à l'essai</a:t>
-            </a:r>
-          </a:p>
-        </p:txBody>
-      </p:sp>
-      <p:sp>
-        <p:nvSpPr>
-          <p:cNvPr id="16" name="Rounded Rectangle 15"/>
-          <p:cNvSpPr/>
-          <p:nvPr/>
-        </p:nvSpPr>
-        <p:spPr>
-          <a:xfrm>
-            <a:off x="566928" y="3515359"/>
-            <a:ext cx="11057839" cy="559816"/>
-          </a:xfrm>
-          <a:prstGeom prst="roundRect">
-            <a:avLst>
-              <a:gd name="adj" fmla="val 26134"/>
-            </a:avLst>
-          </a:prstGeom>
-          <a:solidFill>
-            <a:srgbClr val="E6F5EE"/>
-          </a:solidFill>
-          <a:ln w="12700">
-            <a:solidFill>
-              <a:srgbClr val="EAEAE8"/>
-            </a:solidFill>
-          </a:ln>
-          <a:effectLst/>
-        </p:spPr>
-        <p:style>
-          <a:lnRef idx="1">
-            <a:schemeClr val="accent1"/>
-          </a:lnRef>
-          <a:fillRef idx="3">
-            <a:schemeClr val="accent1"/>
-          </a:fillRef>
-          <a:effectRef idx="2">
-            <a:schemeClr val="accent1"/>
-          </a:effectRef>
-          <a:fontRef idx="minor">
-            <a:schemeClr val="lt1"/>
-          </a:fontRef>
-        </p:style>
-        <p:txBody>
-          <a:bodyPr rtlCol="0" anchor="ctr"/>
-          <a:lstStyle/>
-          <a:p/>
-        </p:txBody>
-      </p:sp>
-      <p:sp>
-        <p:nvSpPr>
-          <p:cNvPr id="17" name="Rounded Rectangle 16"/>
-          <p:cNvSpPr/>
-          <p:nvPr/>
-        </p:nvSpPr>
-        <p:spPr>
-          <a:xfrm>
-            <a:off x="841247" y="3612388"/>
-            <a:ext cx="365760" cy="365760"/>
-          </a:xfrm>
-          <a:prstGeom prst="roundRect">
-            <a:avLst>
-              <a:gd name="adj" fmla="val 32500"/>
-            </a:avLst>
-          </a:prstGeom>
-          <a:solidFill>
-            <a:srgbClr val="FBEEDC"/>
-          </a:solidFill>
-          <a:ln>
-            <a:noFill/>
-          </a:ln>
-          <a:effectLst/>
-        </p:spPr>
-        <p:style>
-          <a:lnRef idx="1">
-            <a:schemeClr val="accent1"/>
-          </a:lnRef>
-          <a:fillRef idx="3">
-            <a:schemeClr val="accent1"/>
-          </a:fillRef>
-          <a:effectRef idx="2">
-            <a:schemeClr val="accent1"/>
-          </a:effectRef>
-          <a:fontRef idx="minor">
-            <a:schemeClr val="lt1"/>
-          </a:fontRef>
-        </p:style>
-        <p:txBody>
-          <a:bodyPr rtlCol="0" anchor="ctr"/>
-          <a:lstStyle/>
-          <a:p/>
-        </p:txBody>
-      </p:sp>
-      <p:sp>
-        <p:nvSpPr>
-          <p:cNvPr id="18" name="TextBox 17"/>
-          <p:cNvSpPr txBox="1"/>
-          <p:nvPr/>
-        </p:nvSpPr>
-        <p:spPr>
-          <a:xfrm>
-            <a:off x="841247" y="3676395"/>
-            <a:ext cx="365760" cy="256032"/>
-          </a:xfrm>
-          <a:prstGeom prst="rect">
-            <a:avLst/>
-          </a:prstGeom>
-          <a:noFill/>
-        </p:spPr>
-        <p:txBody>
-          <a:bodyPr wrap="square" lIns="0" rIns="0" tIns="0" bIns="0" anchor="t">
-            <a:spAutoFit/>
-          </a:bodyPr>
-          <a:lstStyle/>
-          <a:p>
-            <a:pPr algn="ctr">
-              <a:lnSpc>
-                <a:spcPct val="135000"/>
-              </a:lnSpc>
-            </a:pPr>
-            <a:r>
-              <a:rPr sz="1500" b="1" i="0">
-                <a:solidFill>
-                  <a:srgbClr val="B45309"/>
-                </a:solidFill>
-                <a:latin typeface="Verdana"/>
-              </a:rPr>
-              <a:t>3</a:t>
-            </a:r>
-          </a:p>
-        </p:txBody>
-      </p:sp>
-      <p:sp>
-        <p:nvSpPr>
-          <p:cNvPr id="19" name="TextBox 18"/>
-          <p:cNvSpPr txBox="1"/>
-          <p:nvPr/>
-        </p:nvSpPr>
-        <p:spPr>
-          <a:xfrm>
-            <a:off x="1344168" y="3670807"/>
-            <a:ext cx="10097719" cy="285496"/>
-          </a:xfrm>
-          <a:prstGeom prst="rect">
-            <a:avLst/>
-          </a:prstGeom>
-          <a:noFill/>
-        </p:spPr>
-        <p:txBody>
-          <a:bodyPr wrap="square" lIns="0" rIns="0" tIns="0" bIns="0" anchor="t">
-            <a:spAutoFit/>
-          </a:bodyPr>
-          <a:lstStyle/>
-          <a:p>
-            <a:pPr algn="l">
-              <a:lnSpc>
-                <a:spcPct val="140000"/>
-              </a:lnSpc>
-            </a:pPr>
-            <a:r>
-              <a:rPr sz="1400" b="0" i="0">
-                <a:solidFill>
-                  <a:srgbClr val="3A3D40"/>
-                </a:solidFill>
-                <a:latin typeface="Verdana"/>
-              </a:rPr>
-              <a:t>Qu'est-ce qui change, et à partir de quand ?   </a:t>
-            </a:r>
-            <a:r>
-              <a:rPr sz="1400" b="1" i="0">
-                <a:solidFill>
-                  <a:srgbClr val="07734A"/>
-                </a:solidFill>
-                <a:latin typeface="Verdana"/>
-              </a:rPr>
-              <a:t>» l'alternance, à compter du lundi 22 septembre</a:t>
-            </a:r>
-          </a:p>
-        </p:txBody>
-      </p:sp>
-      <p:sp>
-        <p:nvSpPr>
-          <p:cNvPr id="20" name="Rounded Rectangle 19"/>
-          <p:cNvSpPr/>
-          <p:nvPr/>
-        </p:nvSpPr>
-        <p:spPr>
-          <a:xfrm>
-            <a:off x="566928" y="4203192"/>
-            <a:ext cx="11057839" cy="559816"/>
-          </a:xfrm>
-          <a:prstGeom prst="roundRect">
-            <a:avLst>
-              <a:gd name="adj" fmla="val 26134"/>
-            </a:avLst>
-          </a:prstGeom>
-          <a:solidFill>
-            <a:srgbClr val="E6F5EE"/>
-          </a:solidFill>
-          <a:ln w="12700">
-            <a:solidFill>
-              <a:srgbClr val="EAEAE8"/>
-            </a:solidFill>
-          </a:ln>
-          <a:effectLst/>
-        </p:spPr>
-        <p:style>
-          <a:lnRef idx="1">
-            <a:schemeClr val="accent1"/>
-          </a:lnRef>
-          <a:fillRef idx="3">
-            <a:schemeClr val="accent1"/>
-          </a:fillRef>
-          <a:effectRef idx="2">
-            <a:schemeClr val="accent1"/>
-          </a:effectRef>
-          <a:fontRef idx="minor">
-            <a:schemeClr val="lt1"/>
-          </a:fontRef>
-        </p:style>
-        <p:txBody>
-          <a:bodyPr rtlCol="0" anchor="ctr"/>
-          <a:lstStyle/>
-          <a:p/>
-        </p:txBody>
-      </p:sp>
-      <p:sp>
-        <p:nvSpPr>
-          <p:cNvPr id="21" name="Rounded Rectangle 20"/>
-          <p:cNvSpPr/>
-          <p:nvPr/>
-        </p:nvSpPr>
-        <p:spPr>
-          <a:xfrm>
-            <a:off x="841247" y="4300220"/>
-            <a:ext cx="365760" cy="365760"/>
-          </a:xfrm>
-          <a:prstGeom prst="roundRect">
-            <a:avLst>
-              <a:gd name="adj" fmla="val 32500"/>
-            </a:avLst>
-          </a:prstGeom>
-          <a:solidFill>
-            <a:srgbClr val="FBEEDC"/>
-          </a:solidFill>
-          <a:ln>
-            <a:noFill/>
-          </a:ln>
-          <a:effectLst/>
-        </p:spPr>
-        <p:style>
-          <a:lnRef idx="1">
-            <a:schemeClr val="accent1"/>
-          </a:lnRef>
-          <a:fillRef idx="3">
-            <a:schemeClr val="accent1"/>
-          </a:fillRef>
-          <a:effectRef idx="2">
-            <a:schemeClr val="accent1"/>
-          </a:effectRef>
-          <a:fontRef idx="minor">
-            <a:schemeClr val="lt1"/>
-          </a:fontRef>
-        </p:style>
-        <p:txBody>
-          <a:bodyPr rtlCol="0" anchor="ctr"/>
-          <a:lstStyle/>
-          <a:p/>
-        </p:txBody>
-      </p:sp>
-      <p:sp>
-        <p:nvSpPr>
-          <p:cNvPr id="22" name="TextBox 21"/>
-          <p:cNvSpPr txBox="1"/>
-          <p:nvPr/>
-        </p:nvSpPr>
-        <p:spPr>
-          <a:xfrm>
-            <a:off x="841247" y="4364228"/>
-            <a:ext cx="365760" cy="256032"/>
-          </a:xfrm>
-          <a:prstGeom prst="rect">
-            <a:avLst/>
-          </a:prstGeom>
-          <a:noFill/>
-        </p:spPr>
-        <p:txBody>
-          <a:bodyPr wrap="square" lIns="0" rIns="0" tIns="0" bIns="0" anchor="t">
-            <a:spAutoFit/>
-          </a:bodyPr>
-          <a:lstStyle/>
-          <a:p>
-            <a:pPr algn="ctr">
-              <a:lnSpc>
-                <a:spcPct val="135000"/>
-              </a:lnSpc>
-            </a:pPr>
-            <a:r>
-              <a:rPr sz="1500" b="1" i="0">
-                <a:solidFill>
-                  <a:srgbClr val="B45309"/>
-                </a:solidFill>
-                <a:latin typeface="Verdana"/>
-              </a:rPr>
-              <a:t>4</a:t>
-            </a:r>
-          </a:p>
-        </p:txBody>
-      </p:sp>
-      <p:sp>
-        <p:nvSpPr>
-          <p:cNvPr id="23" name="TextBox 22"/>
-          <p:cNvSpPr txBox="1"/>
-          <p:nvPr/>
-        </p:nvSpPr>
-        <p:spPr>
-          <a:xfrm>
-            <a:off x="1344168" y="4358640"/>
-            <a:ext cx="10097719" cy="285496"/>
-          </a:xfrm>
-          <a:prstGeom prst="rect">
-            <a:avLst/>
-          </a:prstGeom>
-          <a:noFill/>
-        </p:spPr>
-        <p:txBody>
-          <a:bodyPr wrap="square" lIns="0" rIns="0" tIns="0" bIns="0" anchor="t">
-            <a:spAutoFit/>
-          </a:bodyPr>
-          <a:lstStyle/>
-          <a:p>
-            <a:pPr algn="l">
-              <a:lnSpc>
-                <a:spcPct val="140000"/>
-              </a:lnSpc>
-            </a:pPr>
-            <a:r>
-              <a:rPr sz="1400" b="0" i="0">
-                <a:solidFill>
-                  <a:srgbClr val="3A3D40"/>
-                </a:solidFill>
-                <a:latin typeface="Verdana"/>
-              </a:rPr>
-              <a:t>Combien de temps dure l'essai ?   </a:t>
-            </a:r>
-            <a:r>
-              <a:rPr sz="1400" b="1" i="0">
-                <a:solidFill>
-                  <a:srgbClr val="07734A"/>
-                </a:solidFill>
-                <a:latin typeface="Verdana"/>
-              </a:rPr>
-              <a:t>» quatre semaines</a:t>
-            </a:r>
-          </a:p>
-        </p:txBody>
-      </p:sp>
-      <p:sp>
-        <p:nvSpPr>
-          <p:cNvPr id="24" name="Rounded Rectangle 23"/>
-          <p:cNvSpPr/>
-          <p:nvPr/>
-        </p:nvSpPr>
-        <p:spPr>
-          <a:xfrm>
-            <a:off x="566928" y="4891023"/>
-            <a:ext cx="11057839" cy="559816"/>
-          </a:xfrm>
-          <a:prstGeom prst="roundRect">
-            <a:avLst>
-              <a:gd name="adj" fmla="val 26134"/>
-            </a:avLst>
-          </a:prstGeom>
-          <a:solidFill>
-            <a:srgbClr val="E6F5EE"/>
-          </a:solidFill>
-          <a:ln w="12700">
-            <a:solidFill>
-              <a:srgbClr val="EAEAE8"/>
-            </a:solidFill>
-          </a:ln>
-          <a:effectLst/>
-        </p:spPr>
-        <p:style>
-          <a:lnRef idx="1">
-            <a:schemeClr val="accent1"/>
-          </a:lnRef>
-          <a:fillRef idx="3">
-            <a:schemeClr val="accent1"/>
-          </a:fillRef>
-          <a:effectRef idx="2">
-            <a:schemeClr val="accent1"/>
-          </a:effectRef>
-          <a:fontRef idx="minor">
-            <a:schemeClr val="lt1"/>
-          </a:fontRef>
-        </p:style>
-        <p:txBody>
-          <a:bodyPr rtlCol="0" anchor="ctr"/>
-          <a:lstStyle/>
-          <a:p/>
-        </p:txBody>
-      </p:sp>
-      <p:sp>
-        <p:nvSpPr>
-          <p:cNvPr id="25" name="Rounded Rectangle 24"/>
-          <p:cNvSpPr/>
-          <p:nvPr/>
-        </p:nvSpPr>
-        <p:spPr>
-          <a:xfrm>
-            <a:off x="841247" y="4988051"/>
-            <a:ext cx="365760" cy="365760"/>
-          </a:xfrm>
-          <a:prstGeom prst="roundRect">
-            <a:avLst>
-              <a:gd name="adj" fmla="val 32500"/>
-            </a:avLst>
-          </a:prstGeom>
-          <a:solidFill>
-            <a:srgbClr val="FBEEDC"/>
-          </a:solidFill>
-          <a:ln>
-            <a:noFill/>
-          </a:ln>
-          <a:effectLst/>
-        </p:spPr>
-        <p:style>
-          <a:lnRef idx="1">
-            <a:schemeClr val="accent1"/>
-          </a:lnRef>
-          <a:fillRef idx="3">
-            <a:schemeClr val="accent1"/>
-          </a:fillRef>
-          <a:effectRef idx="2">
-            <a:schemeClr val="accent1"/>
-          </a:effectRef>
-          <a:fontRef idx="minor">
-            <a:schemeClr val="lt1"/>
-          </a:fontRef>
-        </p:style>
-        <p:txBody>
-          <a:bodyPr rtlCol="0" anchor="ctr"/>
-          <a:lstStyle/>
-          <a:p/>
-        </p:txBody>
-      </p:sp>
-      <p:sp>
-        <p:nvSpPr>
-          <p:cNvPr id="26" name="TextBox 25"/>
-          <p:cNvSpPr txBox="1"/>
-          <p:nvPr/>
-        </p:nvSpPr>
-        <p:spPr>
-          <a:xfrm>
-            <a:off x="841247" y="5052059"/>
-            <a:ext cx="365760" cy="256032"/>
-          </a:xfrm>
-          <a:prstGeom prst="rect">
-            <a:avLst/>
-          </a:prstGeom>
-          <a:noFill/>
-        </p:spPr>
-        <p:txBody>
-          <a:bodyPr wrap="square" lIns="0" rIns="0" tIns="0" bIns="0" anchor="t">
-            <a:spAutoFit/>
-          </a:bodyPr>
-          <a:lstStyle/>
-          <a:p>
-            <a:pPr algn="ctr">
-              <a:lnSpc>
-                <a:spcPct val="135000"/>
-              </a:lnSpc>
-            </a:pPr>
-            <a:r>
-              <a:rPr sz="1500" b="1" i="0">
-                <a:solidFill>
-                  <a:srgbClr val="B45309"/>
-                </a:solidFill>
-                <a:latin typeface="Verdana"/>
-              </a:rPr>
-              <a:t>5</a:t>
-            </a:r>
-          </a:p>
-        </p:txBody>
-      </p:sp>
-      <p:sp>
-        <p:nvSpPr>
-          <p:cNvPr id="27" name="TextBox 26"/>
-          <p:cNvSpPr txBox="1"/>
-          <p:nvPr/>
-        </p:nvSpPr>
-        <p:spPr>
-          <a:xfrm>
-            <a:off x="1344168" y="5046471"/>
-            <a:ext cx="10097719" cy="285496"/>
-          </a:xfrm>
-          <a:prstGeom prst="rect">
-            <a:avLst/>
-          </a:prstGeom>
-          <a:noFill/>
-        </p:spPr>
-        <p:txBody>
-          <a:bodyPr wrap="square" lIns="0" rIns="0" tIns="0" bIns="0" anchor="t">
-            <a:spAutoFit/>
-          </a:bodyPr>
-          <a:lstStyle/>
-          <a:p>
-            <a:pPr algn="l">
-              <a:lnSpc>
-                <a:spcPct val="140000"/>
-              </a:lnSpc>
-            </a:pPr>
-            <a:r>
-              <a:rPr sz="1400" b="0" i="0">
-                <a:solidFill>
-                  <a:srgbClr val="3A3D40"/>
-                </a:solidFill>
-                <a:latin typeface="Verdana"/>
-              </a:rPr>
-              <a:t>Qu'est-ce qu'on demande au lecteur de faire ?   </a:t>
-            </a:r>
-            <a:r>
-              <a:rPr sz="1400" b="1" i="0">
-                <a:solidFill>
-                  <a:srgbClr val="07734A"/>
-                </a:solidFill>
-                <a:latin typeface="Verdana"/>
-              </a:rPr>
-              <a:t>» noter l'heure de chaque changement</a:t>
-            </a:r>
-          </a:p>
-        </p:txBody>
-      </p:sp>
-      <p:sp>
-        <p:nvSpPr>
-          <p:cNvPr id="28" name="Rounded Rectangle 27"/>
-          <p:cNvSpPr/>
-          <p:nvPr/>
-        </p:nvSpPr>
-        <p:spPr>
-          <a:xfrm>
-            <a:off x="566928" y="5578856"/>
-            <a:ext cx="11057839" cy="559816"/>
-          </a:xfrm>
-          <a:prstGeom prst="roundRect">
-            <a:avLst>
-              <a:gd name="adj" fmla="val 26134"/>
-            </a:avLst>
-          </a:prstGeom>
-          <a:solidFill>
-            <a:srgbClr val="E6F5EE"/>
-          </a:solidFill>
-          <a:ln w="12700">
-            <a:solidFill>
-              <a:srgbClr val="EAEAE8"/>
-            </a:solidFill>
-          </a:ln>
-          <a:effectLst/>
-        </p:spPr>
-        <p:style>
-          <a:lnRef idx="1">
-            <a:schemeClr val="accent1"/>
-          </a:lnRef>
-          <a:fillRef idx="3">
-            <a:schemeClr val="accent1"/>
-          </a:fillRef>
-          <a:effectRef idx="2">
-            <a:schemeClr val="accent1"/>
-          </a:effectRef>
-          <a:fontRef idx="minor">
-            <a:schemeClr val="lt1"/>
-          </a:fontRef>
-        </p:style>
-        <p:txBody>
-          <a:bodyPr rtlCol="0" anchor="ctr"/>
-          <a:lstStyle/>
-          <a:p/>
-        </p:txBody>
-      </p:sp>
-      <p:sp>
-        <p:nvSpPr>
-          <p:cNvPr id="29" name="Rounded Rectangle 28"/>
-          <p:cNvSpPr/>
-          <p:nvPr/>
-        </p:nvSpPr>
-        <p:spPr>
-          <a:xfrm>
-            <a:off x="841247" y="5675884"/>
-            <a:ext cx="365760" cy="365760"/>
-          </a:xfrm>
-          <a:prstGeom prst="roundRect">
-            <a:avLst>
-              <a:gd name="adj" fmla="val 32500"/>
-            </a:avLst>
-          </a:prstGeom>
-          <a:solidFill>
-            <a:srgbClr val="FBEEDC"/>
-          </a:solidFill>
-          <a:ln>
-            <a:noFill/>
-          </a:ln>
-          <a:effectLst/>
-        </p:spPr>
-        <p:style>
-          <a:lnRef idx="1">
-            <a:schemeClr val="accent1"/>
-          </a:lnRef>
-          <a:fillRef idx="3">
-            <a:schemeClr val="accent1"/>
-          </a:fillRef>
-          <a:effectRef idx="2">
-            <a:schemeClr val="accent1"/>
-          </a:effectRef>
-          <a:fontRef idx="minor">
-            <a:schemeClr val="lt1"/>
-          </a:fontRef>
-        </p:style>
-        <p:txBody>
-          <a:bodyPr rtlCol="0" anchor="ctr"/>
-          <a:lstStyle/>
-          <a:p/>
-        </p:txBody>
-      </p:sp>
-      <p:sp>
-        <p:nvSpPr>
-          <p:cNvPr id="30" name="TextBox 29"/>
-          <p:cNvSpPr txBox="1"/>
-          <p:nvPr/>
-        </p:nvSpPr>
-        <p:spPr>
-          <a:xfrm>
-            <a:off x="841247" y="5739892"/>
-            <a:ext cx="365760" cy="256032"/>
-          </a:xfrm>
-          <a:prstGeom prst="rect">
-            <a:avLst/>
-          </a:prstGeom>
-          <a:noFill/>
-        </p:spPr>
-        <p:txBody>
-          <a:bodyPr wrap="square" lIns="0" rIns="0" tIns="0" bIns="0" anchor="t">
-            <a:spAutoFit/>
-          </a:bodyPr>
-          <a:lstStyle/>
-          <a:p>
-            <a:pPr algn="ctr">
-              <a:lnSpc>
-                <a:spcPct val="135000"/>
-              </a:lnSpc>
-            </a:pPr>
-            <a:r>
-              <a:rPr sz="1500" b="1" i="0">
-                <a:solidFill>
-                  <a:srgbClr val="B45309"/>
-                </a:solidFill>
-                <a:latin typeface="Verdana"/>
-              </a:rPr>
-              <a:t>6</a:t>
-            </a:r>
-          </a:p>
-        </p:txBody>
-      </p:sp>
-      <p:sp>
-        <p:nvSpPr>
-          <p:cNvPr id="31" name="TextBox 30"/>
-          <p:cNvSpPr txBox="1"/>
-          <p:nvPr/>
-        </p:nvSpPr>
-        <p:spPr>
-          <a:xfrm>
-            <a:off x="1344168" y="5734304"/>
-            <a:ext cx="10097719" cy="285496"/>
-          </a:xfrm>
-          <a:prstGeom prst="rect">
-            <a:avLst/>
-          </a:prstGeom>
-          <a:noFill/>
-        </p:spPr>
-        <p:txBody>
-          <a:bodyPr wrap="square" lIns="0" rIns="0" tIns="0" bIns="0" anchor="t">
-            <a:spAutoFit/>
-          </a:bodyPr>
-          <a:lstStyle/>
-          <a:p>
-            <a:pPr algn="l">
-              <a:lnSpc>
-                <a:spcPct val="140000"/>
-              </a:lnSpc>
-            </a:pPr>
-            <a:r>
-              <a:rPr sz="1400" b="0" i="0">
-                <a:solidFill>
-                  <a:srgbClr val="3A3D40"/>
-                </a:solidFill>
-                <a:latin typeface="Verdana"/>
-              </a:rPr>
-              <a:t>Qu'est-ce qui ne change pas pendant l'essai ?   </a:t>
-            </a:r>
-            <a:r>
-              <a:rPr sz="1400" b="1" i="0">
-                <a:solidFill>
-                  <a:srgbClr val="07734A"/>
-                </a:solidFill>
-                <a:latin typeface="Verdana"/>
-              </a:rPr>
-              <a:t>» les quotas de production</a:t>
+              <a:t>Aïcha Traoré, coordonnatrice adjointe à l'expédition. c. c. R. Cormier, chef de production ; T. Lapointe, représentante en santé et en sécurité.</a:t>
             </a:r>
           </a:p>
         </p:txBody>
@@ -12532,7 +12969,7 @@
                 </a:solidFill>
                 <a:latin typeface="Verdana"/>
               </a:rPr>
-              <a:t>ANALYSE</a:t>
+              <a:t>COMPRÉHENSION</a:t>
             </a:r>
           </a:p>
         </p:txBody>
@@ -12571,25 +13008,64 @@
                 </a:solidFill>
                 <a:latin typeface="Verdana"/>
               </a:rPr>
-              <a:t>Note de service ou lettre d'affaires ?</a:t>
-            </a:r>
-          </a:p>
-        </p:txBody>
-      </p:sp>
-      <p:sp>
-        <p:nvSpPr>
-          <p:cNvPr id="7" name="Rounded Rectangle 6"/>
+              <a:t>Ce que la note demande</a:t>
+            </a:r>
+          </a:p>
+        </p:txBody>
+      </p:sp>
+      <p:sp>
+        <p:nvSpPr>
+          <p:cNvPr id="7" name="TextBox 6"/>
+          <p:cNvSpPr txBox="1"/>
+          <p:nvPr/>
+        </p:nvSpPr>
+        <p:spPr>
+          <a:xfrm>
+            <a:off x="566928" y="1645920"/>
+            <a:ext cx="11057839" cy="329184"/>
+          </a:xfrm>
+          <a:prstGeom prst="rect">
+            <a:avLst/>
+          </a:prstGeom>
+          <a:noFill/>
+        </p:spPr>
+        <p:txBody>
+          <a:bodyPr wrap="square" lIns="0" rIns="0" tIns="0" bIns="0" anchor="t">
+            <a:spAutoFit/>
+          </a:bodyPr>
+          <a:lstStyle/>
+          <a:p>
+            <a:pPr algn="l">
+              <a:lnSpc>
+                <a:spcPct val="135000"/>
+              </a:lnSpc>
+            </a:pPr>
+            <a:r>
+              <a:rPr sz="1800" b="0" i="0">
+                <a:solidFill>
+                  <a:srgbClr val="6E7175"/>
+                </a:solidFill>
+                <a:latin typeface="Verdana"/>
+              </a:rPr>
+              <a:t>Répondez d'après la note de service ci-dessus.</a:t>
+            </a:r>
+          </a:p>
+        </p:txBody>
+      </p:sp>
+      <p:sp>
+        <p:nvSpPr>
+          <p:cNvPr id="8" name="Rounded Rectangle 7"/>
           <p:cNvSpPr/>
           <p:nvPr/>
         </p:nvSpPr>
         <p:spPr>
           <a:xfrm>
-            <a:off x="566928" y="1810512"/>
-            <a:ext cx="11057839" cy="3002280"/>
+            <a:off x="566928" y="2139696"/>
+            <a:ext cx="11057839" cy="559816"/>
           </a:xfrm>
           <a:prstGeom prst="roundRect">
             <a:avLst>
-              <a:gd name="adj" fmla="val 4873"/>
+              <a:gd name="adj" fmla="val 26134"/>
             </a:avLst>
           </a:prstGeom>
           <a:solidFill>
@@ -12624,176 +13100,22 @@
       </p:sp>
       <p:sp>
         <p:nvSpPr>
-          <p:cNvPr id="8" name="TextBox 7"/>
-          <p:cNvSpPr txBox="1"/>
-          <p:nvPr/>
-        </p:nvSpPr>
-        <p:spPr>
-          <a:xfrm>
-            <a:off x="932688" y="1975104"/>
-            <a:ext cx="3291492" cy="237744"/>
-          </a:xfrm>
-          <a:prstGeom prst="rect">
-            <a:avLst/>
-          </a:prstGeom>
-          <a:noFill/>
-        </p:spPr>
-        <p:txBody>
-          <a:bodyPr wrap="square" lIns="0" rIns="0" tIns="0" bIns="0" anchor="t">
-            <a:spAutoFit/>
-          </a:bodyPr>
-          <a:lstStyle/>
-          <a:p>
-            <a:pPr algn="l">
-              <a:lnSpc>
-                <a:spcPct val="135000"/>
-              </a:lnSpc>
-            </a:pPr>
-            <a:r>
-              <a:rPr sz="1300" b="1" i="0" spc="156">
-                <a:solidFill>
-                  <a:srgbClr val="6E7175"/>
-                </a:solidFill>
-                <a:latin typeface="Verdana"/>
-              </a:rPr>
-              <a:t>L'ÉLÉMENT</a:t>
-            </a:r>
-          </a:p>
-        </p:txBody>
-      </p:sp>
-      <p:sp>
-        <p:nvSpPr>
-          <p:cNvPr id="9" name="TextBox 8"/>
-          <p:cNvSpPr txBox="1"/>
-          <p:nvPr/>
-        </p:nvSpPr>
-        <p:spPr>
-          <a:xfrm>
-            <a:off x="4443636" y="1975104"/>
-            <a:ext cx="6595914" cy="237744"/>
-          </a:xfrm>
-          <a:prstGeom prst="rect">
-            <a:avLst/>
-          </a:prstGeom>
-          <a:noFill/>
-        </p:spPr>
-        <p:txBody>
-          <a:bodyPr wrap="square" lIns="0" rIns="0" tIns="0" bIns="0" anchor="t">
-            <a:spAutoFit/>
-          </a:bodyPr>
-          <a:lstStyle/>
-          <a:p>
-            <a:pPr algn="l">
-              <a:lnSpc>
-                <a:spcPct val="135000"/>
-              </a:lnSpc>
-            </a:pPr>
-            <a:r>
-              <a:rPr sz="1300" b="1" i="0" spc="156">
-                <a:solidFill>
-                  <a:srgbClr val="6E7175"/>
-                </a:solidFill>
-                <a:latin typeface="Verdana"/>
-              </a:rPr>
-              <a:t>OÙ IL VA</a:t>
-            </a:r>
-          </a:p>
-        </p:txBody>
-      </p:sp>
-      <p:sp>
-        <p:nvSpPr>
-          <p:cNvPr id="10" name="TextBox 9"/>
-          <p:cNvSpPr txBox="1"/>
-          <p:nvPr/>
-        </p:nvSpPr>
-        <p:spPr>
-          <a:xfrm>
-            <a:off x="932688" y="2395728"/>
-            <a:ext cx="3291492" cy="271271"/>
-          </a:xfrm>
-          <a:prstGeom prst="rect">
-            <a:avLst/>
-          </a:prstGeom>
-          <a:noFill/>
-        </p:spPr>
-        <p:txBody>
-          <a:bodyPr wrap="square" lIns="0" rIns="0" tIns="0" bIns="0" anchor="t">
-            <a:spAutoFit/>
-          </a:bodyPr>
-          <a:lstStyle/>
-          <a:p>
-            <a:pPr algn="l">
-              <a:lnSpc>
-                <a:spcPct val="132000"/>
-              </a:lnSpc>
-            </a:pPr>
-            <a:r>
-              <a:rPr sz="1400" b="1" i="0">
-                <a:solidFill>
-                  <a:srgbClr val="B45309"/>
-                </a:solidFill>
-                <a:latin typeface="Verdana"/>
-              </a:rPr>
-              <a:t>DESTINATAIRE et EXPÉDITEUR</a:t>
-            </a:r>
-          </a:p>
-        </p:txBody>
-      </p:sp>
-      <p:sp>
-        <p:nvSpPr>
-          <p:cNvPr id="11" name="TextBox 10"/>
-          <p:cNvSpPr txBox="1"/>
-          <p:nvPr/>
-        </p:nvSpPr>
-        <p:spPr>
-          <a:xfrm>
-            <a:off x="4443636" y="2395728"/>
-            <a:ext cx="6595914" cy="271271"/>
-          </a:xfrm>
-          <a:prstGeom prst="rect">
-            <a:avLst/>
-          </a:prstGeom>
-          <a:noFill/>
-        </p:spPr>
-        <p:txBody>
-          <a:bodyPr wrap="square" lIns="0" rIns="0" tIns="0" bIns="0" anchor="t">
-            <a:spAutoFit/>
-          </a:bodyPr>
-          <a:lstStyle/>
-          <a:p>
-            <a:pPr algn="l">
-              <a:lnSpc>
-                <a:spcPct val="132000"/>
-              </a:lnSpc>
-            </a:pPr>
-            <a:r>
-              <a:rPr sz="1400" b="0" i="0">
-                <a:solidFill>
-                  <a:srgbClr val="3A3D40"/>
-                </a:solidFill>
-                <a:latin typeface="Verdana"/>
-              </a:rPr>
-              <a:t>la note de service</a:t>
-            </a:r>
-          </a:p>
-        </p:txBody>
-      </p:sp>
-      <p:sp>
-        <p:nvSpPr>
-          <p:cNvPr id="12" name="Rectangle 11"/>
+          <p:cNvPr id="9" name="Rounded Rectangle 8"/>
           <p:cNvSpPr/>
           <p:nvPr/>
         </p:nvSpPr>
         <p:spPr>
           <a:xfrm>
-            <a:off x="932688" y="2740152"/>
-            <a:ext cx="10326319" cy="10058"/>
-          </a:xfrm>
-          <a:prstGeom prst="rect">
-            <a:avLst/>
+            <a:off x="841247" y="2236724"/>
+            <a:ext cx="365760" cy="365760"/>
+          </a:xfrm>
+          <a:prstGeom prst="roundRect">
+            <a:avLst>
+              <a:gd name="adj" fmla="val 32500"/>
+            </a:avLst>
           </a:prstGeom>
           <a:solidFill>
-            <a:srgbClr val="EAEAE8"/>
+            <a:srgbClr val="FBEEDC"/>
           </a:solidFill>
           <a:ln>
             <a:noFill/>
@@ -12822,14 +13144,14 @@
       </p:sp>
       <p:sp>
         <p:nvSpPr>
-          <p:cNvPr id="13" name="TextBox 12"/>
+          <p:cNvPr id="10" name="TextBox 9"/>
           <p:cNvSpPr txBox="1"/>
           <p:nvPr/>
         </p:nvSpPr>
         <p:spPr>
           <a:xfrm>
-            <a:off x="932688" y="2868168"/>
-            <a:ext cx="3291492" cy="271271"/>
+            <a:off x="841247" y="2300732"/>
+            <a:ext cx="365760" cy="256032"/>
           </a:xfrm>
           <a:prstGeom prst="rect">
             <a:avLst/>
@@ -12842,33 +13164,33 @@
           </a:bodyPr>
           <a:lstStyle/>
           <a:p>
-            <a:pPr algn="l">
+            <a:pPr algn="ctr">
               <a:lnSpc>
-                <a:spcPct val="132000"/>
+                <a:spcPct val="135000"/>
               </a:lnSpc>
             </a:pPr>
             <a:r>
-              <a:rPr sz="1400" b="1" i="0">
+              <a:rPr sz="1500" b="1" i="0">
                 <a:solidFill>
                   <a:srgbClr val="B45309"/>
                 </a:solidFill>
                 <a:latin typeface="Verdana"/>
               </a:rPr>
-              <a:t>L'adresse du destinataire</a:t>
-            </a:r>
-          </a:p>
-        </p:txBody>
-      </p:sp>
-      <p:sp>
-        <p:nvSpPr>
-          <p:cNvPr id="14" name="TextBox 13"/>
+              <a:t>1</a:t>
+            </a:r>
+          </a:p>
+        </p:txBody>
+      </p:sp>
+      <p:sp>
+        <p:nvSpPr>
+          <p:cNvPr id="11" name="TextBox 10"/>
           <p:cNvSpPr txBox="1"/>
           <p:nvPr/>
         </p:nvSpPr>
         <p:spPr>
           <a:xfrm>
-            <a:off x="4443636" y="2868168"/>
-            <a:ext cx="6595914" cy="271271"/>
+            <a:off x="1344168" y="2295144"/>
+            <a:ext cx="10097719" cy="285496"/>
           </a:xfrm>
           <a:prstGeom prst="rect">
             <a:avLst/>
@@ -12883,7 +13205,7 @@
           <a:p>
             <a:pPr algn="l">
               <a:lnSpc>
-                <a:spcPct val="132000"/>
+                <a:spcPct val="140000"/>
               </a:lnSpc>
             </a:pPr>
             <a:r>
@@ -12893,389 +13215,29 @@
                 </a:solidFill>
                 <a:latin typeface="Verdana"/>
               </a:rPr>
-              <a:t>la lettre d'affaires</a:t>
-            </a:r>
-          </a:p>
-        </p:txBody>
-      </p:sp>
-      <p:sp>
-        <p:nvSpPr>
-          <p:cNvPr id="15" name="Rectangle 14"/>
+              <a:t>À qui la note s'adresse-t-elle ?</a:t>
+            </a:r>
+          </a:p>
+        </p:txBody>
+      </p:sp>
+      <p:sp>
+        <p:nvSpPr>
+          <p:cNvPr id="12" name="Rounded Rectangle 11"/>
           <p:cNvSpPr/>
           <p:nvPr/>
         </p:nvSpPr>
         <p:spPr>
           <a:xfrm>
-            <a:off x="932688" y="3212592"/>
-            <a:ext cx="10326319" cy="10058"/>
-          </a:xfrm>
-          <a:prstGeom prst="rect">
-            <a:avLst/>
-          </a:prstGeom>
-          <a:solidFill>
-            <a:srgbClr val="EAEAE8"/>
-          </a:solidFill>
-          <a:ln>
-            <a:noFill/>
-          </a:ln>
-          <a:effectLst/>
-        </p:spPr>
-        <p:style>
-          <a:lnRef idx="1">
-            <a:schemeClr val="accent1"/>
-          </a:lnRef>
-          <a:fillRef idx="3">
-            <a:schemeClr val="accent1"/>
-          </a:fillRef>
-          <a:effectRef idx="2">
-            <a:schemeClr val="accent1"/>
-          </a:effectRef>
-          <a:fontRef idx="minor">
-            <a:schemeClr val="lt1"/>
-          </a:fontRef>
-        </p:style>
-        <p:txBody>
-          <a:bodyPr rtlCol="0" anchor="ctr"/>
-          <a:lstStyle/>
-          <a:p/>
-        </p:txBody>
-      </p:sp>
-      <p:sp>
-        <p:nvSpPr>
-          <p:cNvPr id="16" name="TextBox 15"/>
-          <p:cNvSpPr txBox="1"/>
-          <p:nvPr/>
-        </p:nvSpPr>
-        <p:spPr>
-          <a:xfrm>
-            <a:off x="932688" y="3340608"/>
-            <a:ext cx="3291492" cy="271271"/>
-          </a:xfrm>
-          <a:prstGeom prst="rect">
-            <a:avLst/>
-          </a:prstGeom>
-          <a:noFill/>
-        </p:spPr>
-        <p:txBody>
-          <a:bodyPr wrap="square" lIns="0" rIns="0" tIns="0" bIns="0" anchor="t">
-            <a:spAutoFit/>
-          </a:bodyPr>
-          <a:lstStyle/>
-          <a:p>
-            <a:pPr algn="l">
-              <a:lnSpc>
-                <a:spcPct val="132000"/>
-              </a:lnSpc>
-            </a:pPr>
-            <a:r>
-              <a:rPr sz="1400" b="1" i="0">
-                <a:solidFill>
-                  <a:srgbClr val="B45309"/>
-                </a:solidFill>
-                <a:latin typeface="Verdana"/>
-              </a:rPr>
-              <a:t>« Monsieur, » seul sur sa ligne</a:t>
-            </a:r>
-          </a:p>
-        </p:txBody>
-      </p:sp>
-      <p:sp>
-        <p:nvSpPr>
-          <p:cNvPr id="17" name="TextBox 16"/>
-          <p:cNvSpPr txBox="1"/>
-          <p:nvPr/>
-        </p:nvSpPr>
-        <p:spPr>
-          <a:xfrm>
-            <a:off x="4443636" y="3340608"/>
-            <a:ext cx="6595914" cy="271271"/>
-          </a:xfrm>
-          <a:prstGeom prst="rect">
-            <a:avLst/>
-          </a:prstGeom>
-          <a:noFill/>
-        </p:spPr>
-        <p:txBody>
-          <a:bodyPr wrap="square" lIns="0" rIns="0" tIns="0" bIns="0" anchor="t">
-            <a:spAutoFit/>
-          </a:bodyPr>
-          <a:lstStyle/>
-          <a:p>
-            <a:pPr algn="l">
-              <a:lnSpc>
-                <a:spcPct val="132000"/>
-              </a:lnSpc>
-            </a:pPr>
-            <a:r>
-              <a:rPr sz="1400" b="0" i="0">
-                <a:solidFill>
-                  <a:srgbClr val="3A3D40"/>
-                </a:solidFill>
-                <a:latin typeface="Verdana"/>
-              </a:rPr>
-              <a:t>la lettre d'affaires</a:t>
-            </a:r>
-          </a:p>
-        </p:txBody>
-      </p:sp>
-      <p:sp>
-        <p:nvSpPr>
-          <p:cNvPr id="18" name="Rectangle 17"/>
-          <p:cNvSpPr/>
-          <p:nvPr/>
-        </p:nvSpPr>
-        <p:spPr>
-          <a:xfrm>
-            <a:off x="932688" y="3685031"/>
-            <a:ext cx="10326319" cy="10058"/>
-          </a:xfrm>
-          <a:prstGeom prst="rect">
-            <a:avLst/>
-          </a:prstGeom>
-          <a:solidFill>
-            <a:srgbClr val="EAEAE8"/>
-          </a:solidFill>
-          <a:ln>
-            <a:noFill/>
-          </a:ln>
-          <a:effectLst/>
-        </p:spPr>
-        <p:style>
-          <a:lnRef idx="1">
-            <a:schemeClr val="accent1"/>
-          </a:lnRef>
-          <a:fillRef idx="3">
-            <a:schemeClr val="accent1"/>
-          </a:fillRef>
-          <a:effectRef idx="2">
-            <a:schemeClr val="accent1"/>
-          </a:effectRef>
-          <a:fontRef idx="minor">
-            <a:schemeClr val="lt1"/>
-          </a:fontRef>
-        </p:style>
-        <p:txBody>
-          <a:bodyPr rtlCol="0" anchor="ctr"/>
-          <a:lstStyle/>
-          <a:p/>
-        </p:txBody>
-      </p:sp>
-      <p:sp>
-        <p:nvSpPr>
-          <p:cNvPr id="19" name="TextBox 18"/>
-          <p:cNvSpPr txBox="1"/>
-          <p:nvPr/>
-        </p:nvSpPr>
-        <p:spPr>
-          <a:xfrm>
-            <a:off x="932688" y="3813047"/>
-            <a:ext cx="3291492" cy="271271"/>
-          </a:xfrm>
-          <a:prstGeom prst="rect">
-            <a:avLst/>
-          </a:prstGeom>
-          <a:noFill/>
-        </p:spPr>
-        <p:txBody>
-          <a:bodyPr wrap="square" lIns="0" rIns="0" tIns="0" bIns="0" anchor="t">
-            <a:spAutoFit/>
-          </a:bodyPr>
-          <a:lstStyle/>
-          <a:p>
-            <a:pPr algn="l">
-              <a:lnSpc>
-                <a:spcPct val="132000"/>
-              </a:lnSpc>
-            </a:pPr>
-            <a:r>
-              <a:rPr sz="1400" b="1" i="0">
-                <a:solidFill>
-                  <a:srgbClr val="B45309"/>
-                </a:solidFill>
-                <a:latin typeface="Verdana"/>
-              </a:rPr>
-              <a:t>« Veuillez agréer... »</a:t>
-            </a:r>
-          </a:p>
-        </p:txBody>
-      </p:sp>
-      <p:sp>
-        <p:nvSpPr>
-          <p:cNvPr id="20" name="TextBox 19"/>
-          <p:cNvSpPr txBox="1"/>
-          <p:nvPr/>
-        </p:nvSpPr>
-        <p:spPr>
-          <a:xfrm>
-            <a:off x="4443636" y="3813047"/>
-            <a:ext cx="6595914" cy="271271"/>
-          </a:xfrm>
-          <a:prstGeom prst="rect">
-            <a:avLst/>
-          </a:prstGeom>
-          <a:noFill/>
-        </p:spPr>
-        <p:txBody>
-          <a:bodyPr wrap="square" lIns="0" rIns="0" tIns="0" bIns="0" anchor="t">
-            <a:spAutoFit/>
-          </a:bodyPr>
-          <a:lstStyle/>
-          <a:p>
-            <a:pPr algn="l">
-              <a:lnSpc>
-                <a:spcPct val="132000"/>
-              </a:lnSpc>
-            </a:pPr>
-            <a:r>
-              <a:rPr sz="1400" b="0" i="0">
-                <a:solidFill>
-                  <a:srgbClr val="3A3D40"/>
-                </a:solidFill>
-                <a:latin typeface="Verdana"/>
-              </a:rPr>
-              <a:t>la lettre d'affaires</a:t>
-            </a:r>
-          </a:p>
-        </p:txBody>
-      </p:sp>
-      <p:sp>
-        <p:nvSpPr>
-          <p:cNvPr id="21" name="Rectangle 20"/>
-          <p:cNvSpPr/>
-          <p:nvPr/>
-        </p:nvSpPr>
-        <p:spPr>
-          <a:xfrm>
-            <a:off x="932688" y="4157471"/>
-            <a:ext cx="10326319" cy="10058"/>
-          </a:xfrm>
-          <a:prstGeom prst="rect">
-            <a:avLst/>
-          </a:prstGeom>
-          <a:solidFill>
-            <a:srgbClr val="EAEAE8"/>
-          </a:solidFill>
-          <a:ln>
-            <a:noFill/>
-          </a:ln>
-          <a:effectLst/>
-        </p:spPr>
-        <p:style>
-          <a:lnRef idx="1">
-            <a:schemeClr val="accent1"/>
-          </a:lnRef>
-          <a:fillRef idx="3">
-            <a:schemeClr val="accent1"/>
-          </a:fillRef>
-          <a:effectRef idx="2">
-            <a:schemeClr val="accent1"/>
-          </a:effectRef>
-          <a:fontRef idx="minor">
-            <a:schemeClr val="lt1"/>
-          </a:fontRef>
-        </p:style>
-        <p:txBody>
-          <a:bodyPr rtlCol="0" anchor="ctr"/>
-          <a:lstStyle/>
-          <a:p/>
-        </p:txBody>
-      </p:sp>
-      <p:sp>
-        <p:nvSpPr>
-          <p:cNvPr id="22" name="TextBox 21"/>
-          <p:cNvSpPr txBox="1"/>
-          <p:nvPr/>
-        </p:nvSpPr>
-        <p:spPr>
-          <a:xfrm>
-            <a:off x="932688" y="4285487"/>
-            <a:ext cx="3291492" cy="271271"/>
-          </a:xfrm>
-          <a:prstGeom prst="rect">
-            <a:avLst/>
-          </a:prstGeom>
-          <a:noFill/>
-        </p:spPr>
-        <p:txBody>
-          <a:bodyPr wrap="square" lIns="0" rIns="0" tIns="0" bIns="0" anchor="t">
-            <a:spAutoFit/>
-          </a:bodyPr>
-          <a:lstStyle/>
-          <a:p>
-            <a:pPr algn="l">
-              <a:lnSpc>
-                <a:spcPct val="132000"/>
-              </a:lnSpc>
-            </a:pPr>
-            <a:r>
-              <a:rPr sz="1400" b="1" i="0">
-                <a:solidFill>
-                  <a:srgbClr val="B45309"/>
-                </a:solidFill>
-                <a:latin typeface="Verdana"/>
-              </a:rPr>
-              <a:t>Elle finit sur la fonction</a:t>
-            </a:r>
-          </a:p>
-        </p:txBody>
-      </p:sp>
-      <p:sp>
-        <p:nvSpPr>
-          <p:cNvPr id="23" name="TextBox 22"/>
-          <p:cNvSpPr txBox="1"/>
-          <p:nvPr/>
-        </p:nvSpPr>
-        <p:spPr>
-          <a:xfrm>
-            <a:off x="4443636" y="4285487"/>
-            <a:ext cx="6595914" cy="271271"/>
-          </a:xfrm>
-          <a:prstGeom prst="rect">
-            <a:avLst/>
-          </a:prstGeom>
-          <a:noFill/>
-        </p:spPr>
-        <p:txBody>
-          <a:bodyPr wrap="square" lIns="0" rIns="0" tIns="0" bIns="0" anchor="t">
-            <a:spAutoFit/>
-          </a:bodyPr>
-          <a:lstStyle/>
-          <a:p>
-            <a:pPr algn="l">
-              <a:lnSpc>
-                <a:spcPct val="132000"/>
-              </a:lnSpc>
-            </a:pPr>
-            <a:r>
-              <a:rPr sz="1400" b="0" i="0">
-                <a:solidFill>
-                  <a:srgbClr val="3A3D40"/>
-                </a:solidFill>
-                <a:latin typeface="Verdana"/>
-              </a:rPr>
-              <a:t>la note de service</a:t>
-            </a:r>
-          </a:p>
-        </p:txBody>
-      </p:sp>
-      <p:sp>
-        <p:nvSpPr>
-          <p:cNvPr id="24" name="Rounded Rectangle 23"/>
-          <p:cNvSpPr/>
-          <p:nvPr/>
-        </p:nvSpPr>
-        <p:spPr>
-          <a:xfrm>
-            <a:off x="566928" y="5050536"/>
-            <a:ext cx="11057839" cy="1027684"/>
+            <a:off x="566928" y="2827528"/>
+            <a:ext cx="11057839" cy="559816"/>
           </a:xfrm>
           <a:prstGeom prst="roundRect">
             <a:avLst>
-              <a:gd name="adj" fmla="val 14236"/>
+              <a:gd name="adj" fmla="val 26134"/>
             </a:avLst>
           </a:prstGeom>
           <a:solidFill>
-            <a:srgbClr val="FBFBFA"/>
+            <a:srgbClr val="FFFFFF"/>
           </a:solidFill>
           <a:ln w="12700">
             <a:solidFill>
@@ -13306,14 +13268,58 @@
       </p:sp>
       <p:sp>
         <p:nvSpPr>
-          <p:cNvPr id="25" name="TextBox 24"/>
+          <p:cNvPr id="13" name="Rounded Rectangle 12"/>
+          <p:cNvSpPr/>
+          <p:nvPr/>
+        </p:nvSpPr>
+        <p:spPr>
+          <a:xfrm>
+            <a:off x="841247" y="2924556"/>
+            <a:ext cx="365760" cy="365760"/>
+          </a:xfrm>
+          <a:prstGeom prst="roundRect">
+            <a:avLst>
+              <a:gd name="adj" fmla="val 32500"/>
+            </a:avLst>
+          </a:prstGeom>
+          <a:solidFill>
+            <a:srgbClr val="FBEEDC"/>
+          </a:solidFill>
+          <a:ln>
+            <a:noFill/>
+          </a:ln>
+          <a:effectLst/>
+        </p:spPr>
+        <p:style>
+          <a:lnRef idx="1">
+            <a:schemeClr val="accent1"/>
+          </a:lnRef>
+          <a:fillRef idx="3">
+            <a:schemeClr val="accent1"/>
+          </a:fillRef>
+          <a:effectRef idx="2">
+            <a:schemeClr val="accent1"/>
+          </a:effectRef>
+          <a:fontRef idx="minor">
+            <a:schemeClr val="lt1"/>
+          </a:fontRef>
+        </p:style>
+        <p:txBody>
+          <a:bodyPr rtlCol="0" anchor="ctr"/>
+          <a:lstStyle/>
+          <a:p/>
+        </p:txBody>
+      </p:sp>
+      <p:sp>
+        <p:nvSpPr>
+          <p:cNvPr id="14" name="TextBox 13"/>
           <p:cNvSpPr txBox="1"/>
           <p:nvPr/>
         </p:nvSpPr>
         <p:spPr>
           <a:xfrm>
-            <a:off x="969264" y="5306568"/>
-            <a:ext cx="10234879" cy="570484"/>
+            <a:off x="841247" y="2988564"/>
+            <a:ext cx="365760" cy="256032"/>
           </a:xfrm>
           <a:prstGeom prst="rect">
             <a:avLst/>
@@ -13326,19 +13332,730 @@
           </a:bodyPr>
           <a:lstStyle/>
           <a:p>
+            <a:pPr algn="ctr">
+              <a:lnSpc>
+                <a:spcPct val="135000"/>
+              </a:lnSpc>
+            </a:pPr>
+            <a:r>
+              <a:rPr sz="1500" b="1" i="0">
+                <a:solidFill>
+                  <a:srgbClr val="B45309"/>
+                </a:solidFill>
+                <a:latin typeface="Verdana"/>
+              </a:rPr>
+              <a:t>2</a:t>
+            </a:r>
+          </a:p>
+        </p:txBody>
+      </p:sp>
+      <p:sp>
+        <p:nvSpPr>
+          <p:cNvPr id="15" name="TextBox 14"/>
+          <p:cNvSpPr txBox="1"/>
+          <p:nvPr/>
+        </p:nvSpPr>
+        <p:spPr>
+          <a:xfrm>
+            <a:off x="1344168" y="2982975"/>
+            <a:ext cx="10097719" cy="285496"/>
+          </a:xfrm>
+          <a:prstGeom prst="rect">
+            <a:avLst/>
+          </a:prstGeom>
+          <a:noFill/>
+        </p:spPr>
+        <p:txBody>
+          <a:bodyPr wrap="square" lIns="0" rIns="0" tIns="0" bIns="0" anchor="t">
+            <a:spAutoFit/>
+          </a:bodyPr>
+          <a:lstStyle/>
+          <a:p>
             <a:pPr algn="l">
               <a:lnSpc>
-                <a:spcPct val="145000"/>
+                <a:spcPct val="140000"/>
               </a:lnSpc>
             </a:pPr>
             <a:r>
               <a:rPr sz="1400" b="0" i="0">
                 <a:solidFill>
-                  <a:srgbClr val="4B4F52"/>
-                </a:solidFill>
-                <a:latin typeface="Verdana"/>
-              </a:rPr>
-              <a:t>La note reste dans l'entreprise et n'engage que l'équipe. La lettre en sort, et ce qui y est écrit peut être invoqué plus tard.</a:t>
+                  <a:srgbClr val="3A3D40"/>
+                </a:solidFill>
+                <a:latin typeface="Verdana"/>
+              </a:rPr>
+              <a:t>Quel est l'objet ?</a:t>
+            </a:r>
+          </a:p>
+        </p:txBody>
+      </p:sp>
+      <p:sp>
+        <p:nvSpPr>
+          <p:cNvPr id="16" name="Rounded Rectangle 15"/>
+          <p:cNvSpPr/>
+          <p:nvPr/>
+        </p:nvSpPr>
+        <p:spPr>
+          <a:xfrm>
+            <a:off x="566928" y="3515359"/>
+            <a:ext cx="11057839" cy="559816"/>
+          </a:xfrm>
+          <a:prstGeom prst="roundRect">
+            <a:avLst>
+              <a:gd name="adj" fmla="val 26134"/>
+            </a:avLst>
+          </a:prstGeom>
+          <a:solidFill>
+            <a:srgbClr val="FFFFFF"/>
+          </a:solidFill>
+          <a:ln w="12700">
+            <a:solidFill>
+              <a:srgbClr val="EAEAE8"/>
+            </a:solidFill>
+          </a:ln>
+          <a:effectLst/>
+        </p:spPr>
+        <p:style>
+          <a:lnRef idx="1">
+            <a:schemeClr val="accent1"/>
+          </a:lnRef>
+          <a:fillRef idx="3">
+            <a:schemeClr val="accent1"/>
+          </a:fillRef>
+          <a:effectRef idx="2">
+            <a:schemeClr val="accent1"/>
+          </a:effectRef>
+          <a:fontRef idx="minor">
+            <a:schemeClr val="lt1"/>
+          </a:fontRef>
+        </p:style>
+        <p:txBody>
+          <a:bodyPr rtlCol="0" anchor="ctr"/>
+          <a:lstStyle/>
+          <a:p/>
+        </p:txBody>
+      </p:sp>
+      <p:sp>
+        <p:nvSpPr>
+          <p:cNvPr id="17" name="Rounded Rectangle 16"/>
+          <p:cNvSpPr/>
+          <p:nvPr/>
+        </p:nvSpPr>
+        <p:spPr>
+          <a:xfrm>
+            <a:off x="841247" y="3612388"/>
+            <a:ext cx="365760" cy="365760"/>
+          </a:xfrm>
+          <a:prstGeom prst="roundRect">
+            <a:avLst>
+              <a:gd name="adj" fmla="val 32500"/>
+            </a:avLst>
+          </a:prstGeom>
+          <a:solidFill>
+            <a:srgbClr val="FBEEDC"/>
+          </a:solidFill>
+          <a:ln>
+            <a:noFill/>
+          </a:ln>
+          <a:effectLst/>
+        </p:spPr>
+        <p:style>
+          <a:lnRef idx="1">
+            <a:schemeClr val="accent1"/>
+          </a:lnRef>
+          <a:fillRef idx="3">
+            <a:schemeClr val="accent1"/>
+          </a:fillRef>
+          <a:effectRef idx="2">
+            <a:schemeClr val="accent1"/>
+          </a:effectRef>
+          <a:fontRef idx="minor">
+            <a:schemeClr val="lt1"/>
+          </a:fontRef>
+        </p:style>
+        <p:txBody>
+          <a:bodyPr rtlCol="0" anchor="ctr"/>
+          <a:lstStyle/>
+          <a:p/>
+        </p:txBody>
+      </p:sp>
+      <p:sp>
+        <p:nvSpPr>
+          <p:cNvPr id="18" name="TextBox 17"/>
+          <p:cNvSpPr txBox="1"/>
+          <p:nvPr/>
+        </p:nvSpPr>
+        <p:spPr>
+          <a:xfrm>
+            <a:off x="841247" y="3676395"/>
+            <a:ext cx="365760" cy="256032"/>
+          </a:xfrm>
+          <a:prstGeom prst="rect">
+            <a:avLst/>
+          </a:prstGeom>
+          <a:noFill/>
+        </p:spPr>
+        <p:txBody>
+          <a:bodyPr wrap="square" lIns="0" rIns="0" tIns="0" bIns="0" anchor="t">
+            <a:spAutoFit/>
+          </a:bodyPr>
+          <a:lstStyle/>
+          <a:p>
+            <a:pPr algn="ctr">
+              <a:lnSpc>
+                <a:spcPct val="135000"/>
+              </a:lnSpc>
+            </a:pPr>
+            <a:r>
+              <a:rPr sz="1500" b="1" i="0">
+                <a:solidFill>
+                  <a:srgbClr val="B45309"/>
+                </a:solidFill>
+                <a:latin typeface="Verdana"/>
+              </a:rPr>
+              <a:t>3</a:t>
+            </a:r>
+          </a:p>
+        </p:txBody>
+      </p:sp>
+      <p:sp>
+        <p:nvSpPr>
+          <p:cNvPr id="19" name="TextBox 18"/>
+          <p:cNvSpPr txBox="1"/>
+          <p:nvPr/>
+        </p:nvSpPr>
+        <p:spPr>
+          <a:xfrm>
+            <a:off x="1344168" y="3670807"/>
+            <a:ext cx="10097719" cy="285496"/>
+          </a:xfrm>
+          <a:prstGeom prst="rect">
+            <a:avLst/>
+          </a:prstGeom>
+          <a:noFill/>
+        </p:spPr>
+        <p:txBody>
+          <a:bodyPr wrap="square" lIns="0" rIns="0" tIns="0" bIns="0" anchor="t">
+            <a:spAutoFit/>
+          </a:bodyPr>
+          <a:lstStyle/>
+          <a:p>
+            <a:pPr algn="l">
+              <a:lnSpc>
+                <a:spcPct val="140000"/>
+              </a:lnSpc>
+            </a:pPr>
+            <a:r>
+              <a:rPr sz="1400" b="0" i="0">
+                <a:solidFill>
+                  <a:srgbClr val="3A3D40"/>
+                </a:solidFill>
+                <a:latin typeface="Verdana"/>
+              </a:rPr>
+              <a:t>Qu'est-ce qui change, et à partir de quand ?</a:t>
+            </a:r>
+          </a:p>
+        </p:txBody>
+      </p:sp>
+      <p:sp>
+        <p:nvSpPr>
+          <p:cNvPr id="20" name="Rounded Rectangle 19"/>
+          <p:cNvSpPr/>
+          <p:nvPr/>
+        </p:nvSpPr>
+        <p:spPr>
+          <a:xfrm>
+            <a:off x="566928" y="4203192"/>
+            <a:ext cx="11057839" cy="559816"/>
+          </a:xfrm>
+          <a:prstGeom prst="roundRect">
+            <a:avLst>
+              <a:gd name="adj" fmla="val 26134"/>
+            </a:avLst>
+          </a:prstGeom>
+          <a:solidFill>
+            <a:srgbClr val="FFFFFF"/>
+          </a:solidFill>
+          <a:ln w="12700">
+            <a:solidFill>
+              <a:srgbClr val="EAEAE8"/>
+            </a:solidFill>
+          </a:ln>
+          <a:effectLst/>
+        </p:spPr>
+        <p:style>
+          <a:lnRef idx="1">
+            <a:schemeClr val="accent1"/>
+          </a:lnRef>
+          <a:fillRef idx="3">
+            <a:schemeClr val="accent1"/>
+          </a:fillRef>
+          <a:effectRef idx="2">
+            <a:schemeClr val="accent1"/>
+          </a:effectRef>
+          <a:fontRef idx="minor">
+            <a:schemeClr val="lt1"/>
+          </a:fontRef>
+        </p:style>
+        <p:txBody>
+          <a:bodyPr rtlCol="0" anchor="ctr"/>
+          <a:lstStyle/>
+          <a:p/>
+        </p:txBody>
+      </p:sp>
+      <p:sp>
+        <p:nvSpPr>
+          <p:cNvPr id="21" name="Rounded Rectangle 20"/>
+          <p:cNvSpPr/>
+          <p:nvPr/>
+        </p:nvSpPr>
+        <p:spPr>
+          <a:xfrm>
+            <a:off x="841247" y="4300220"/>
+            <a:ext cx="365760" cy="365760"/>
+          </a:xfrm>
+          <a:prstGeom prst="roundRect">
+            <a:avLst>
+              <a:gd name="adj" fmla="val 32500"/>
+            </a:avLst>
+          </a:prstGeom>
+          <a:solidFill>
+            <a:srgbClr val="FBEEDC"/>
+          </a:solidFill>
+          <a:ln>
+            <a:noFill/>
+          </a:ln>
+          <a:effectLst/>
+        </p:spPr>
+        <p:style>
+          <a:lnRef idx="1">
+            <a:schemeClr val="accent1"/>
+          </a:lnRef>
+          <a:fillRef idx="3">
+            <a:schemeClr val="accent1"/>
+          </a:fillRef>
+          <a:effectRef idx="2">
+            <a:schemeClr val="accent1"/>
+          </a:effectRef>
+          <a:fontRef idx="minor">
+            <a:schemeClr val="lt1"/>
+          </a:fontRef>
+        </p:style>
+        <p:txBody>
+          <a:bodyPr rtlCol="0" anchor="ctr"/>
+          <a:lstStyle/>
+          <a:p/>
+        </p:txBody>
+      </p:sp>
+      <p:sp>
+        <p:nvSpPr>
+          <p:cNvPr id="22" name="TextBox 21"/>
+          <p:cNvSpPr txBox="1"/>
+          <p:nvPr/>
+        </p:nvSpPr>
+        <p:spPr>
+          <a:xfrm>
+            <a:off x="841247" y="4364228"/>
+            <a:ext cx="365760" cy="256032"/>
+          </a:xfrm>
+          <a:prstGeom prst="rect">
+            <a:avLst/>
+          </a:prstGeom>
+          <a:noFill/>
+        </p:spPr>
+        <p:txBody>
+          <a:bodyPr wrap="square" lIns="0" rIns="0" tIns="0" bIns="0" anchor="t">
+            <a:spAutoFit/>
+          </a:bodyPr>
+          <a:lstStyle/>
+          <a:p>
+            <a:pPr algn="ctr">
+              <a:lnSpc>
+                <a:spcPct val="135000"/>
+              </a:lnSpc>
+            </a:pPr>
+            <a:r>
+              <a:rPr sz="1500" b="1" i="0">
+                <a:solidFill>
+                  <a:srgbClr val="B45309"/>
+                </a:solidFill>
+                <a:latin typeface="Verdana"/>
+              </a:rPr>
+              <a:t>4</a:t>
+            </a:r>
+          </a:p>
+        </p:txBody>
+      </p:sp>
+      <p:sp>
+        <p:nvSpPr>
+          <p:cNvPr id="23" name="TextBox 22"/>
+          <p:cNvSpPr txBox="1"/>
+          <p:nvPr/>
+        </p:nvSpPr>
+        <p:spPr>
+          <a:xfrm>
+            <a:off x="1344168" y="4358640"/>
+            <a:ext cx="10097719" cy="285496"/>
+          </a:xfrm>
+          <a:prstGeom prst="rect">
+            <a:avLst/>
+          </a:prstGeom>
+          <a:noFill/>
+        </p:spPr>
+        <p:txBody>
+          <a:bodyPr wrap="square" lIns="0" rIns="0" tIns="0" bIns="0" anchor="t">
+            <a:spAutoFit/>
+          </a:bodyPr>
+          <a:lstStyle/>
+          <a:p>
+            <a:pPr algn="l">
+              <a:lnSpc>
+                <a:spcPct val="140000"/>
+              </a:lnSpc>
+            </a:pPr>
+            <a:r>
+              <a:rPr sz="1400" b="0" i="0">
+                <a:solidFill>
+                  <a:srgbClr val="3A3D40"/>
+                </a:solidFill>
+                <a:latin typeface="Verdana"/>
+              </a:rPr>
+              <a:t>Combien de temps dure l'essai ?</a:t>
+            </a:r>
+          </a:p>
+        </p:txBody>
+      </p:sp>
+      <p:sp>
+        <p:nvSpPr>
+          <p:cNvPr id="24" name="Rounded Rectangle 23"/>
+          <p:cNvSpPr/>
+          <p:nvPr/>
+        </p:nvSpPr>
+        <p:spPr>
+          <a:xfrm>
+            <a:off x="566928" y="4891023"/>
+            <a:ext cx="11057839" cy="559816"/>
+          </a:xfrm>
+          <a:prstGeom prst="roundRect">
+            <a:avLst>
+              <a:gd name="adj" fmla="val 26134"/>
+            </a:avLst>
+          </a:prstGeom>
+          <a:solidFill>
+            <a:srgbClr val="FFFFFF"/>
+          </a:solidFill>
+          <a:ln w="12700">
+            <a:solidFill>
+              <a:srgbClr val="EAEAE8"/>
+            </a:solidFill>
+          </a:ln>
+          <a:effectLst/>
+        </p:spPr>
+        <p:style>
+          <a:lnRef idx="1">
+            <a:schemeClr val="accent1"/>
+          </a:lnRef>
+          <a:fillRef idx="3">
+            <a:schemeClr val="accent1"/>
+          </a:fillRef>
+          <a:effectRef idx="2">
+            <a:schemeClr val="accent1"/>
+          </a:effectRef>
+          <a:fontRef idx="minor">
+            <a:schemeClr val="lt1"/>
+          </a:fontRef>
+        </p:style>
+        <p:txBody>
+          <a:bodyPr rtlCol="0" anchor="ctr"/>
+          <a:lstStyle/>
+          <a:p/>
+        </p:txBody>
+      </p:sp>
+      <p:sp>
+        <p:nvSpPr>
+          <p:cNvPr id="25" name="Rounded Rectangle 24"/>
+          <p:cNvSpPr/>
+          <p:nvPr/>
+        </p:nvSpPr>
+        <p:spPr>
+          <a:xfrm>
+            <a:off x="841247" y="4988051"/>
+            <a:ext cx="365760" cy="365760"/>
+          </a:xfrm>
+          <a:prstGeom prst="roundRect">
+            <a:avLst>
+              <a:gd name="adj" fmla="val 32500"/>
+            </a:avLst>
+          </a:prstGeom>
+          <a:solidFill>
+            <a:srgbClr val="FBEEDC"/>
+          </a:solidFill>
+          <a:ln>
+            <a:noFill/>
+          </a:ln>
+          <a:effectLst/>
+        </p:spPr>
+        <p:style>
+          <a:lnRef idx="1">
+            <a:schemeClr val="accent1"/>
+          </a:lnRef>
+          <a:fillRef idx="3">
+            <a:schemeClr val="accent1"/>
+          </a:fillRef>
+          <a:effectRef idx="2">
+            <a:schemeClr val="accent1"/>
+          </a:effectRef>
+          <a:fontRef idx="minor">
+            <a:schemeClr val="lt1"/>
+          </a:fontRef>
+        </p:style>
+        <p:txBody>
+          <a:bodyPr rtlCol="0" anchor="ctr"/>
+          <a:lstStyle/>
+          <a:p/>
+        </p:txBody>
+      </p:sp>
+      <p:sp>
+        <p:nvSpPr>
+          <p:cNvPr id="26" name="TextBox 25"/>
+          <p:cNvSpPr txBox="1"/>
+          <p:nvPr/>
+        </p:nvSpPr>
+        <p:spPr>
+          <a:xfrm>
+            <a:off x="841247" y="5052059"/>
+            <a:ext cx="365760" cy="256032"/>
+          </a:xfrm>
+          <a:prstGeom prst="rect">
+            <a:avLst/>
+          </a:prstGeom>
+          <a:noFill/>
+        </p:spPr>
+        <p:txBody>
+          <a:bodyPr wrap="square" lIns="0" rIns="0" tIns="0" bIns="0" anchor="t">
+            <a:spAutoFit/>
+          </a:bodyPr>
+          <a:lstStyle/>
+          <a:p>
+            <a:pPr algn="ctr">
+              <a:lnSpc>
+                <a:spcPct val="135000"/>
+              </a:lnSpc>
+            </a:pPr>
+            <a:r>
+              <a:rPr sz="1500" b="1" i="0">
+                <a:solidFill>
+                  <a:srgbClr val="B45309"/>
+                </a:solidFill>
+                <a:latin typeface="Verdana"/>
+              </a:rPr>
+              <a:t>5</a:t>
+            </a:r>
+          </a:p>
+        </p:txBody>
+      </p:sp>
+      <p:sp>
+        <p:nvSpPr>
+          <p:cNvPr id="27" name="TextBox 26"/>
+          <p:cNvSpPr txBox="1"/>
+          <p:nvPr/>
+        </p:nvSpPr>
+        <p:spPr>
+          <a:xfrm>
+            <a:off x="1344168" y="5046471"/>
+            <a:ext cx="10097719" cy="285496"/>
+          </a:xfrm>
+          <a:prstGeom prst="rect">
+            <a:avLst/>
+          </a:prstGeom>
+          <a:noFill/>
+        </p:spPr>
+        <p:txBody>
+          <a:bodyPr wrap="square" lIns="0" rIns="0" tIns="0" bIns="0" anchor="t">
+            <a:spAutoFit/>
+          </a:bodyPr>
+          <a:lstStyle/>
+          <a:p>
+            <a:pPr algn="l">
+              <a:lnSpc>
+                <a:spcPct val="140000"/>
+              </a:lnSpc>
+            </a:pPr>
+            <a:r>
+              <a:rPr sz="1400" b="0" i="0">
+                <a:solidFill>
+                  <a:srgbClr val="3A3D40"/>
+                </a:solidFill>
+                <a:latin typeface="Verdana"/>
+              </a:rPr>
+              <a:t>Qu'est-ce qu'on demande au lecteur de faire ?</a:t>
+            </a:r>
+          </a:p>
+        </p:txBody>
+      </p:sp>
+      <p:sp>
+        <p:nvSpPr>
+          <p:cNvPr id="28" name="Rounded Rectangle 27"/>
+          <p:cNvSpPr/>
+          <p:nvPr/>
+        </p:nvSpPr>
+        <p:spPr>
+          <a:xfrm>
+            <a:off x="566928" y="5578856"/>
+            <a:ext cx="11057839" cy="559816"/>
+          </a:xfrm>
+          <a:prstGeom prst="roundRect">
+            <a:avLst>
+              <a:gd name="adj" fmla="val 26134"/>
+            </a:avLst>
+          </a:prstGeom>
+          <a:solidFill>
+            <a:srgbClr val="FFFFFF"/>
+          </a:solidFill>
+          <a:ln w="12700">
+            <a:solidFill>
+              <a:srgbClr val="EAEAE8"/>
+            </a:solidFill>
+          </a:ln>
+          <a:effectLst/>
+        </p:spPr>
+        <p:style>
+          <a:lnRef idx="1">
+            <a:schemeClr val="accent1"/>
+          </a:lnRef>
+          <a:fillRef idx="3">
+            <a:schemeClr val="accent1"/>
+          </a:fillRef>
+          <a:effectRef idx="2">
+            <a:schemeClr val="accent1"/>
+          </a:effectRef>
+          <a:fontRef idx="minor">
+            <a:schemeClr val="lt1"/>
+          </a:fontRef>
+        </p:style>
+        <p:txBody>
+          <a:bodyPr rtlCol="0" anchor="ctr"/>
+          <a:lstStyle/>
+          <a:p/>
+        </p:txBody>
+      </p:sp>
+      <p:sp>
+        <p:nvSpPr>
+          <p:cNvPr id="29" name="Rounded Rectangle 28"/>
+          <p:cNvSpPr/>
+          <p:nvPr/>
+        </p:nvSpPr>
+        <p:spPr>
+          <a:xfrm>
+            <a:off x="841247" y="5675884"/>
+            <a:ext cx="365760" cy="365760"/>
+          </a:xfrm>
+          <a:prstGeom prst="roundRect">
+            <a:avLst>
+              <a:gd name="adj" fmla="val 32500"/>
+            </a:avLst>
+          </a:prstGeom>
+          <a:solidFill>
+            <a:srgbClr val="FBEEDC"/>
+          </a:solidFill>
+          <a:ln>
+            <a:noFill/>
+          </a:ln>
+          <a:effectLst/>
+        </p:spPr>
+        <p:style>
+          <a:lnRef idx="1">
+            <a:schemeClr val="accent1"/>
+          </a:lnRef>
+          <a:fillRef idx="3">
+            <a:schemeClr val="accent1"/>
+          </a:fillRef>
+          <a:effectRef idx="2">
+            <a:schemeClr val="accent1"/>
+          </a:effectRef>
+          <a:fontRef idx="minor">
+            <a:schemeClr val="lt1"/>
+          </a:fontRef>
+        </p:style>
+        <p:txBody>
+          <a:bodyPr rtlCol="0" anchor="ctr"/>
+          <a:lstStyle/>
+          <a:p/>
+        </p:txBody>
+      </p:sp>
+      <p:sp>
+        <p:nvSpPr>
+          <p:cNvPr id="30" name="TextBox 29"/>
+          <p:cNvSpPr txBox="1"/>
+          <p:nvPr/>
+        </p:nvSpPr>
+        <p:spPr>
+          <a:xfrm>
+            <a:off x="841247" y="5739892"/>
+            <a:ext cx="365760" cy="256032"/>
+          </a:xfrm>
+          <a:prstGeom prst="rect">
+            <a:avLst/>
+          </a:prstGeom>
+          <a:noFill/>
+        </p:spPr>
+        <p:txBody>
+          <a:bodyPr wrap="square" lIns="0" rIns="0" tIns="0" bIns="0" anchor="t">
+            <a:spAutoFit/>
+          </a:bodyPr>
+          <a:lstStyle/>
+          <a:p>
+            <a:pPr algn="ctr">
+              <a:lnSpc>
+                <a:spcPct val="135000"/>
+              </a:lnSpc>
+            </a:pPr>
+            <a:r>
+              <a:rPr sz="1500" b="1" i="0">
+                <a:solidFill>
+                  <a:srgbClr val="B45309"/>
+                </a:solidFill>
+                <a:latin typeface="Verdana"/>
+              </a:rPr>
+              <a:t>6</a:t>
+            </a:r>
+          </a:p>
+        </p:txBody>
+      </p:sp>
+      <p:sp>
+        <p:nvSpPr>
+          <p:cNvPr id="31" name="TextBox 30"/>
+          <p:cNvSpPr txBox="1"/>
+          <p:nvPr/>
+        </p:nvSpPr>
+        <p:spPr>
+          <a:xfrm>
+            <a:off x="1344168" y="5734304"/>
+            <a:ext cx="10097719" cy="285496"/>
+          </a:xfrm>
+          <a:prstGeom prst="rect">
+            <a:avLst/>
+          </a:prstGeom>
+          <a:noFill/>
+        </p:spPr>
+        <p:txBody>
+          <a:bodyPr wrap="square" lIns="0" rIns="0" tIns="0" bIns="0" anchor="t">
+            <a:spAutoFit/>
+          </a:bodyPr>
+          <a:lstStyle/>
+          <a:p>
+            <a:pPr algn="l">
+              <a:lnSpc>
+                <a:spcPct val="140000"/>
+              </a:lnSpc>
+            </a:pPr>
+            <a:r>
+              <a:rPr sz="1400" b="0" i="0">
+                <a:solidFill>
+                  <a:srgbClr val="3A3D40"/>
+                </a:solidFill>
+                <a:latin typeface="Verdana"/>
+              </a:rPr>
+              <a:t>Qu'est-ce qui ne change pas pendant l'essai ?</a:t>
             </a:r>
           </a:p>
         </p:txBody>
@@ -13515,7 +14232,7 @@
                 </a:solidFill>
                 <a:latin typeface="Verdana"/>
               </a:rPr>
-              <a:t>PRATIQUE</a:t>
+              <a:t>CORRECTION</a:t>
             </a:r>
           </a:p>
         </p:txBody>
@@ -13554,7 +14271,7 @@
                 </a:solidFill>
                 <a:latin typeface="Verdana"/>
               </a:rPr>
-              <a:t>Corrigez l'objet</a:t>
+              <a:t>Ce que la note demande</a:t>
             </a:r>
           </a:p>
         </p:txBody>
@@ -13593,7 +14310,7 @@
                 </a:solidFill>
                 <a:latin typeface="Verdana"/>
               </a:rPr>
-              <a:t>Un objet n'a pas de verbe conjugué. Réécrivez-le.</a:t>
+              <a:t>Correction — on lit la réponse, on ne commente pas l'erreur.</a:t>
             </a:r>
           </a:p>
         </p:txBody>
@@ -13607,15 +14324,15 @@
         <p:spPr>
           <a:xfrm>
             <a:off x="566928" y="2139696"/>
-            <a:ext cx="11057839" cy="613156"/>
+            <a:ext cx="11057839" cy="559816"/>
           </a:xfrm>
           <a:prstGeom prst="roundRect">
             <a:avLst>
-              <a:gd name="adj" fmla="val 23860"/>
+              <a:gd name="adj" fmla="val 26134"/>
             </a:avLst>
           </a:prstGeom>
           <a:solidFill>
-            <a:srgbClr val="FFFFFF"/>
+            <a:srgbClr val="E6F5EE"/>
           </a:solidFill>
           <a:ln w="12700">
             <a:solidFill>
@@ -13652,7 +14369,7 @@
         </p:nvSpPr>
         <p:spPr>
           <a:xfrm>
-            <a:off x="841247" y="2263393"/>
+            <a:off x="841247" y="2236724"/>
             <a:ext cx="365760" cy="365760"/>
           </a:xfrm>
           <a:prstGeom prst="roundRect">
@@ -13696,7 +14413,7 @@
         </p:nvSpPr>
         <p:spPr>
           <a:xfrm>
-            <a:off x="841247" y="2327401"/>
+            <a:off x="841247" y="2300732"/>
             <a:ext cx="365760" cy="256032"/>
           </a:xfrm>
           <a:prstGeom prst="rect">
@@ -13736,7 +14453,7 @@
         <p:spPr>
           <a:xfrm>
             <a:off x="1344168" y="2295144"/>
-            <a:ext cx="10097719" cy="338836"/>
+            <a:ext cx="10097719" cy="285496"/>
           </a:xfrm>
           <a:prstGeom prst="rect">
             <a:avLst/>
@@ -13755,13 +14472,22 @@
               </a:lnSpc>
             </a:pPr>
             <a:r>
-              <a:rPr sz="1700" b="0" i="0">
+              <a:rPr sz="1400" b="0" i="0">
                 <a:solidFill>
                   <a:srgbClr val="3A3D40"/>
                 </a:solidFill>
                 <a:latin typeface="Verdana"/>
               </a:rPr>
-              <a:t>Objet : nous changeons l'horaire du poste 4</a:t>
+              <a:t>À qui la note s'adresse-t-elle ?   </a:t>
+            </a:r>
+            <a:r>
+              <a:rPr sz="1400" b="1" i="0">
+                <a:solidFill>
+                  <a:srgbClr val="07734A"/>
+                </a:solidFill>
+                <a:latin typeface="Verdana"/>
+              </a:rPr>
+              <a:t>» au personnel du poste 4 et aux chefs d'équipe</a:t>
             </a:r>
           </a:p>
         </p:txBody>
@@ -13774,16 +14500,16 @@
         </p:nvSpPr>
         <p:spPr>
           <a:xfrm>
-            <a:off x="566928" y="2880868"/>
-            <a:ext cx="11057839" cy="613156"/>
+            <a:off x="566928" y="2827528"/>
+            <a:ext cx="11057839" cy="559816"/>
           </a:xfrm>
           <a:prstGeom prst="roundRect">
             <a:avLst>
-              <a:gd name="adj" fmla="val 23860"/>
+              <a:gd name="adj" fmla="val 26134"/>
             </a:avLst>
           </a:prstGeom>
           <a:solidFill>
-            <a:srgbClr val="FFFFFF"/>
+            <a:srgbClr val="E6F5EE"/>
           </a:solidFill>
           <a:ln w="12700">
             <a:solidFill>
@@ -13820,7 +14546,7 @@
         </p:nvSpPr>
         <p:spPr>
           <a:xfrm>
-            <a:off x="841247" y="3004566"/>
+            <a:off x="841247" y="2924556"/>
             <a:ext cx="365760" cy="365760"/>
           </a:xfrm>
           <a:prstGeom prst="roundRect">
@@ -13864,7 +14590,7 @@
         </p:nvSpPr>
         <p:spPr>
           <a:xfrm>
-            <a:off x="841247" y="3068573"/>
+            <a:off x="841247" y="2988564"/>
             <a:ext cx="365760" cy="256032"/>
           </a:xfrm>
           <a:prstGeom prst="rect">
@@ -13903,8 +14629,8 @@
         </p:nvSpPr>
         <p:spPr>
           <a:xfrm>
-            <a:off x="1344168" y="3036316"/>
-            <a:ext cx="10097719" cy="338836"/>
+            <a:off x="1344168" y="2982975"/>
+            <a:ext cx="10097719" cy="285496"/>
           </a:xfrm>
           <a:prstGeom prst="rect">
             <a:avLst/>
@@ -13923,13 +14649,22 @@
               </a:lnSpc>
             </a:pPr>
             <a:r>
-              <a:rPr sz="1700" b="0" i="0">
+              <a:rPr sz="1400" b="0" i="0">
                 <a:solidFill>
                   <a:srgbClr val="3A3D40"/>
                 </a:solidFill>
                 <a:latin typeface="Verdana"/>
               </a:rPr>
-              <a:t>Objet : il faut ranger la cafétéria</a:t>
+              <a:t>Quel est l'objet ?   </a:t>
+            </a:r>
+            <a:r>
+              <a:rPr sz="1400" b="1" i="0">
+                <a:solidFill>
+                  <a:srgbClr val="07734A"/>
+                </a:solidFill>
+                <a:latin typeface="Verdana"/>
+              </a:rPr>
+              <a:t>» rotation des tâches au poste 4, à l'essai</a:t>
             </a:r>
           </a:p>
         </p:txBody>
@@ -13942,16 +14677,16 @@
         </p:nvSpPr>
         <p:spPr>
           <a:xfrm>
-            <a:off x="566928" y="3622040"/>
-            <a:ext cx="11057839" cy="613156"/>
+            <a:off x="566928" y="3515359"/>
+            <a:ext cx="11057839" cy="559816"/>
           </a:xfrm>
           <a:prstGeom prst="roundRect">
             <a:avLst>
-              <a:gd name="adj" fmla="val 23860"/>
+              <a:gd name="adj" fmla="val 26134"/>
             </a:avLst>
           </a:prstGeom>
           <a:solidFill>
-            <a:srgbClr val="FFFFFF"/>
+            <a:srgbClr val="E6F5EE"/>
           </a:solidFill>
           <a:ln w="12700">
             <a:solidFill>
@@ -13988,7 +14723,7 @@
         </p:nvSpPr>
         <p:spPr>
           <a:xfrm>
-            <a:off x="841247" y="3745738"/>
+            <a:off x="841247" y="3612388"/>
             <a:ext cx="365760" cy="365760"/>
           </a:xfrm>
           <a:prstGeom prst="roundRect">
@@ -14032,7 +14767,7 @@
         </p:nvSpPr>
         <p:spPr>
           <a:xfrm>
-            <a:off x="841247" y="3809746"/>
+            <a:off x="841247" y="3676395"/>
             <a:ext cx="365760" cy="256032"/>
           </a:xfrm>
           <a:prstGeom prst="rect">
@@ -14071,8 +14806,8 @@
         </p:nvSpPr>
         <p:spPr>
           <a:xfrm>
-            <a:off x="1344168" y="3777488"/>
-            <a:ext cx="10097719" cy="338836"/>
+            <a:off x="1344168" y="3670807"/>
+            <a:ext cx="10097719" cy="285496"/>
           </a:xfrm>
           <a:prstGeom prst="rect">
             <a:avLst/>
@@ -14091,13 +14826,22 @@
               </a:lnSpc>
             </a:pPr>
             <a:r>
-              <a:rPr sz="1700" b="0" i="0">
+              <a:rPr sz="1400" b="0" i="0">
                 <a:solidFill>
                   <a:srgbClr val="3A3D40"/>
                 </a:solidFill>
                 <a:latin typeface="Verdana"/>
               </a:rPr>
-              <a:t>Objet : on va fermer l'entrepôt le 3 juillet</a:t>
+              <a:t>Qu'est-ce qui change, et à partir de quand ?   </a:t>
+            </a:r>
+            <a:r>
+              <a:rPr sz="1400" b="1" i="0">
+                <a:solidFill>
+                  <a:srgbClr val="07734A"/>
+                </a:solidFill>
+                <a:latin typeface="Verdana"/>
+              </a:rPr>
+              <a:t>» l'alternance, à compter du lundi 22 septembre</a:t>
             </a:r>
           </a:p>
         </p:txBody>
@@ -14110,16 +14854,16 @@
         </p:nvSpPr>
         <p:spPr>
           <a:xfrm>
-            <a:off x="566928" y="4363212"/>
-            <a:ext cx="11057839" cy="613156"/>
+            <a:off x="566928" y="4203192"/>
+            <a:ext cx="11057839" cy="559816"/>
           </a:xfrm>
           <a:prstGeom prst="roundRect">
             <a:avLst>
-              <a:gd name="adj" fmla="val 23860"/>
+              <a:gd name="adj" fmla="val 26134"/>
             </a:avLst>
           </a:prstGeom>
           <a:solidFill>
-            <a:srgbClr val="FFFFFF"/>
+            <a:srgbClr val="E6F5EE"/>
           </a:solidFill>
           <a:ln w="12700">
             <a:solidFill>
@@ -14156,7 +14900,7 @@
         </p:nvSpPr>
         <p:spPr>
           <a:xfrm>
-            <a:off x="841247" y="4486910"/>
+            <a:off x="841247" y="4300220"/>
             <a:ext cx="365760" cy="365760"/>
           </a:xfrm>
           <a:prstGeom prst="roundRect">
@@ -14200,7 +14944,7 @@
         </p:nvSpPr>
         <p:spPr>
           <a:xfrm>
-            <a:off x="841247" y="4550918"/>
+            <a:off x="841247" y="4364228"/>
             <a:ext cx="365760" cy="256032"/>
           </a:xfrm>
           <a:prstGeom prst="rect">
@@ -14239,8 +14983,8 @@
         </p:nvSpPr>
         <p:spPr>
           <a:xfrm>
-            <a:off x="1344168" y="4518660"/>
-            <a:ext cx="10097719" cy="338836"/>
+            <a:off x="1344168" y="4358640"/>
+            <a:ext cx="10097719" cy="285496"/>
           </a:xfrm>
           <a:prstGeom prst="rect">
             <a:avLst/>
@@ -14259,13 +15003,22 @@
               </a:lnSpc>
             </a:pPr>
             <a:r>
-              <a:rPr sz="1700" b="0" i="0">
+              <a:rPr sz="1400" b="0" i="0">
                 <a:solidFill>
                   <a:srgbClr val="3A3D40"/>
                 </a:solidFill>
                 <a:latin typeface="Verdana"/>
               </a:rPr>
-              <a:t>Objet : je demande une soumission</a:t>
+              <a:t>Combien de temps dure l'essai ?   </a:t>
+            </a:r>
+            <a:r>
+              <a:rPr sz="1400" b="1" i="0">
+                <a:solidFill>
+                  <a:srgbClr val="07734A"/>
+                </a:solidFill>
+                <a:latin typeface="Verdana"/>
+              </a:rPr>
+              <a:t>» quatre semaines</a:t>
             </a:r>
           </a:p>
         </p:txBody>
@@ -14278,16 +15031,16 @@
         </p:nvSpPr>
         <p:spPr>
           <a:xfrm>
-            <a:off x="566928" y="5104384"/>
-            <a:ext cx="11057839" cy="613156"/>
+            <a:off x="566928" y="4891023"/>
+            <a:ext cx="11057839" cy="559816"/>
           </a:xfrm>
           <a:prstGeom prst="roundRect">
             <a:avLst>
-              <a:gd name="adj" fmla="val 23860"/>
+              <a:gd name="adj" fmla="val 26134"/>
             </a:avLst>
           </a:prstGeom>
           <a:solidFill>
-            <a:srgbClr val="FFFFFF"/>
+            <a:srgbClr val="E6F5EE"/>
           </a:solidFill>
           <a:ln w="12700">
             <a:solidFill>
@@ -14324,7 +15077,7 @@
         </p:nvSpPr>
         <p:spPr>
           <a:xfrm>
-            <a:off x="841247" y="5228082"/>
+            <a:off x="841247" y="4988051"/>
             <a:ext cx="365760" cy="365760"/>
           </a:xfrm>
           <a:prstGeom prst="roundRect">
@@ -14368,7 +15121,7 @@
         </p:nvSpPr>
         <p:spPr>
           <a:xfrm>
-            <a:off x="841247" y="5292090"/>
+            <a:off x="841247" y="5052059"/>
             <a:ext cx="365760" cy="256032"/>
           </a:xfrm>
           <a:prstGeom prst="rect">
@@ -14407,8 +15160,8 @@
         </p:nvSpPr>
         <p:spPr>
           <a:xfrm>
-            <a:off x="1344168" y="5259832"/>
-            <a:ext cx="10097719" cy="338836"/>
+            <a:off x="1344168" y="5046471"/>
+            <a:ext cx="10097719" cy="285496"/>
           </a:xfrm>
           <a:prstGeom prst="rect">
             <a:avLst/>
@@ -14427,13 +15180,199 @@
               </a:lnSpc>
             </a:pPr>
             <a:r>
-              <a:rPr sz="1700" b="0" i="0">
+              <a:rPr sz="1400" b="0" i="0">
                 <a:solidFill>
                   <a:srgbClr val="3A3D40"/>
                 </a:solidFill>
                 <a:latin typeface="Verdana"/>
               </a:rPr>
-              <a:t>Objet : la formation aura lieu jeudi</a:t>
+              <a:t>Qu'est-ce qu'on demande au lecteur de faire ?   </a:t>
+            </a:r>
+            <a:r>
+              <a:rPr sz="1400" b="1" i="0">
+                <a:solidFill>
+                  <a:srgbClr val="07734A"/>
+                </a:solidFill>
+                <a:latin typeface="Verdana"/>
+              </a:rPr>
+              <a:t>» noter l'heure de chaque changement</a:t>
+            </a:r>
+          </a:p>
+        </p:txBody>
+      </p:sp>
+      <p:sp>
+        <p:nvSpPr>
+          <p:cNvPr id="28" name="Rounded Rectangle 27"/>
+          <p:cNvSpPr/>
+          <p:nvPr/>
+        </p:nvSpPr>
+        <p:spPr>
+          <a:xfrm>
+            <a:off x="566928" y="5578856"/>
+            <a:ext cx="11057839" cy="559816"/>
+          </a:xfrm>
+          <a:prstGeom prst="roundRect">
+            <a:avLst>
+              <a:gd name="adj" fmla="val 26134"/>
+            </a:avLst>
+          </a:prstGeom>
+          <a:solidFill>
+            <a:srgbClr val="E6F5EE"/>
+          </a:solidFill>
+          <a:ln w="12700">
+            <a:solidFill>
+              <a:srgbClr val="EAEAE8"/>
+            </a:solidFill>
+          </a:ln>
+          <a:effectLst/>
+        </p:spPr>
+        <p:style>
+          <a:lnRef idx="1">
+            <a:schemeClr val="accent1"/>
+          </a:lnRef>
+          <a:fillRef idx="3">
+            <a:schemeClr val="accent1"/>
+          </a:fillRef>
+          <a:effectRef idx="2">
+            <a:schemeClr val="accent1"/>
+          </a:effectRef>
+          <a:fontRef idx="minor">
+            <a:schemeClr val="lt1"/>
+          </a:fontRef>
+        </p:style>
+        <p:txBody>
+          <a:bodyPr rtlCol="0" anchor="ctr"/>
+          <a:lstStyle/>
+          <a:p/>
+        </p:txBody>
+      </p:sp>
+      <p:sp>
+        <p:nvSpPr>
+          <p:cNvPr id="29" name="Rounded Rectangle 28"/>
+          <p:cNvSpPr/>
+          <p:nvPr/>
+        </p:nvSpPr>
+        <p:spPr>
+          <a:xfrm>
+            <a:off x="841247" y="5675884"/>
+            <a:ext cx="365760" cy="365760"/>
+          </a:xfrm>
+          <a:prstGeom prst="roundRect">
+            <a:avLst>
+              <a:gd name="adj" fmla="val 32500"/>
+            </a:avLst>
+          </a:prstGeom>
+          <a:solidFill>
+            <a:srgbClr val="FBEEDC"/>
+          </a:solidFill>
+          <a:ln>
+            <a:noFill/>
+          </a:ln>
+          <a:effectLst/>
+        </p:spPr>
+        <p:style>
+          <a:lnRef idx="1">
+            <a:schemeClr val="accent1"/>
+          </a:lnRef>
+          <a:fillRef idx="3">
+            <a:schemeClr val="accent1"/>
+          </a:fillRef>
+          <a:effectRef idx="2">
+            <a:schemeClr val="accent1"/>
+          </a:effectRef>
+          <a:fontRef idx="minor">
+            <a:schemeClr val="lt1"/>
+          </a:fontRef>
+        </p:style>
+        <p:txBody>
+          <a:bodyPr rtlCol="0" anchor="ctr"/>
+          <a:lstStyle/>
+          <a:p/>
+        </p:txBody>
+      </p:sp>
+      <p:sp>
+        <p:nvSpPr>
+          <p:cNvPr id="30" name="TextBox 29"/>
+          <p:cNvSpPr txBox="1"/>
+          <p:nvPr/>
+        </p:nvSpPr>
+        <p:spPr>
+          <a:xfrm>
+            <a:off x="841247" y="5739892"/>
+            <a:ext cx="365760" cy="256032"/>
+          </a:xfrm>
+          <a:prstGeom prst="rect">
+            <a:avLst/>
+          </a:prstGeom>
+          <a:noFill/>
+        </p:spPr>
+        <p:txBody>
+          <a:bodyPr wrap="square" lIns="0" rIns="0" tIns="0" bIns="0" anchor="t">
+            <a:spAutoFit/>
+          </a:bodyPr>
+          <a:lstStyle/>
+          <a:p>
+            <a:pPr algn="ctr">
+              <a:lnSpc>
+                <a:spcPct val="135000"/>
+              </a:lnSpc>
+            </a:pPr>
+            <a:r>
+              <a:rPr sz="1500" b="1" i="0">
+                <a:solidFill>
+                  <a:srgbClr val="B45309"/>
+                </a:solidFill>
+                <a:latin typeface="Verdana"/>
+              </a:rPr>
+              <a:t>6</a:t>
+            </a:r>
+          </a:p>
+        </p:txBody>
+      </p:sp>
+      <p:sp>
+        <p:nvSpPr>
+          <p:cNvPr id="31" name="TextBox 30"/>
+          <p:cNvSpPr txBox="1"/>
+          <p:nvPr/>
+        </p:nvSpPr>
+        <p:spPr>
+          <a:xfrm>
+            <a:off x="1344168" y="5734304"/>
+            <a:ext cx="10097719" cy="285496"/>
+          </a:xfrm>
+          <a:prstGeom prst="rect">
+            <a:avLst/>
+          </a:prstGeom>
+          <a:noFill/>
+        </p:spPr>
+        <p:txBody>
+          <a:bodyPr wrap="square" lIns="0" rIns="0" tIns="0" bIns="0" anchor="t">
+            <a:spAutoFit/>
+          </a:bodyPr>
+          <a:lstStyle/>
+          <a:p>
+            <a:pPr algn="l">
+              <a:lnSpc>
+                <a:spcPct val="140000"/>
+              </a:lnSpc>
+            </a:pPr>
+            <a:r>
+              <a:rPr sz="1400" b="0" i="0">
+                <a:solidFill>
+                  <a:srgbClr val="3A3D40"/>
+                </a:solidFill>
+                <a:latin typeface="Verdana"/>
+              </a:rPr>
+              <a:t>Qu'est-ce qui ne change pas pendant l'essai ?   </a:t>
+            </a:r>
+            <a:r>
+              <a:rPr sz="1400" b="1" i="0">
+                <a:solidFill>
+                  <a:srgbClr val="07734A"/>
+                </a:solidFill>
+                <a:latin typeface="Verdana"/>
+              </a:rPr>
+              <a:t>» les quotas de production</a:t>
             </a:r>
           </a:p>
         </p:txBody>
